--- a/software testing/notes/Week2 Types of testing.pptx
+++ b/software testing/notes/Week2 Types of testing.pptx
@@ -1,41 +1,41 @@
 
 <file path=ppt/presentation.xml><?xml version="1.0" encoding="utf-8"?>
-<p:presentation xmlns:a="http://schemas.openxmlformats.org/drawingml/2006/main" xmlns:r="http://schemas.openxmlformats.org/officeDocument/2006/relationships" xmlns:p="http://schemas.openxmlformats.org/presentationml/2006/main" saveSubsetFonts="1">
+<p:presentation xmlns:a="http://schemas.openxmlformats.org/drawingml/2006/main" xmlns:r="http://schemas.openxmlformats.org/officeDocument/2006/relationships" xmlns:p="http://schemas.openxmlformats.org/presentationml/2006/main">
   <p:sldMasterIdLst>
-    <p:sldMasterId id="2147483660" r:id="rId1"/>
+    <p:sldMasterId id="2147483648" r:id="rId1"/>
   </p:sldMasterIdLst>
   <p:notesMasterIdLst>
-    <p:notesMasterId r:id="rId30"/>
+    <p:notesMasterId r:id="rId5"/>
   </p:notesMasterIdLst>
   <p:sldIdLst>
-    <p:sldId id="256" r:id="rId2"/>
-    <p:sldId id="257" r:id="rId3"/>
-    <p:sldId id="266" r:id="rId4"/>
-    <p:sldId id="265" r:id="rId5"/>
-    <p:sldId id="258" r:id="rId6"/>
-    <p:sldId id="259" r:id="rId7"/>
-    <p:sldId id="260" r:id="rId8"/>
-    <p:sldId id="261" r:id="rId9"/>
-    <p:sldId id="262" r:id="rId10"/>
-    <p:sldId id="267" r:id="rId11"/>
-    <p:sldId id="263" r:id="rId12"/>
-    <p:sldId id="264" r:id="rId13"/>
-    <p:sldId id="268" r:id="rId14"/>
-    <p:sldId id="269" r:id="rId15"/>
-    <p:sldId id="270" r:id="rId16"/>
-    <p:sldId id="271" r:id="rId17"/>
-    <p:sldId id="272" r:id="rId18"/>
-    <p:sldId id="274" r:id="rId19"/>
-    <p:sldId id="275" r:id="rId20"/>
-    <p:sldId id="276" r:id="rId21"/>
-    <p:sldId id="277" r:id="rId22"/>
-    <p:sldId id="278" r:id="rId23"/>
-    <p:sldId id="279" r:id="rId24"/>
-    <p:sldId id="280" r:id="rId25"/>
-    <p:sldId id="281" r:id="rId26"/>
-    <p:sldId id="282" r:id="rId27"/>
-    <p:sldId id="283" r:id="rId28"/>
-    <p:sldId id="284" r:id="rId29"/>
+    <p:sldId id="256" r:id="rId3"/>
+    <p:sldId id="257" r:id="rId4"/>
+    <p:sldId id="266" r:id="rId6"/>
+    <p:sldId id="265" r:id="rId7"/>
+    <p:sldId id="258" r:id="rId8"/>
+    <p:sldId id="259" r:id="rId9"/>
+    <p:sldId id="260" r:id="rId10"/>
+    <p:sldId id="261" r:id="rId11"/>
+    <p:sldId id="262" r:id="rId12"/>
+    <p:sldId id="267" r:id="rId13"/>
+    <p:sldId id="263" r:id="rId14"/>
+    <p:sldId id="264" r:id="rId15"/>
+    <p:sldId id="268" r:id="rId16"/>
+    <p:sldId id="269" r:id="rId17"/>
+    <p:sldId id="270" r:id="rId18"/>
+    <p:sldId id="271" r:id="rId19"/>
+    <p:sldId id="272" r:id="rId20"/>
+    <p:sldId id="274" r:id="rId21"/>
+    <p:sldId id="275" r:id="rId22"/>
+    <p:sldId id="276" r:id="rId23"/>
+    <p:sldId id="277" r:id="rId24"/>
+    <p:sldId id="278" r:id="rId25"/>
+    <p:sldId id="279" r:id="rId26"/>
+    <p:sldId id="280" r:id="rId27"/>
+    <p:sldId id="281" r:id="rId28"/>
+    <p:sldId id="282" r:id="rId29"/>
+    <p:sldId id="283" r:id="rId30"/>
+    <p:sldId id="284" r:id="rId31"/>
   </p:sldIdLst>
   <p:sldSz cx="12192000" cy="6858000"/>
   <p:notesSz cx="6858000" cy="9144000"/>
@@ -134,11 +134,6 @@
       </a:defRPr>
     </a:lvl9pPr>
   </p:defaultTextStyle>
-  <p:extLst>
-    <p:ext uri="{EFAFB233-063F-42B5-8137-9DF3F51BA10A}">
-      <p15:sldGuideLst xmlns:p15="http://schemas.microsoft.com/office/powerpoint/2012/main"/>
-    </p:ext>
-  </p:extLst>
 </p:presentation>
 </file>
 
@@ -224,7 +219,6 @@
           <a:p>
             <a:fld id="{DB9B44A1-D48A-4F80-9F87-F76263BF8879}" type="datetimeFigureOut">
               <a:rPr lang="en-US" smtClean="0"/>
-              <a:t>1/28/2026</a:t>
             </a:fld>
             <a:endParaRPr lang="en-US"/>
           </a:p>
@@ -291,6 +285,7 @@
               <a:rPr lang="en-US" smtClean="0"/>
               <a:t>Click to edit Master text styles</a:t>
             </a:r>
+            <a:endParaRPr lang="en-US" smtClean="0"/>
           </a:p>
           <a:p>
             <a:pPr lvl="1"/>
@@ -298,6 +293,7 @@
               <a:rPr lang="en-US" smtClean="0"/>
               <a:t>Second level</a:t>
             </a:r>
+            <a:endParaRPr lang="en-US" smtClean="0"/>
           </a:p>
           <a:p>
             <a:pPr lvl="2"/>
@@ -305,6 +301,7 @@
               <a:rPr lang="en-US" smtClean="0"/>
               <a:t>Third level</a:t>
             </a:r>
+            <a:endParaRPr lang="en-US" smtClean="0"/>
           </a:p>
           <a:p>
             <a:pPr lvl="3"/>
@@ -312,6 +309,7 @@
               <a:rPr lang="en-US" smtClean="0"/>
               <a:t>Fourth level</a:t>
             </a:r>
+            <a:endParaRPr lang="en-US" smtClean="0"/>
           </a:p>
           <a:p>
             <a:pPr lvl="4"/>
@@ -383,18 +381,12 @@
           <a:p>
             <a:fld id="{1A253EEC-8767-4981-BCAD-308438287197}" type="slidenum">
               <a:rPr lang="en-US" smtClean="0"/>
-              <a:t>‹#›</a:t>
             </a:fld>
             <a:endParaRPr lang="en-US"/>
           </a:p>
         </p:txBody>
       </p:sp>
     </p:spTree>
-    <p:extLst>
-      <p:ext uri="{BB962C8B-B14F-4D97-AF65-F5344CB8AC3E}">
-        <p14:creationId xmlns:p14="http://schemas.microsoft.com/office/powerpoint/2010/main" val="3059235064"/>
-      </p:ext>
-    </p:extLst>
   </p:cSld>
   <p:clrMap bg1="lt1" tx1="dk1" bg2="lt2" tx2="dk2" accent1="accent1" accent2="accent2" accent3="accent3" accent4="accent4" accent5="accent5" accent6="accent6" hlink="hlink" folHlink="folHlink"/>
   <p:notesStyle>
@@ -519,9 +511,7 @@
             <p:ph type="hdr" sz="quarter"/>
           </p:nvPr>
         </p:nvSpPr>
-        <p:spPr>
-          <a:ln/>
-        </p:spPr>
+        <p:spPr/>
         <p:txBody>
           <a:bodyPr/>
           <a:lstStyle/>
@@ -530,6 +520,7 @@
               <a:rPr lang="en-US"/>
               <a:t>Handouts</a:t>
             </a:r>
+            <a:endParaRPr lang="en-US"/>
           </a:p>
         </p:txBody>
       </p:sp>
@@ -543,17 +534,13 @@
             <p:ph type="sldNum" sz="quarter" idx="5"/>
           </p:nvPr>
         </p:nvSpPr>
-        <p:spPr>
-          <a:ln/>
-        </p:spPr>
+        <p:spPr/>
         <p:txBody>
           <a:bodyPr/>
           <a:lstStyle/>
           <a:p>
             <a:fld id="{E60FA2AE-558B-418D-8070-76CACAAD0D4C}" type="slidenum">
               <a:rPr lang="en-US"/>
-              <a:pPr/>
-              <a:t>2</a:t>
             </a:fld>
             <a:endParaRPr lang="en-US"/>
           </a:p>
@@ -569,9 +556,7 @@
             <p:ph type="sldImg"/>
           </p:nvPr>
         </p:nvSpPr>
-        <p:spPr>
-          <a:ln/>
-        </p:spPr>
+        <p:spPr/>
       </p:sp>
       <p:sp>
         <p:nvSpPr>
@@ -593,11 +578,6 @@
         </p:txBody>
       </p:sp>
     </p:spTree>
-    <p:extLst>
-      <p:ext uri="{BB962C8B-B14F-4D97-AF65-F5344CB8AC3E}">
-        <p14:creationId xmlns:p14="http://schemas.microsoft.com/office/powerpoint/2010/main" val="2793778614"/>
-      </p:ext>
-    </p:extLst>
   </p:cSld>
   <p:clrMapOvr>
     <a:masterClrMapping/>
@@ -632,9 +612,7 @@
             <p:ph type="hdr" sz="quarter"/>
           </p:nvPr>
         </p:nvSpPr>
-        <p:spPr>
-          <a:ln/>
-        </p:spPr>
+        <p:spPr/>
         <p:txBody>
           <a:bodyPr/>
           <a:lstStyle/>
@@ -643,6 +621,7 @@
               <a:rPr lang="en-US"/>
               <a:t>Handouts</a:t>
             </a:r>
+            <a:endParaRPr lang="en-US"/>
           </a:p>
         </p:txBody>
       </p:sp>
@@ -656,17 +635,13 @@
             <p:ph type="sldNum" sz="quarter" idx="5"/>
           </p:nvPr>
         </p:nvSpPr>
-        <p:spPr>
-          <a:ln/>
-        </p:spPr>
+        <p:spPr/>
         <p:txBody>
           <a:bodyPr/>
           <a:lstStyle/>
           <a:p>
             <a:fld id="{AB4D9772-D6C8-41D9-9A46-B5BDB899EE1E}" type="slidenum">
               <a:rPr lang="en-US"/>
-              <a:pPr/>
-              <a:t>12</a:t>
             </a:fld>
             <a:endParaRPr lang="en-US"/>
           </a:p>
@@ -682,9 +657,7 @@
             <p:ph type="sldImg"/>
           </p:nvPr>
         </p:nvSpPr>
-        <p:spPr>
-          <a:ln/>
-        </p:spPr>
+        <p:spPr/>
       </p:sp>
       <p:sp>
         <p:nvSpPr>
@@ -705,15 +678,11 @@
               <a:rPr lang="en-US" dirty="0" smtClean="0"/>
               <a:t>A domain error occurs when a specific input data causes the program to execute a wrong, that is, undesired, path in the program.</a:t>
             </a:r>
+            <a:endParaRPr lang="en-US" dirty="0" smtClean="0"/>
           </a:p>
         </p:txBody>
       </p:sp>
     </p:spTree>
-    <p:extLst>
-      <p:ext uri="{BB962C8B-B14F-4D97-AF65-F5344CB8AC3E}">
-        <p14:creationId xmlns:p14="http://schemas.microsoft.com/office/powerpoint/2010/main" val="3861982287"/>
-      </p:ext>
-    </p:extLst>
   </p:cSld>
   <p:clrMapOvr>
     <a:masterClrMapping/>
@@ -748,9 +717,7 @@
             <p:ph type="hdr" sz="quarter"/>
           </p:nvPr>
         </p:nvSpPr>
-        <p:spPr>
-          <a:ln/>
-        </p:spPr>
+        <p:spPr/>
         <p:txBody>
           <a:bodyPr/>
           <a:lstStyle/>
@@ -759,6 +726,7 @@
               <a:rPr lang="en-US"/>
               <a:t>Handouts</a:t>
             </a:r>
+            <a:endParaRPr lang="en-US"/>
           </a:p>
         </p:txBody>
       </p:sp>
@@ -772,17 +740,13 @@
             <p:ph type="sldNum" sz="quarter" idx="5"/>
           </p:nvPr>
         </p:nvSpPr>
-        <p:spPr>
-          <a:ln/>
-        </p:spPr>
+        <p:spPr/>
         <p:txBody>
           <a:bodyPr/>
           <a:lstStyle/>
           <a:p>
             <a:fld id="{AB4D9772-D6C8-41D9-9A46-B5BDB899EE1E}" type="slidenum">
               <a:rPr lang="en-US"/>
-              <a:pPr/>
-              <a:t>13</a:t>
             </a:fld>
             <a:endParaRPr lang="en-US"/>
           </a:p>
@@ -798,9 +762,7 @@
             <p:ph type="sldImg"/>
           </p:nvPr>
         </p:nvSpPr>
-        <p:spPr>
-          <a:ln/>
-        </p:spPr>
+        <p:spPr/>
       </p:sp>
       <p:sp>
         <p:nvSpPr>
@@ -822,11 +784,6 @@
         </p:txBody>
       </p:sp>
     </p:spTree>
-    <p:extLst>
-      <p:ext uri="{BB962C8B-B14F-4D97-AF65-F5344CB8AC3E}">
-        <p14:creationId xmlns:p14="http://schemas.microsoft.com/office/powerpoint/2010/main" val="888610440"/>
-      </p:ext>
-    </p:extLst>
   </p:cSld>
   <p:clrMapOvr>
     <a:masterClrMapping/>
@@ -861,9 +818,7 @@
             <p:ph type="hdr" sz="quarter"/>
           </p:nvPr>
         </p:nvSpPr>
-        <p:spPr>
-          <a:ln/>
-        </p:spPr>
+        <p:spPr/>
         <p:txBody>
           <a:bodyPr/>
           <a:lstStyle/>
@@ -872,6 +827,7 @@
               <a:rPr lang="en-US"/>
               <a:t>Handouts</a:t>
             </a:r>
+            <a:endParaRPr lang="en-US"/>
           </a:p>
         </p:txBody>
       </p:sp>
@@ -885,17 +841,13 @@
             <p:ph type="sldNum" sz="quarter" idx="5"/>
           </p:nvPr>
         </p:nvSpPr>
-        <p:spPr>
-          <a:ln/>
-        </p:spPr>
+        <p:spPr/>
         <p:txBody>
           <a:bodyPr/>
           <a:lstStyle/>
           <a:p>
             <a:fld id="{AB4D9772-D6C8-41D9-9A46-B5BDB899EE1E}" type="slidenum">
               <a:rPr lang="en-US"/>
-              <a:pPr/>
-              <a:t>14</a:t>
             </a:fld>
             <a:endParaRPr lang="en-US"/>
           </a:p>
@@ -911,9 +863,7 @@
             <p:ph type="sldImg"/>
           </p:nvPr>
         </p:nvSpPr>
-        <p:spPr>
-          <a:ln/>
-        </p:spPr>
+        <p:spPr/>
       </p:sp>
       <p:sp>
         <p:nvSpPr>
@@ -935,11 +885,6 @@
         </p:txBody>
       </p:sp>
     </p:spTree>
-    <p:extLst>
-      <p:ext uri="{BB962C8B-B14F-4D97-AF65-F5344CB8AC3E}">
-        <p14:creationId xmlns:p14="http://schemas.microsoft.com/office/powerpoint/2010/main" val="1457561880"/>
-      </p:ext>
-    </p:extLst>
   </p:cSld>
   <p:clrMapOvr>
     <a:masterClrMapping/>
@@ -974,9 +919,7 @@
             <p:ph type="hdr" sz="quarter"/>
           </p:nvPr>
         </p:nvSpPr>
-        <p:spPr>
-          <a:ln/>
-        </p:spPr>
+        <p:spPr/>
         <p:txBody>
           <a:bodyPr/>
           <a:lstStyle/>
@@ -985,6 +928,7 @@
               <a:rPr lang="en-US"/>
               <a:t>Handouts</a:t>
             </a:r>
+            <a:endParaRPr lang="en-US"/>
           </a:p>
         </p:txBody>
       </p:sp>
@@ -998,17 +942,13 @@
             <p:ph type="sldNum" sz="quarter" idx="5"/>
           </p:nvPr>
         </p:nvSpPr>
-        <p:spPr>
-          <a:ln/>
-        </p:spPr>
+        <p:spPr/>
         <p:txBody>
           <a:bodyPr/>
           <a:lstStyle/>
           <a:p>
             <a:fld id="{AB4D9772-D6C8-41D9-9A46-B5BDB899EE1E}" type="slidenum">
               <a:rPr lang="en-US"/>
-              <a:pPr/>
-              <a:t>15</a:t>
             </a:fld>
             <a:endParaRPr lang="en-US"/>
           </a:p>
@@ -1024,9 +964,7 @@
             <p:ph type="sldImg"/>
           </p:nvPr>
         </p:nvSpPr>
-        <p:spPr>
-          <a:ln/>
-        </p:spPr>
+        <p:spPr/>
       </p:sp>
       <p:sp>
         <p:nvSpPr>
@@ -1048,11 +986,6 @@
         </p:txBody>
       </p:sp>
     </p:spTree>
-    <p:extLst>
-      <p:ext uri="{BB962C8B-B14F-4D97-AF65-F5344CB8AC3E}">
-        <p14:creationId xmlns:p14="http://schemas.microsoft.com/office/powerpoint/2010/main" val="4040955145"/>
-      </p:ext>
-    </p:extLst>
   </p:cSld>
   <p:clrMapOvr>
     <a:masterClrMapping/>
@@ -1087,9 +1020,7 @@
             <p:ph type="hdr" sz="quarter"/>
           </p:nvPr>
         </p:nvSpPr>
-        <p:spPr>
-          <a:ln/>
-        </p:spPr>
+        <p:spPr/>
         <p:txBody>
           <a:bodyPr/>
           <a:lstStyle/>
@@ -1098,6 +1029,7 @@
               <a:rPr lang="en-US"/>
               <a:t>Handouts</a:t>
             </a:r>
+            <a:endParaRPr lang="en-US"/>
           </a:p>
         </p:txBody>
       </p:sp>
@@ -1111,17 +1043,13 @@
             <p:ph type="sldNum" sz="quarter" idx="5"/>
           </p:nvPr>
         </p:nvSpPr>
-        <p:spPr>
-          <a:ln/>
-        </p:spPr>
+        <p:spPr/>
         <p:txBody>
           <a:bodyPr/>
           <a:lstStyle/>
           <a:p>
             <a:fld id="{AB4D9772-D6C8-41D9-9A46-B5BDB899EE1E}" type="slidenum">
               <a:rPr lang="en-US"/>
-              <a:pPr/>
-              <a:t>16</a:t>
             </a:fld>
             <a:endParaRPr lang="en-US"/>
           </a:p>
@@ -1137,9 +1065,7 @@
             <p:ph type="sldImg"/>
           </p:nvPr>
         </p:nvSpPr>
-        <p:spPr>
-          <a:ln/>
-        </p:spPr>
+        <p:spPr/>
       </p:sp>
       <p:sp>
         <p:nvSpPr>
@@ -1161,11 +1087,6 @@
         </p:txBody>
       </p:sp>
     </p:spTree>
-    <p:extLst>
-      <p:ext uri="{BB962C8B-B14F-4D97-AF65-F5344CB8AC3E}">
-        <p14:creationId xmlns:p14="http://schemas.microsoft.com/office/powerpoint/2010/main" val="3136591472"/>
-      </p:ext>
-    </p:extLst>
   </p:cSld>
   <p:clrMapOvr>
     <a:masterClrMapping/>
@@ -1200,9 +1121,7 @@
             <p:ph type="hdr" sz="quarter"/>
           </p:nvPr>
         </p:nvSpPr>
-        <p:spPr>
-          <a:ln/>
-        </p:spPr>
+        <p:spPr/>
         <p:txBody>
           <a:bodyPr/>
           <a:lstStyle/>
@@ -1211,6 +1130,7 @@
               <a:rPr lang="en-US"/>
               <a:t>Handouts</a:t>
             </a:r>
+            <a:endParaRPr lang="en-US"/>
           </a:p>
         </p:txBody>
       </p:sp>
@@ -1224,17 +1144,13 @@
             <p:ph type="sldNum" sz="quarter" idx="5"/>
           </p:nvPr>
         </p:nvSpPr>
-        <p:spPr>
-          <a:ln/>
-        </p:spPr>
+        <p:spPr/>
         <p:txBody>
           <a:bodyPr/>
           <a:lstStyle/>
           <a:p>
             <a:fld id="{AB4D9772-D6C8-41D9-9A46-B5BDB899EE1E}" type="slidenum">
               <a:rPr lang="en-US"/>
-              <a:pPr/>
-              <a:t>17</a:t>
             </a:fld>
             <a:endParaRPr lang="en-US"/>
           </a:p>
@@ -1250,9 +1166,7 @@
             <p:ph type="sldImg"/>
           </p:nvPr>
         </p:nvSpPr>
-        <p:spPr>
-          <a:ln/>
-        </p:spPr>
+        <p:spPr/>
       </p:sp>
       <p:sp>
         <p:nvSpPr>
@@ -1274,11 +1188,6 @@
         </p:txBody>
       </p:sp>
     </p:spTree>
-    <p:extLst>
-      <p:ext uri="{BB962C8B-B14F-4D97-AF65-F5344CB8AC3E}">
-        <p14:creationId xmlns:p14="http://schemas.microsoft.com/office/powerpoint/2010/main" val="4278080328"/>
-      </p:ext>
-    </p:extLst>
   </p:cSld>
   <p:clrMapOvr>
     <a:masterClrMapping/>
@@ -1313,9 +1222,7 @@
             <p:ph type="hdr" sz="quarter"/>
           </p:nvPr>
         </p:nvSpPr>
-        <p:spPr>
-          <a:ln/>
-        </p:spPr>
+        <p:spPr/>
         <p:txBody>
           <a:bodyPr/>
           <a:lstStyle/>
@@ -1324,6 +1231,7 @@
               <a:rPr lang="en-US"/>
               <a:t>Handouts</a:t>
             </a:r>
+            <a:endParaRPr lang="en-US"/>
           </a:p>
         </p:txBody>
       </p:sp>
@@ -1337,17 +1245,13 @@
             <p:ph type="sldNum" sz="quarter" idx="5"/>
           </p:nvPr>
         </p:nvSpPr>
-        <p:spPr>
-          <a:ln/>
-        </p:spPr>
+        <p:spPr/>
         <p:txBody>
           <a:bodyPr/>
           <a:lstStyle/>
           <a:p>
             <a:fld id="{AB4D9772-D6C8-41D9-9A46-B5BDB899EE1E}" type="slidenum">
               <a:rPr lang="en-US"/>
-              <a:pPr/>
-              <a:t>18</a:t>
             </a:fld>
             <a:endParaRPr lang="en-US"/>
           </a:p>
@@ -1363,9 +1267,7 @@
             <p:ph type="sldImg"/>
           </p:nvPr>
         </p:nvSpPr>
-        <p:spPr>
-          <a:ln/>
-        </p:spPr>
+        <p:spPr/>
       </p:sp>
       <p:sp>
         <p:nvSpPr>
@@ -1387,11 +1289,6 @@
         </p:txBody>
       </p:sp>
     </p:spTree>
-    <p:extLst>
-      <p:ext uri="{BB962C8B-B14F-4D97-AF65-F5344CB8AC3E}">
-        <p14:creationId xmlns:p14="http://schemas.microsoft.com/office/powerpoint/2010/main" val="1766854023"/>
-      </p:ext>
-    </p:extLst>
   </p:cSld>
   <p:clrMapOvr>
     <a:masterClrMapping/>
@@ -1426,9 +1323,7 @@
             <p:ph type="hdr" sz="quarter"/>
           </p:nvPr>
         </p:nvSpPr>
-        <p:spPr>
-          <a:ln/>
-        </p:spPr>
+        <p:spPr/>
         <p:txBody>
           <a:bodyPr/>
           <a:lstStyle/>
@@ -1437,6 +1332,7 @@
               <a:rPr lang="en-US"/>
               <a:t>Handouts</a:t>
             </a:r>
+            <a:endParaRPr lang="en-US"/>
           </a:p>
         </p:txBody>
       </p:sp>
@@ -1450,17 +1346,13 @@
             <p:ph type="sldNum" sz="quarter" idx="5"/>
           </p:nvPr>
         </p:nvSpPr>
-        <p:spPr>
-          <a:ln/>
-        </p:spPr>
+        <p:spPr/>
         <p:txBody>
           <a:bodyPr/>
           <a:lstStyle/>
           <a:p>
             <a:fld id="{AB4D9772-D6C8-41D9-9A46-B5BDB899EE1E}" type="slidenum">
               <a:rPr lang="en-US"/>
-              <a:pPr/>
-              <a:t>19</a:t>
             </a:fld>
             <a:endParaRPr lang="en-US"/>
           </a:p>
@@ -1476,9 +1368,7 @@
             <p:ph type="sldImg"/>
           </p:nvPr>
         </p:nvSpPr>
-        <p:spPr>
-          <a:ln/>
-        </p:spPr>
+        <p:spPr/>
       </p:sp>
       <p:sp>
         <p:nvSpPr>
@@ -1500,11 +1390,6 @@
         </p:txBody>
       </p:sp>
     </p:spTree>
-    <p:extLst>
-      <p:ext uri="{BB962C8B-B14F-4D97-AF65-F5344CB8AC3E}">
-        <p14:creationId xmlns:p14="http://schemas.microsoft.com/office/powerpoint/2010/main" val="973675020"/>
-      </p:ext>
-    </p:extLst>
   </p:cSld>
   <p:clrMapOvr>
     <a:masterClrMapping/>
@@ -1539,9 +1424,7 @@
             <p:ph type="hdr" sz="quarter"/>
           </p:nvPr>
         </p:nvSpPr>
-        <p:spPr>
-          <a:ln/>
-        </p:spPr>
+        <p:spPr/>
         <p:txBody>
           <a:bodyPr/>
           <a:lstStyle/>
@@ -1550,6 +1433,7 @@
               <a:rPr lang="en-US"/>
               <a:t>Handouts</a:t>
             </a:r>
+            <a:endParaRPr lang="en-US"/>
           </a:p>
         </p:txBody>
       </p:sp>
@@ -1563,17 +1447,13 @@
             <p:ph type="sldNum" sz="quarter" idx="5"/>
           </p:nvPr>
         </p:nvSpPr>
-        <p:spPr>
-          <a:ln/>
-        </p:spPr>
+        <p:spPr/>
         <p:txBody>
           <a:bodyPr/>
           <a:lstStyle/>
           <a:p>
             <a:fld id="{AB4D9772-D6C8-41D9-9A46-B5BDB899EE1E}" type="slidenum">
               <a:rPr lang="en-US"/>
-              <a:pPr/>
-              <a:t>20</a:t>
             </a:fld>
             <a:endParaRPr lang="en-US"/>
           </a:p>
@@ -1589,9 +1469,7 @@
             <p:ph type="sldImg"/>
           </p:nvPr>
         </p:nvSpPr>
-        <p:spPr>
-          <a:ln/>
-        </p:spPr>
+        <p:spPr/>
       </p:sp>
       <p:sp>
         <p:nvSpPr>
@@ -1613,11 +1491,6 @@
         </p:txBody>
       </p:sp>
     </p:spTree>
-    <p:extLst>
-      <p:ext uri="{BB962C8B-B14F-4D97-AF65-F5344CB8AC3E}">
-        <p14:creationId xmlns:p14="http://schemas.microsoft.com/office/powerpoint/2010/main" val="3268771849"/>
-      </p:ext>
-    </p:extLst>
   </p:cSld>
   <p:clrMapOvr>
     <a:masterClrMapping/>
@@ -1652,9 +1525,7 @@
             <p:ph type="hdr" sz="quarter"/>
           </p:nvPr>
         </p:nvSpPr>
-        <p:spPr>
-          <a:ln/>
-        </p:spPr>
+        <p:spPr/>
         <p:txBody>
           <a:bodyPr/>
           <a:lstStyle/>
@@ -1663,6 +1534,7 @@
               <a:rPr lang="en-US"/>
               <a:t>Handouts</a:t>
             </a:r>
+            <a:endParaRPr lang="en-US"/>
           </a:p>
         </p:txBody>
       </p:sp>
@@ -1676,17 +1548,13 @@
             <p:ph type="sldNum" sz="quarter" idx="5"/>
           </p:nvPr>
         </p:nvSpPr>
-        <p:spPr>
-          <a:ln/>
-        </p:spPr>
+        <p:spPr/>
         <p:txBody>
           <a:bodyPr/>
           <a:lstStyle/>
           <a:p>
             <a:fld id="{AB4D9772-D6C8-41D9-9A46-B5BDB899EE1E}" type="slidenum">
               <a:rPr lang="en-US"/>
-              <a:pPr/>
-              <a:t>21</a:t>
             </a:fld>
             <a:endParaRPr lang="en-US"/>
           </a:p>
@@ -1702,9 +1570,7 @@
             <p:ph type="sldImg"/>
           </p:nvPr>
         </p:nvSpPr>
-        <p:spPr>
-          <a:ln/>
-        </p:spPr>
+        <p:spPr/>
       </p:sp>
       <p:sp>
         <p:nvSpPr>
@@ -1726,11 +1592,6 @@
         </p:txBody>
       </p:sp>
     </p:spTree>
-    <p:extLst>
-      <p:ext uri="{BB962C8B-B14F-4D97-AF65-F5344CB8AC3E}">
-        <p14:creationId xmlns:p14="http://schemas.microsoft.com/office/powerpoint/2010/main" val="825537642"/>
-      </p:ext>
-    </p:extLst>
   </p:cSld>
   <p:clrMapOvr>
     <a:masterClrMapping/>
@@ -1765,9 +1626,7 @@
             <p:ph type="hdr" sz="quarter"/>
           </p:nvPr>
         </p:nvSpPr>
-        <p:spPr>
-          <a:ln/>
-        </p:spPr>
+        <p:spPr/>
         <p:txBody>
           <a:bodyPr/>
           <a:lstStyle/>
@@ -1776,6 +1635,7 @@
               <a:rPr lang="en-US"/>
               <a:t>Handouts</a:t>
             </a:r>
+            <a:endParaRPr lang="en-US"/>
           </a:p>
         </p:txBody>
       </p:sp>
@@ -1789,17 +1649,13 @@
             <p:ph type="sldNum" sz="quarter" idx="5"/>
           </p:nvPr>
         </p:nvSpPr>
-        <p:spPr>
-          <a:ln/>
-        </p:spPr>
+        <p:spPr/>
         <p:txBody>
           <a:bodyPr/>
           <a:lstStyle/>
           <a:p>
             <a:fld id="{E60FA2AE-558B-418D-8070-76CACAAD0D4C}" type="slidenum">
               <a:rPr lang="en-US"/>
-              <a:pPr/>
-              <a:t>3</a:t>
             </a:fld>
             <a:endParaRPr lang="en-US"/>
           </a:p>
@@ -1815,9 +1671,7 @@
             <p:ph type="sldImg"/>
           </p:nvPr>
         </p:nvSpPr>
-        <p:spPr>
-          <a:ln/>
-        </p:spPr>
+        <p:spPr/>
       </p:sp>
       <p:sp>
         <p:nvSpPr>
@@ -1839,11 +1693,6 @@
         </p:txBody>
       </p:sp>
     </p:spTree>
-    <p:extLst>
-      <p:ext uri="{BB962C8B-B14F-4D97-AF65-F5344CB8AC3E}">
-        <p14:creationId xmlns:p14="http://schemas.microsoft.com/office/powerpoint/2010/main" val="3231128423"/>
-      </p:ext>
-    </p:extLst>
   </p:cSld>
   <p:clrMapOvr>
     <a:masterClrMapping/>
@@ -1878,9 +1727,7 @@
             <p:ph type="hdr" sz="quarter"/>
           </p:nvPr>
         </p:nvSpPr>
-        <p:spPr>
-          <a:ln/>
-        </p:spPr>
+        <p:spPr/>
         <p:txBody>
           <a:bodyPr/>
           <a:lstStyle/>
@@ -1889,6 +1736,7 @@
               <a:rPr lang="en-US"/>
               <a:t>Handouts</a:t>
             </a:r>
+            <a:endParaRPr lang="en-US"/>
           </a:p>
         </p:txBody>
       </p:sp>
@@ -1902,17 +1750,13 @@
             <p:ph type="sldNum" sz="quarter" idx="5"/>
           </p:nvPr>
         </p:nvSpPr>
-        <p:spPr>
-          <a:ln/>
-        </p:spPr>
+        <p:spPr/>
         <p:txBody>
           <a:bodyPr/>
           <a:lstStyle/>
           <a:p>
             <a:fld id="{AB4D9772-D6C8-41D9-9A46-B5BDB899EE1E}" type="slidenum">
               <a:rPr lang="en-US"/>
-              <a:pPr/>
-              <a:t>22</a:t>
             </a:fld>
             <a:endParaRPr lang="en-US"/>
           </a:p>
@@ -1928,9 +1772,7 @@
             <p:ph type="sldImg"/>
           </p:nvPr>
         </p:nvSpPr>
-        <p:spPr>
-          <a:ln/>
-        </p:spPr>
+        <p:spPr/>
       </p:sp>
       <p:sp>
         <p:nvSpPr>
@@ -1952,11 +1794,6 @@
         </p:txBody>
       </p:sp>
     </p:spTree>
-    <p:extLst>
-      <p:ext uri="{BB962C8B-B14F-4D97-AF65-F5344CB8AC3E}">
-        <p14:creationId xmlns:p14="http://schemas.microsoft.com/office/powerpoint/2010/main" val="2215356706"/>
-      </p:ext>
-    </p:extLst>
   </p:cSld>
   <p:clrMapOvr>
     <a:masterClrMapping/>
@@ -1991,9 +1828,7 @@
             <p:ph type="hdr" sz="quarter"/>
           </p:nvPr>
         </p:nvSpPr>
-        <p:spPr>
-          <a:ln/>
-        </p:spPr>
+        <p:spPr/>
         <p:txBody>
           <a:bodyPr/>
           <a:lstStyle/>
@@ -2002,6 +1837,7 @@
               <a:rPr lang="en-US"/>
               <a:t>Handouts</a:t>
             </a:r>
+            <a:endParaRPr lang="en-US"/>
           </a:p>
         </p:txBody>
       </p:sp>
@@ -2015,17 +1851,13 @@
             <p:ph type="sldNum" sz="quarter" idx="5"/>
           </p:nvPr>
         </p:nvSpPr>
-        <p:spPr>
-          <a:ln/>
-        </p:spPr>
+        <p:spPr/>
         <p:txBody>
           <a:bodyPr/>
           <a:lstStyle/>
           <a:p>
             <a:fld id="{AB4D9772-D6C8-41D9-9A46-B5BDB899EE1E}" type="slidenum">
               <a:rPr lang="en-US"/>
-              <a:pPr/>
-              <a:t>23</a:t>
             </a:fld>
             <a:endParaRPr lang="en-US"/>
           </a:p>
@@ -2041,9 +1873,7 @@
             <p:ph type="sldImg"/>
           </p:nvPr>
         </p:nvSpPr>
-        <p:spPr>
-          <a:ln/>
-        </p:spPr>
+        <p:spPr/>
       </p:sp>
       <p:sp>
         <p:nvSpPr>
@@ -2065,11 +1895,6 @@
         </p:txBody>
       </p:sp>
     </p:spTree>
-    <p:extLst>
-      <p:ext uri="{BB962C8B-B14F-4D97-AF65-F5344CB8AC3E}">
-        <p14:creationId xmlns:p14="http://schemas.microsoft.com/office/powerpoint/2010/main" val="3131540056"/>
-      </p:ext>
-    </p:extLst>
   </p:cSld>
   <p:clrMapOvr>
     <a:masterClrMapping/>
@@ -2104,9 +1929,7 @@
             <p:ph type="hdr" sz="quarter"/>
           </p:nvPr>
         </p:nvSpPr>
-        <p:spPr>
-          <a:ln/>
-        </p:spPr>
+        <p:spPr/>
         <p:txBody>
           <a:bodyPr/>
           <a:lstStyle/>
@@ -2115,6 +1938,7 @@
               <a:rPr lang="en-US"/>
               <a:t>Handouts</a:t>
             </a:r>
+            <a:endParaRPr lang="en-US"/>
           </a:p>
         </p:txBody>
       </p:sp>
@@ -2128,17 +1952,13 @@
             <p:ph type="sldNum" sz="quarter" idx="5"/>
           </p:nvPr>
         </p:nvSpPr>
-        <p:spPr>
-          <a:ln/>
-        </p:spPr>
+        <p:spPr/>
         <p:txBody>
           <a:bodyPr/>
           <a:lstStyle/>
           <a:p>
             <a:fld id="{AB4D9772-D6C8-41D9-9A46-B5BDB899EE1E}" type="slidenum">
               <a:rPr lang="en-US"/>
-              <a:pPr/>
-              <a:t>24</a:t>
             </a:fld>
             <a:endParaRPr lang="en-US"/>
           </a:p>
@@ -2154,9 +1974,7 @@
             <p:ph type="sldImg"/>
           </p:nvPr>
         </p:nvSpPr>
-        <p:spPr>
-          <a:ln/>
-        </p:spPr>
+        <p:spPr/>
       </p:sp>
       <p:sp>
         <p:nvSpPr>
@@ -2178,11 +1996,6 @@
         </p:txBody>
       </p:sp>
     </p:spTree>
-    <p:extLst>
-      <p:ext uri="{BB962C8B-B14F-4D97-AF65-F5344CB8AC3E}">
-        <p14:creationId xmlns:p14="http://schemas.microsoft.com/office/powerpoint/2010/main" val="3343517311"/>
-      </p:ext>
-    </p:extLst>
   </p:cSld>
   <p:clrMapOvr>
     <a:masterClrMapping/>
@@ -2217,9 +2030,7 @@
             <p:ph type="hdr" sz="quarter"/>
           </p:nvPr>
         </p:nvSpPr>
-        <p:spPr>
-          <a:ln/>
-        </p:spPr>
+        <p:spPr/>
         <p:txBody>
           <a:bodyPr/>
           <a:lstStyle/>
@@ -2228,6 +2039,7 @@
               <a:rPr lang="en-US"/>
               <a:t>Handouts</a:t>
             </a:r>
+            <a:endParaRPr lang="en-US"/>
           </a:p>
         </p:txBody>
       </p:sp>
@@ -2241,17 +2053,13 @@
             <p:ph type="sldNum" sz="quarter" idx="5"/>
           </p:nvPr>
         </p:nvSpPr>
-        <p:spPr>
-          <a:ln/>
-        </p:spPr>
+        <p:spPr/>
         <p:txBody>
           <a:bodyPr/>
           <a:lstStyle/>
           <a:p>
             <a:fld id="{AB4D9772-D6C8-41D9-9A46-B5BDB899EE1E}" type="slidenum">
               <a:rPr lang="en-US"/>
-              <a:pPr/>
-              <a:t>25</a:t>
             </a:fld>
             <a:endParaRPr lang="en-US"/>
           </a:p>
@@ -2267,9 +2075,7 @@
             <p:ph type="sldImg"/>
           </p:nvPr>
         </p:nvSpPr>
-        <p:spPr>
-          <a:ln/>
-        </p:spPr>
+        <p:spPr/>
       </p:sp>
       <p:sp>
         <p:nvSpPr>
@@ -2291,11 +2097,6 @@
         </p:txBody>
       </p:sp>
     </p:spTree>
-    <p:extLst>
-      <p:ext uri="{BB962C8B-B14F-4D97-AF65-F5344CB8AC3E}">
-        <p14:creationId xmlns:p14="http://schemas.microsoft.com/office/powerpoint/2010/main" val="3513914696"/>
-      </p:ext>
-    </p:extLst>
   </p:cSld>
   <p:clrMapOvr>
     <a:masterClrMapping/>
@@ -2330,9 +2131,7 @@
             <p:ph type="hdr" sz="quarter"/>
           </p:nvPr>
         </p:nvSpPr>
-        <p:spPr>
-          <a:ln/>
-        </p:spPr>
+        <p:spPr/>
         <p:txBody>
           <a:bodyPr/>
           <a:lstStyle/>
@@ -2341,6 +2140,7 @@
               <a:rPr lang="en-US"/>
               <a:t>Handouts</a:t>
             </a:r>
+            <a:endParaRPr lang="en-US"/>
           </a:p>
         </p:txBody>
       </p:sp>
@@ -2354,17 +2154,13 @@
             <p:ph type="sldNum" sz="quarter" idx="5"/>
           </p:nvPr>
         </p:nvSpPr>
-        <p:spPr>
-          <a:ln/>
-        </p:spPr>
+        <p:spPr/>
         <p:txBody>
           <a:bodyPr/>
           <a:lstStyle/>
           <a:p>
             <a:fld id="{AB4D9772-D6C8-41D9-9A46-B5BDB899EE1E}" type="slidenum">
               <a:rPr lang="en-US"/>
-              <a:pPr/>
-              <a:t>26</a:t>
             </a:fld>
             <a:endParaRPr lang="en-US"/>
           </a:p>
@@ -2380,9 +2176,7 @@
             <p:ph type="sldImg"/>
           </p:nvPr>
         </p:nvSpPr>
-        <p:spPr>
-          <a:ln/>
-        </p:spPr>
+        <p:spPr/>
       </p:sp>
       <p:sp>
         <p:nvSpPr>
@@ -2404,11 +2198,6 @@
         </p:txBody>
       </p:sp>
     </p:spTree>
-    <p:extLst>
-      <p:ext uri="{BB962C8B-B14F-4D97-AF65-F5344CB8AC3E}">
-        <p14:creationId xmlns:p14="http://schemas.microsoft.com/office/powerpoint/2010/main" val="1013812032"/>
-      </p:ext>
-    </p:extLst>
   </p:cSld>
   <p:clrMapOvr>
     <a:masterClrMapping/>
@@ -2443,9 +2232,7 @@
             <p:ph type="hdr" sz="quarter"/>
           </p:nvPr>
         </p:nvSpPr>
-        <p:spPr>
-          <a:ln/>
-        </p:spPr>
+        <p:spPr/>
         <p:txBody>
           <a:bodyPr/>
           <a:lstStyle/>
@@ -2454,6 +2241,7 @@
               <a:rPr lang="en-US"/>
               <a:t>Handouts</a:t>
             </a:r>
+            <a:endParaRPr lang="en-US"/>
           </a:p>
         </p:txBody>
       </p:sp>
@@ -2467,17 +2255,13 @@
             <p:ph type="sldNum" sz="quarter" idx="5"/>
           </p:nvPr>
         </p:nvSpPr>
-        <p:spPr>
-          <a:ln/>
-        </p:spPr>
+        <p:spPr/>
         <p:txBody>
           <a:bodyPr/>
           <a:lstStyle/>
           <a:p>
             <a:fld id="{AB4D9772-D6C8-41D9-9A46-B5BDB899EE1E}" type="slidenum">
               <a:rPr lang="en-US"/>
-              <a:pPr/>
-              <a:t>27</a:t>
             </a:fld>
             <a:endParaRPr lang="en-US"/>
           </a:p>
@@ -2493,9 +2277,7 @@
             <p:ph type="sldImg"/>
           </p:nvPr>
         </p:nvSpPr>
-        <p:spPr>
-          <a:ln/>
-        </p:spPr>
+        <p:spPr/>
       </p:sp>
       <p:sp>
         <p:nvSpPr>
@@ -2517,11 +2299,6 @@
         </p:txBody>
       </p:sp>
     </p:spTree>
-    <p:extLst>
-      <p:ext uri="{BB962C8B-B14F-4D97-AF65-F5344CB8AC3E}">
-        <p14:creationId xmlns:p14="http://schemas.microsoft.com/office/powerpoint/2010/main" val="1367593764"/>
-      </p:ext>
-    </p:extLst>
   </p:cSld>
   <p:clrMapOvr>
     <a:masterClrMapping/>
@@ -2556,9 +2333,7 @@
             <p:ph type="hdr" sz="quarter"/>
           </p:nvPr>
         </p:nvSpPr>
-        <p:spPr>
-          <a:ln/>
-        </p:spPr>
+        <p:spPr/>
         <p:txBody>
           <a:bodyPr/>
           <a:lstStyle/>
@@ -2567,6 +2342,7 @@
               <a:rPr lang="en-US"/>
               <a:t>Handouts</a:t>
             </a:r>
+            <a:endParaRPr lang="en-US"/>
           </a:p>
         </p:txBody>
       </p:sp>
@@ -2580,17 +2356,13 @@
             <p:ph type="sldNum" sz="quarter" idx="5"/>
           </p:nvPr>
         </p:nvSpPr>
-        <p:spPr>
-          <a:ln/>
-        </p:spPr>
+        <p:spPr/>
         <p:txBody>
           <a:bodyPr/>
           <a:lstStyle/>
           <a:p>
             <a:fld id="{AB4D9772-D6C8-41D9-9A46-B5BDB899EE1E}" type="slidenum">
               <a:rPr lang="en-US"/>
-              <a:pPr/>
-              <a:t>28</a:t>
             </a:fld>
             <a:endParaRPr lang="en-US"/>
           </a:p>
@@ -2606,9 +2378,7 @@
             <p:ph type="sldImg"/>
           </p:nvPr>
         </p:nvSpPr>
-        <p:spPr>
-          <a:ln/>
-        </p:spPr>
+        <p:spPr/>
       </p:sp>
       <p:sp>
         <p:nvSpPr>
@@ -2630,11 +2400,6 @@
         </p:txBody>
       </p:sp>
     </p:spTree>
-    <p:extLst>
-      <p:ext uri="{BB962C8B-B14F-4D97-AF65-F5344CB8AC3E}">
-        <p14:creationId xmlns:p14="http://schemas.microsoft.com/office/powerpoint/2010/main" val="3306418309"/>
-      </p:ext>
-    </p:extLst>
   </p:cSld>
   <p:clrMapOvr>
     <a:masterClrMapping/>
@@ -2669,9 +2434,7 @@
             <p:ph type="hdr" sz="quarter"/>
           </p:nvPr>
         </p:nvSpPr>
-        <p:spPr>
-          <a:ln/>
-        </p:spPr>
+        <p:spPr/>
         <p:txBody>
           <a:bodyPr/>
           <a:lstStyle/>
@@ -2680,6 +2443,7 @@
               <a:rPr lang="en-US"/>
               <a:t>Handouts</a:t>
             </a:r>
+            <a:endParaRPr lang="en-US"/>
           </a:p>
         </p:txBody>
       </p:sp>
@@ -2693,17 +2457,13 @@
             <p:ph type="sldNum" sz="quarter" idx="5"/>
           </p:nvPr>
         </p:nvSpPr>
-        <p:spPr>
-          <a:ln/>
-        </p:spPr>
+        <p:spPr/>
         <p:txBody>
           <a:bodyPr/>
           <a:lstStyle/>
           <a:p>
             <a:fld id="{E60FA2AE-558B-418D-8070-76CACAAD0D4C}" type="slidenum">
               <a:rPr lang="en-US"/>
-              <a:pPr/>
-              <a:t>4</a:t>
             </a:fld>
             <a:endParaRPr lang="en-US"/>
           </a:p>
@@ -2719,9 +2479,7 @@
             <p:ph type="sldImg"/>
           </p:nvPr>
         </p:nvSpPr>
-        <p:spPr>
-          <a:ln/>
-        </p:spPr>
+        <p:spPr/>
       </p:sp>
       <p:sp>
         <p:nvSpPr>
@@ -2746,6 +2504,7 @@
               <a:rPr lang="en-US" dirty="0" smtClean="0"/>
               <a:t> Static testing is like a doctor looking at an X-ray (checking structure); Dynamic testing is like a stress test on a treadmill (checking function). You need both to confirm the patient is healthy.</a:t>
             </a:r>
+            <a:endParaRPr lang="en-US" dirty="0" smtClean="0"/>
           </a:p>
           <a:p>
             <a:endParaRPr lang="en-US" dirty="0" smtClean="0"/>
@@ -2783,15 +2542,11 @@
               <a:rPr lang="en-US" dirty="0" smtClean="0"/>
               <a:t>.</a:t>
             </a:r>
+            <a:endParaRPr lang="en-US" dirty="0" smtClean="0"/>
           </a:p>
         </p:txBody>
       </p:sp>
     </p:spTree>
-    <p:extLst>
-      <p:ext uri="{BB962C8B-B14F-4D97-AF65-F5344CB8AC3E}">
-        <p14:creationId xmlns:p14="http://schemas.microsoft.com/office/powerpoint/2010/main" val="22581234"/>
-      </p:ext>
-    </p:extLst>
   </p:cSld>
   <p:clrMapOvr>
     <a:masterClrMapping/>
@@ -2826,9 +2581,7 @@
             <p:ph type="hdr" sz="quarter"/>
           </p:nvPr>
         </p:nvSpPr>
-        <p:spPr>
-          <a:ln/>
-        </p:spPr>
+        <p:spPr/>
         <p:txBody>
           <a:bodyPr/>
           <a:lstStyle/>
@@ -2837,6 +2590,7 @@
               <a:rPr lang="en-US"/>
               <a:t>Handouts</a:t>
             </a:r>
+            <a:endParaRPr lang="en-US"/>
           </a:p>
         </p:txBody>
       </p:sp>
@@ -2850,17 +2604,13 @@
             <p:ph type="sldNum" sz="quarter" idx="5"/>
           </p:nvPr>
         </p:nvSpPr>
-        <p:spPr>
-          <a:ln/>
-        </p:spPr>
+        <p:spPr/>
         <p:txBody>
           <a:bodyPr/>
           <a:lstStyle/>
           <a:p>
             <a:fld id="{FEA880B3-040B-40E1-B619-A423A0BE7535}" type="slidenum">
               <a:rPr lang="en-US"/>
-              <a:pPr/>
-              <a:t>5</a:t>
             </a:fld>
             <a:endParaRPr lang="en-US"/>
           </a:p>
@@ -2876,9 +2626,7 @@
             <p:ph type="sldImg"/>
           </p:nvPr>
         </p:nvSpPr>
-        <p:spPr>
-          <a:ln/>
-        </p:spPr>
+        <p:spPr/>
       </p:sp>
       <p:sp>
         <p:nvSpPr>
@@ -2900,11 +2648,6 @@
         </p:txBody>
       </p:sp>
     </p:spTree>
-    <p:extLst>
-      <p:ext uri="{BB962C8B-B14F-4D97-AF65-F5344CB8AC3E}">
-        <p14:creationId xmlns:p14="http://schemas.microsoft.com/office/powerpoint/2010/main" val="1535161778"/>
-      </p:ext>
-    </p:extLst>
   </p:cSld>
   <p:clrMapOvr>
     <a:masterClrMapping/>
@@ -2939,9 +2682,7 @@
             <p:ph type="hdr" sz="quarter"/>
           </p:nvPr>
         </p:nvSpPr>
-        <p:spPr>
-          <a:ln/>
-        </p:spPr>
+        <p:spPr/>
         <p:txBody>
           <a:bodyPr/>
           <a:lstStyle/>
@@ -2950,6 +2691,7 @@
               <a:rPr lang="en-US"/>
               <a:t>Handouts</a:t>
             </a:r>
+            <a:endParaRPr lang="en-US"/>
           </a:p>
         </p:txBody>
       </p:sp>
@@ -2963,17 +2705,13 @@
             <p:ph type="sldNum" sz="quarter" idx="5"/>
           </p:nvPr>
         </p:nvSpPr>
-        <p:spPr>
-          <a:ln/>
-        </p:spPr>
+        <p:spPr/>
         <p:txBody>
           <a:bodyPr/>
           <a:lstStyle/>
           <a:p>
             <a:fld id="{2DC73007-5049-41D7-92B7-EC90B0FDF8D8}" type="slidenum">
               <a:rPr lang="en-US"/>
-              <a:pPr/>
-              <a:t>6</a:t>
             </a:fld>
             <a:endParaRPr lang="en-US"/>
           </a:p>
@@ -2989,9 +2727,7 @@
             <p:ph type="sldImg"/>
           </p:nvPr>
         </p:nvSpPr>
-        <p:spPr>
-          <a:ln/>
-        </p:spPr>
+        <p:spPr/>
       </p:sp>
       <p:sp>
         <p:nvSpPr>
@@ -3020,15 +2756,11 @@
               <a:rPr lang="en-US" dirty="0" smtClean="0"/>
               <a:t>, it is more appropriate to make suggestions to the author to make changes, rather than report a defect. Though CRs focus on defects in the code, these reports are not included in defect statistics related to the product.</a:t>
             </a:r>
+            <a:endParaRPr lang="en-US" dirty="0" smtClean="0"/>
           </a:p>
         </p:txBody>
       </p:sp>
     </p:spTree>
-    <p:extLst>
-      <p:ext uri="{BB962C8B-B14F-4D97-AF65-F5344CB8AC3E}">
-        <p14:creationId xmlns:p14="http://schemas.microsoft.com/office/powerpoint/2010/main" val="3498848140"/>
-      </p:ext>
-    </p:extLst>
   </p:cSld>
   <p:clrMapOvr>
     <a:masterClrMapping/>
@@ -3063,9 +2795,7 @@
             <p:ph type="hdr" sz="quarter"/>
           </p:nvPr>
         </p:nvSpPr>
-        <p:spPr>
-          <a:ln/>
-        </p:spPr>
+        <p:spPr/>
         <p:txBody>
           <a:bodyPr/>
           <a:lstStyle/>
@@ -3074,6 +2804,7 @@
               <a:rPr lang="en-US"/>
               <a:t>Handouts</a:t>
             </a:r>
+            <a:endParaRPr lang="en-US"/>
           </a:p>
         </p:txBody>
       </p:sp>
@@ -3087,17 +2818,13 @@
             <p:ph type="sldNum" sz="quarter" idx="5"/>
           </p:nvPr>
         </p:nvSpPr>
-        <p:spPr>
-          <a:ln/>
-        </p:spPr>
+        <p:spPr/>
         <p:txBody>
           <a:bodyPr/>
           <a:lstStyle/>
           <a:p>
             <a:fld id="{BBC54DDE-09F6-4D31-A31C-51E4C46B3362}" type="slidenum">
               <a:rPr lang="en-US"/>
-              <a:pPr/>
-              <a:t>7</a:t>
             </a:fld>
             <a:endParaRPr lang="en-US"/>
           </a:p>
@@ -3113,9 +2840,7 @@
             <p:ph type="sldImg"/>
           </p:nvPr>
         </p:nvSpPr>
-        <p:spPr>
-          <a:ln/>
-        </p:spPr>
+        <p:spPr/>
       </p:sp>
       <p:sp>
         <p:nvSpPr>
@@ -3136,12 +2861,14 @@
               <a:rPr lang="en-US" dirty="0" smtClean="0"/>
               <a:t>• The author makes a presentation of the procedural logic used in the code, the paths denoting major computations, and the dependency of the unit under review on other units. </a:t>
             </a:r>
+            <a:endParaRPr lang="en-US" dirty="0" smtClean="0"/>
           </a:p>
           <a:p>
             <a:r>
               <a:rPr lang="en-US" dirty="0" smtClean="0"/>
               <a:t>• The presenter reads the code line by line. The reviewers may raise questions if the code is seen to have defects. However, problems are not resolved in the meeting. The reviewers may make general suggestions on how to fix the defects, but it is up to the author of the code to take corrective measures after the meeting ends.</a:t>
             </a:r>
+            <a:endParaRPr lang="en-US" dirty="0" smtClean="0"/>
           </a:p>
           <a:p>
             <a:endParaRPr lang="en-US" dirty="0" smtClean="0"/>
@@ -3151,6 +2878,7 @@
               <a:rPr lang="en-US" dirty="0" smtClean="0"/>
               <a:t>. Set a deadline for addressing a CR.</a:t>
             </a:r>
+            <a:endParaRPr lang="en-US" dirty="0" smtClean="0"/>
           </a:p>
           <a:p>
             <a:endParaRPr lang="en-US" dirty="0" smtClean="0"/>
@@ -3164,6 +2892,7 @@
               <a:rPr lang="en-US" dirty="0" smtClean="0"/>
               <a:t>The CRs are independently validated by the moderator or another person designated for this purpose. The validation process involves checking the modified code as documented in the CRs and ensuring that the suggested improvements have been implemented correctly. The revised and final version of the outcome of the review meeting is distributed to all the group members.</a:t>
             </a:r>
+            <a:endParaRPr lang="en-US" dirty="0" smtClean="0"/>
           </a:p>
           <a:p>
             <a:endParaRPr lang="en-US" dirty="0" smtClean="0"/>
@@ -3173,45 +2902,46 @@
               <a:rPr lang="en-US" dirty="0" smtClean="0"/>
               <a:t>Exit Summarizing the review process, it is said to be complete if all of the following actions have been taken: </a:t>
             </a:r>
+            <a:endParaRPr lang="en-US" dirty="0" smtClean="0"/>
           </a:p>
           <a:p>
             <a:r>
               <a:rPr lang="en-US" dirty="0" smtClean="0"/>
               <a:t>• Every line of code in the unit has been inspected. </a:t>
             </a:r>
+            <a:endParaRPr lang="en-US" dirty="0" smtClean="0"/>
           </a:p>
           <a:p>
             <a:r>
               <a:rPr lang="en-US" dirty="0" smtClean="0"/>
               <a:t>• If too many defects are found in a module, the module is once again reviewed after corrections are applied by the author. As a rule of thumb, if more than 5% of the total lines of code are thought to be contentious, then a second review is scheduled. </a:t>
             </a:r>
+            <a:endParaRPr lang="en-US" dirty="0" smtClean="0"/>
           </a:p>
           <a:p>
             <a:r>
               <a:rPr lang="en-US" dirty="0" smtClean="0"/>
               <a:t>• The author and the reviewers reach a consensus that when corrections have been applied the code will be potentially free of defects. </a:t>
             </a:r>
+            <a:endParaRPr lang="en-US" dirty="0" smtClean="0"/>
           </a:p>
           <a:p>
             <a:r>
               <a:rPr lang="en-US" dirty="0" smtClean="0"/>
               <a:t>• All the CRs are documented and validated by the moderator or someone else. The author’s follow-up actions are documented. </a:t>
             </a:r>
+            <a:endParaRPr lang="en-US" dirty="0" smtClean="0"/>
           </a:p>
           <a:p>
             <a:r>
               <a:rPr lang="en-US" dirty="0" smtClean="0"/>
               <a:t>• A summary report of the meeting including the CRs is distributed to all the members of the review group.</a:t>
             </a:r>
+            <a:endParaRPr lang="en-US" dirty="0" smtClean="0"/>
           </a:p>
         </p:txBody>
       </p:sp>
     </p:spTree>
-    <p:extLst>
-      <p:ext uri="{BB962C8B-B14F-4D97-AF65-F5344CB8AC3E}">
-        <p14:creationId xmlns:p14="http://schemas.microsoft.com/office/powerpoint/2010/main" val="4079956233"/>
-      </p:ext>
-    </p:extLst>
   </p:cSld>
   <p:clrMapOvr>
     <a:masterClrMapping/>
@@ -3246,9 +2976,7 @@
             <p:ph type="hdr" sz="quarter"/>
           </p:nvPr>
         </p:nvSpPr>
-        <p:spPr>
-          <a:ln/>
-        </p:spPr>
+        <p:spPr/>
         <p:txBody>
           <a:bodyPr/>
           <a:lstStyle/>
@@ -3257,6 +2985,7 @@
               <a:rPr lang="en-US"/>
               <a:t>Handouts</a:t>
             </a:r>
+            <a:endParaRPr lang="en-US"/>
           </a:p>
         </p:txBody>
       </p:sp>
@@ -3270,17 +2999,13 @@
             <p:ph type="sldNum" sz="quarter" idx="5"/>
           </p:nvPr>
         </p:nvSpPr>
-        <p:spPr>
-          <a:ln/>
-        </p:spPr>
+        <p:spPr/>
         <p:txBody>
           <a:bodyPr/>
           <a:lstStyle/>
           <a:p>
             <a:fld id="{D8F0BB34-7DDF-41CD-8D39-F3D2570A1410}" type="slidenum">
               <a:rPr lang="en-US"/>
-              <a:pPr/>
-              <a:t>8</a:t>
             </a:fld>
             <a:endParaRPr lang="en-US"/>
           </a:p>
@@ -3296,9 +3021,7 @@
             <p:ph type="sldImg"/>
           </p:nvPr>
         </p:nvSpPr>
-        <p:spPr>
-          <a:ln/>
-        </p:spPr>
+        <p:spPr/>
       </p:sp>
       <p:sp>
         <p:nvSpPr>
@@ -3323,6 +3046,7 @@
               <a:rPr lang="en-US" dirty="0" smtClean="0"/>
               <a:t>It is important to collect measurement data pertinent to a review process, so that the review process can be evaluated, made visible to the upper management as a testing strategy, and improved to be more effective.</a:t>
             </a:r>
+            <a:endParaRPr lang="en-US" dirty="0" smtClean="0"/>
           </a:p>
           <a:p>
             <a:endParaRPr lang="en-US" dirty="0" smtClean="0"/>
@@ -3332,6 +3056,7 @@
               <a:rPr lang="en-US" dirty="0" smtClean="0"/>
               <a:t>Moreover, collecting metrics during code review facilitates estimation of review time and resources for future projects.</a:t>
             </a:r>
+            <a:endParaRPr lang="en-US" dirty="0" smtClean="0"/>
           </a:p>
           <a:p>
             <a:endParaRPr lang="en-US" dirty="0" smtClean="0"/>
@@ -3341,15 +3066,11 @@
               <a:rPr lang="en-US" dirty="0" smtClean="0"/>
               <a:t>Thus, code review is a viable testing strategy that can be effectively used to improve the quality of products at an early stage.</a:t>
             </a:r>
+            <a:endParaRPr lang="en-US" dirty="0" smtClean="0"/>
           </a:p>
         </p:txBody>
       </p:sp>
     </p:spTree>
-    <p:extLst>
-      <p:ext uri="{BB962C8B-B14F-4D97-AF65-F5344CB8AC3E}">
-        <p14:creationId xmlns:p14="http://schemas.microsoft.com/office/powerpoint/2010/main" val="1261532373"/>
-      </p:ext>
-    </p:extLst>
   </p:cSld>
   <p:clrMapOvr>
     <a:masterClrMapping/>
@@ -3384,9 +3105,7 @@
             <p:ph type="hdr" sz="quarter"/>
           </p:nvPr>
         </p:nvSpPr>
-        <p:spPr>
-          <a:ln/>
-        </p:spPr>
+        <p:spPr/>
         <p:txBody>
           <a:bodyPr/>
           <a:lstStyle/>
@@ -3395,6 +3114,7 @@
               <a:rPr lang="en-US"/>
               <a:t>Handouts</a:t>
             </a:r>
+            <a:endParaRPr lang="en-US"/>
           </a:p>
         </p:txBody>
       </p:sp>
@@ -3408,17 +3128,13 @@
             <p:ph type="sldNum" sz="quarter" idx="5"/>
           </p:nvPr>
         </p:nvSpPr>
-        <p:spPr>
-          <a:ln/>
-        </p:spPr>
+        <p:spPr/>
         <p:txBody>
           <a:bodyPr/>
           <a:lstStyle/>
           <a:p>
             <a:fld id="{FD027FF8-0D7C-4A19-9E7F-35DC8D29A58B}" type="slidenum">
               <a:rPr lang="en-US"/>
-              <a:pPr/>
-              <a:t>9</a:t>
             </a:fld>
             <a:endParaRPr lang="en-US"/>
           </a:p>
@@ -3434,9 +3150,7 @@
             <p:ph type="sldImg"/>
           </p:nvPr>
         </p:nvSpPr>
-        <p:spPr>
-          <a:ln/>
-        </p:spPr>
+        <p:spPr/>
       </p:sp>
       <p:sp>
         <p:nvSpPr>
@@ -3458,11 +3172,6 @@
         </p:txBody>
       </p:sp>
     </p:spTree>
-    <p:extLst>
-      <p:ext uri="{BB962C8B-B14F-4D97-AF65-F5344CB8AC3E}">
-        <p14:creationId xmlns:p14="http://schemas.microsoft.com/office/powerpoint/2010/main" val="1816390036"/>
-      </p:ext>
-    </p:extLst>
   </p:cSld>
   <p:clrMapOvr>
     <a:masterClrMapping/>
@@ -3497,9 +3206,7 @@
             <p:ph type="hdr" sz="quarter"/>
           </p:nvPr>
         </p:nvSpPr>
-        <p:spPr>
-          <a:ln/>
-        </p:spPr>
+        <p:spPr/>
         <p:txBody>
           <a:bodyPr/>
           <a:lstStyle/>
@@ -3508,6 +3215,7 @@
               <a:rPr lang="en-US"/>
               <a:t>Handouts</a:t>
             </a:r>
+            <a:endParaRPr lang="en-US"/>
           </a:p>
         </p:txBody>
       </p:sp>
@@ -3521,17 +3229,13 @@
             <p:ph type="sldNum" sz="quarter" idx="5"/>
           </p:nvPr>
         </p:nvSpPr>
-        <p:spPr>
-          <a:ln/>
-        </p:spPr>
+        <p:spPr/>
         <p:txBody>
           <a:bodyPr/>
           <a:lstStyle/>
           <a:p>
             <a:fld id="{8A51AF5B-F81A-4913-8E93-5A6A7D90D1B9}" type="slidenum">
               <a:rPr lang="en-US"/>
-              <a:pPr/>
-              <a:t>11</a:t>
             </a:fld>
             <a:endParaRPr lang="en-US"/>
           </a:p>
@@ -3547,9 +3251,7 @@
             <p:ph type="sldImg"/>
           </p:nvPr>
         </p:nvSpPr>
-        <p:spPr>
-          <a:ln/>
-        </p:spPr>
+        <p:spPr/>
       </p:sp>
       <p:sp>
         <p:nvSpPr>
@@ -3570,6 +3272,7 @@
               <a:rPr lang="en-US" dirty="0" smtClean="0"/>
               <a:t>The test driver should have the capability to automatically determine the  success or failure of the unit under test for each input test data. </a:t>
             </a:r>
+            <a:endParaRPr lang="en-US" dirty="0" smtClean="0"/>
           </a:p>
           <a:p>
             <a:endParaRPr lang="en-US" dirty="0" smtClean="0"/>
@@ -3587,27 +3290,25 @@
               <a:rPr lang="en-US" dirty="0" smtClean="0"/>
               <a:t>deallocation of memory. If the module opens and closes files, the test driver should check that these files are left in the expected open or closed state after each test.</a:t>
             </a:r>
+            <a:endParaRPr lang="en-US" dirty="0" smtClean="0"/>
           </a:p>
           <a:p>
             <a:r>
               <a:rPr lang="en-US" dirty="0" smtClean="0"/>
               <a:t> </a:t>
             </a:r>
+            <a:endParaRPr lang="en-US" dirty="0" smtClean="0"/>
           </a:p>
           <a:p>
             <a:r>
               <a:rPr lang="en-US" dirty="0" smtClean="0"/>
               <a:t>The test driver can be designed to check the data values of the internal variable that normally would not be available for checking at integration, system, or acceptance testing levels.</a:t>
             </a:r>
+            <a:endParaRPr lang="en-US" dirty="0" smtClean="0"/>
           </a:p>
         </p:txBody>
       </p:sp>
     </p:spTree>
-    <p:extLst>
-      <p:ext uri="{BB962C8B-B14F-4D97-AF65-F5344CB8AC3E}">
-        <p14:creationId xmlns:p14="http://schemas.microsoft.com/office/powerpoint/2010/main" val="2786756438"/>
-      </p:ext>
-    </p:extLst>
   </p:cSld>
   <p:clrMapOvr>
     <a:masterClrMapping/>
@@ -3803,7 +3504,6 @@
           <a:p>
             <a:fld id="{2E1F187F-793E-4D8A-9D79-A6124A53932A}" type="datetimeFigureOut">
               <a:rPr lang="en-US" smtClean="0"/>
-              <a:t>1/28/2026</a:t>
             </a:fld>
             <a:endParaRPr lang="en-US"/>
           </a:p>
@@ -3932,18 +3632,12 @@
           <a:p>
             <a:fld id="{D0F5D3D1-D159-4E14-9738-EBB758377134}" type="slidenum">
               <a:rPr lang="en-US" smtClean="0"/>
-              <a:t>‹#›</a:t>
             </a:fld>
             <a:endParaRPr lang="en-US"/>
           </a:p>
         </p:txBody>
       </p:sp>
     </p:spTree>
-    <p:extLst>
-      <p:ext uri="{BB962C8B-B14F-4D97-AF65-F5344CB8AC3E}">
-        <p14:creationId xmlns:p14="http://schemas.microsoft.com/office/powerpoint/2010/main" val="3886342274"/>
-      </p:ext>
-    </p:extLst>
   </p:cSld>
   <p:clrMapOvr>
     <a:masterClrMapping/>
@@ -4121,6 +3815,7 @@
               <a:rPr lang="en-US" smtClean="0"/>
               <a:t>Click to edit Master text styles</a:t>
             </a:r>
+            <a:endParaRPr lang="en-US" smtClean="0"/>
           </a:p>
         </p:txBody>
       </p:sp>
@@ -4141,7 +3836,6 @@
           <a:p>
             <a:fld id="{2E1F187F-793E-4D8A-9D79-A6124A53932A}" type="datetimeFigureOut">
               <a:rPr lang="en-US" smtClean="0"/>
-              <a:t>1/28/2026</a:t>
             </a:fld>
             <a:endParaRPr lang="en-US"/>
           </a:p>
@@ -4270,18 +3964,12 @@
           <a:p>
             <a:fld id="{D0F5D3D1-D159-4E14-9738-EBB758377134}" type="slidenum">
               <a:rPr lang="en-US" smtClean="0"/>
-              <a:t>‹#›</a:t>
             </a:fld>
             <a:endParaRPr lang="en-US"/>
           </a:p>
         </p:txBody>
       </p:sp>
     </p:spTree>
-    <p:extLst>
-      <p:ext uri="{BB962C8B-B14F-4D97-AF65-F5344CB8AC3E}">
-        <p14:creationId xmlns:p14="http://schemas.microsoft.com/office/powerpoint/2010/main" val="3734439998"/>
-      </p:ext>
-    </p:extLst>
   </p:cSld>
   <p:clrMapOvr>
     <a:masterClrMapping/>
@@ -4400,6 +4088,7 @@
               <a:rPr lang="en-US" smtClean="0"/>
               <a:t>Click to edit Master text styles</a:t>
             </a:r>
+            <a:endParaRPr lang="en-US" smtClean="0"/>
           </a:p>
         </p:txBody>
       </p:sp>
@@ -4522,6 +4211,7 @@
               <a:rPr lang="en-US" smtClean="0"/>
               <a:t>Click to edit Master text styles</a:t>
             </a:r>
+            <a:endParaRPr lang="en-US" smtClean="0"/>
           </a:p>
         </p:txBody>
       </p:sp>
@@ -4542,7 +4232,6 @@
           <a:p>
             <a:fld id="{2E1F187F-793E-4D8A-9D79-A6124A53932A}" type="datetimeFigureOut">
               <a:rPr lang="en-US" smtClean="0"/>
-              <a:t>1/28/2026</a:t>
             </a:fld>
             <a:endParaRPr lang="en-US"/>
           </a:p>
@@ -4671,7 +4360,6 @@
           <a:p>
             <a:fld id="{D0F5D3D1-D159-4E14-9738-EBB758377134}" type="slidenum">
               <a:rPr lang="en-US" smtClean="0"/>
-              <a:t>‹#›</a:t>
             </a:fld>
             <a:endParaRPr lang="en-US"/>
           </a:p>
@@ -4708,10 +4396,20 @@
                   <a:schemeClr val="accent1"/>
                 </a:solidFill>
                 <a:effectLst/>
-                <a:latin typeface="Arial"/>
+                <a:latin typeface="Arial" panose="020B0604020202020204"/>
               </a:rPr>
               <a:t>“</a:t>
             </a:r>
+            <a:endParaRPr lang="en-US" sz="8000" baseline="0" dirty="0">
+              <a:ln w="3175" cmpd="sng">
+                <a:noFill/>
+              </a:ln>
+              <a:solidFill>
+                <a:schemeClr val="accent1"/>
+              </a:solidFill>
+              <a:effectLst/>
+              <a:latin typeface="Arial" panose="020B0604020202020204"/>
+            </a:endParaRPr>
           </a:p>
         </p:txBody>
       </p:sp>
@@ -4746,19 +4444,24 @@
                   <a:schemeClr val="accent1"/>
                 </a:solidFill>
                 <a:effectLst/>
-                <a:latin typeface="Arial"/>
+                <a:latin typeface="Arial" panose="020B0604020202020204"/>
               </a:rPr>
               <a:t>”</a:t>
             </a:r>
+            <a:endParaRPr lang="en-US" sz="8000" baseline="0" dirty="0">
+              <a:ln w="3175" cmpd="sng">
+                <a:noFill/>
+              </a:ln>
+              <a:solidFill>
+                <a:schemeClr val="accent1"/>
+              </a:solidFill>
+              <a:effectLst/>
+              <a:latin typeface="Arial" panose="020B0604020202020204"/>
+            </a:endParaRPr>
           </a:p>
         </p:txBody>
       </p:sp>
     </p:spTree>
-    <p:extLst>
-      <p:ext uri="{BB962C8B-B14F-4D97-AF65-F5344CB8AC3E}">
-        <p14:creationId xmlns:p14="http://schemas.microsoft.com/office/powerpoint/2010/main" val="3343387930"/>
-      </p:ext>
-    </p:extLst>
   </p:cSld>
   <p:clrMapOvr>
     <a:masterClrMapping/>
@@ -4858,6 +4561,7 @@
               <a:rPr lang="en-US" smtClean="0"/>
               <a:t>Click to edit Master text styles</a:t>
             </a:r>
+            <a:endParaRPr lang="en-US" smtClean="0"/>
           </a:p>
         </p:txBody>
       </p:sp>
@@ -4878,7 +4582,6 @@
           <a:p>
             <a:fld id="{2E1F187F-793E-4D8A-9D79-A6124A53932A}" type="datetimeFigureOut">
               <a:rPr lang="en-US" smtClean="0"/>
-              <a:t>1/28/2026</a:t>
             </a:fld>
             <a:endParaRPr lang="en-US"/>
           </a:p>
@@ -5007,18 +4710,12 @@
           <a:p>
             <a:fld id="{D0F5D3D1-D159-4E14-9738-EBB758377134}" type="slidenum">
               <a:rPr lang="en-US" smtClean="0"/>
-              <a:t>‹#›</a:t>
             </a:fld>
             <a:endParaRPr lang="en-US"/>
           </a:p>
         </p:txBody>
       </p:sp>
     </p:spTree>
-    <p:extLst>
-      <p:ext uri="{BB962C8B-B14F-4D97-AF65-F5344CB8AC3E}">
-        <p14:creationId xmlns:p14="http://schemas.microsoft.com/office/powerpoint/2010/main" val="1036110398"/>
-      </p:ext>
-    </p:extLst>
   </p:cSld>
   <p:clrMapOvr>
     <a:masterClrMapping/>
@@ -5134,6 +4831,7 @@
               <a:rPr lang="en-US" smtClean="0"/>
               <a:t>Click to edit Master text styles</a:t>
             </a:r>
+            <a:endParaRPr lang="en-US" smtClean="0"/>
           </a:p>
         </p:txBody>
       </p:sp>
@@ -5178,6 +4876,7 @@
               <a:rPr lang="en-US" smtClean="0"/>
               <a:t>Click to edit Master text styles</a:t>
             </a:r>
+            <a:endParaRPr lang="en-US" smtClean="0"/>
           </a:p>
         </p:txBody>
       </p:sp>
@@ -5198,7 +4897,6 @@
           <a:p>
             <a:fld id="{2E1F187F-793E-4D8A-9D79-A6124A53932A}" type="datetimeFigureOut">
               <a:rPr lang="en-US" smtClean="0"/>
-              <a:t>1/28/2026</a:t>
             </a:fld>
             <a:endParaRPr lang="en-US"/>
           </a:p>
@@ -5327,7 +5025,6 @@
           <a:p>
             <a:fld id="{D0F5D3D1-D159-4E14-9738-EBB758377134}" type="slidenum">
               <a:rPr lang="en-US" smtClean="0"/>
-              <a:t>‹#›</a:t>
             </a:fld>
             <a:endParaRPr lang="en-US"/>
           </a:p>
@@ -5364,10 +5061,20 @@
                   <a:schemeClr val="accent1"/>
                 </a:solidFill>
                 <a:effectLst/>
-                <a:latin typeface="Arial"/>
+                <a:latin typeface="Arial" panose="020B0604020202020204"/>
               </a:rPr>
               <a:t>“</a:t>
             </a:r>
+            <a:endParaRPr lang="en-US" sz="8000" baseline="0" dirty="0">
+              <a:ln w="3175" cmpd="sng">
+                <a:noFill/>
+              </a:ln>
+              <a:solidFill>
+                <a:schemeClr val="accent1"/>
+              </a:solidFill>
+              <a:effectLst/>
+              <a:latin typeface="Arial" panose="020B0604020202020204"/>
+            </a:endParaRPr>
           </a:p>
         </p:txBody>
       </p:sp>
@@ -5402,19 +5109,24 @@
                   <a:schemeClr val="accent1"/>
                 </a:solidFill>
                 <a:effectLst/>
-                <a:latin typeface="Arial"/>
+                <a:latin typeface="Arial" panose="020B0604020202020204"/>
               </a:rPr>
               <a:t>”</a:t>
             </a:r>
+            <a:endParaRPr lang="en-US" sz="8000" baseline="0" dirty="0">
+              <a:ln w="3175" cmpd="sng">
+                <a:noFill/>
+              </a:ln>
+              <a:solidFill>
+                <a:schemeClr val="accent1"/>
+              </a:solidFill>
+              <a:effectLst/>
+              <a:latin typeface="Arial" panose="020B0604020202020204"/>
+            </a:endParaRPr>
           </a:p>
         </p:txBody>
       </p:sp>
     </p:spTree>
-    <p:extLst>
-      <p:ext uri="{BB962C8B-B14F-4D97-AF65-F5344CB8AC3E}">
-        <p14:creationId xmlns:p14="http://schemas.microsoft.com/office/powerpoint/2010/main" val="1497478239"/>
-      </p:ext>
-    </p:extLst>
   </p:cSld>
   <p:clrMapOvr>
     <a:masterClrMapping/>
@@ -5530,6 +5242,7 @@
               <a:rPr lang="en-US" smtClean="0"/>
               <a:t>Click to edit Master text styles</a:t>
             </a:r>
+            <a:endParaRPr lang="en-US" smtClean="0"/>
           </a:p>
         </p:txBody>
       </p:sp>
@@ -5574,6 +5287,7 @@
               <a:rPr lang="en-US" smtClean="0"/>
               <a:t>Click to edit Master text styles</a:t>
             </a:r>
+            <a:endParaRPr lang="en-US" smtClean="0"/>
           </a:p>
         </p:txBody>
       </p:sp>
@@ -5594,7 +5308,6 @@
           <a:p>
             <a:fld id="{2E1F187F-793E-4D8A-9D79-A6124A53932A}" type="datetimeFigureOut">
               <a:rPr lang="en-US" smtClean="0"/>
-              <a:t>1/28/2026</a:t>
             </a:fld>
             <a:endParaRPr lang="en-US"/>
           </a:p>
@@ -5723,18 +5436,12 @@
           <a:p>
             <a:fld id="{D0F5D3D1-D159-4E14-9738-EBB758377134}" type="slidenum">
               <a:rPr lang="en-US" smtClean="0"/>
-              <a:t>‹#›</a:t>
             </a:fld>
             <a:endParaRPr lang="en-US"/>
           </a:p>
         </p:txBody>
       </p:sp>
     </p:spTree>
-    <p:extLst>
-      <p:ext uri="{BB962C8B-B14F-4D97-AF65-F5344CB8AC3E}">
-        <p14:creationId xmlns:p14="http://schemas.microsoft.com/office/powerpoint/2010/main" val="4290441601"/>
-      </p:ext>
-    </p:extLst>
   </p:cSld>
   <p:clrMapOvr>
     <a:masterClrMapping/>
@@ -5802,6 +5509,7 @@
               <a:rPr lang="en-US" smtClean="0"/>
               <a:t>Click to edit Master text styles</a:t>
             </a:r>
+            <a:endParaRPr lang="en-US" smtClean="0"/>
           </a:p>
           <a:p>
             <a:pPr lvl="1"/>
@@ -5809,6 +5517,7 @@
               <a:rPr lang="en-US" smtClean="0"/>
               <a:t>Second level</a:t>
             </a:r>
+            <a:endParaRPr lang="en-US" smtClean="0"/>
           </a:p>
           <a:p>
             <a:pPr lvl="2"/>
@@ -5816,6 +5525,7 @@
               <a:rPr lang="en-US" smtClean="0"/>
               <a:t>Third level</a:t>
             </a:r>
+            <a:endParaRPr lang="en-US" smtClean="0"/>
           </a:p>
           <a:p>
             <a:pPr lvl="3"/>
@@ -5823,6 +5533,7 @@
               <a:rPr lang="en-US" smtClean="0"/>
               <a:t>Fourth level</a:t>
             </a:r>
+            <a:endParaRPr lang="en-US" smtClean="0"/>
           </a:p>
           <a:p>
             <a:pPr lvl="4"/>
@@ -5851,7 +5562,6 @@
           <a:p>
             <a:fld id="{2E1F187F-793E-4D8A-9D79-A6124A53932A}" type="datetimeFigureOut">
               <a:rPr lang="en-US" smtClean="0"/>
-              <a:t>1/28/2026</a:t>
             </a:fld>
             <a:endParaRPr lang="en-US"/>
           </a:p>
@@ -5975,18 +5685,12 @@
           <a:p>
             <a:fld id="{D0F5D3D1-D159-4E14-9738-EBB758377134}" type="slidenum">
               <a:rPr lang="en-US" smtClean="0"/>
-              <a:t>‹#›</a:t>
             </a:fld>
             <a:endParaRPr lang="en-US"/>
           </a:p>
         </p:txBody>
       </p:sp>
     </p:spTree>
-    <p:extLst>
-      <p:ext uri="{BB962C8B-B14F-4D97-AF65-F5344CB8AC3E}">
-        <p14:creationId xmlns:p14="http://schemas.microsoft.com/office/powerpoint/2010/main" val="1747160952"/>
-      </p:ext>
-    </p:extLst>
   </p:cSld>
   <p:clrMapOvr>
     <a:masterClrMapping/>
@@ -6064,6 +5768,7 @@
               <a:rPr lang="en-US" smtClean="0"/>
               <a:t>Click to edit Master text styles</a:t>
             </a:r>
+            <a:endParaRPr lang="en-US" smtClean="0"/>
           </a:p>
           <a:p>
             <a:pPr lvl="1"/>
@@ -6071,6 +5776,7 @@
               <a:rPr lang="en-US" smtClean="0"/>
               <a:t>Second level</a:t>
             </a:r>
+            <a:endParaRPr lang="en-US" smtClean="0"/>
           </a:p>
           <a:p>
             <a:pPr lvl="2"/>
@@ -6078,6 +5784,7 @@
               <a:rPr lang="en-US" smtClean="0"/>
               <a:t>Third level</a:t>
             </a:r>
+            <a:endParaRPr lang="en-US" smtClean="0"/>
           </a:p>
           <a:p>
             <a:pPr lvl="3"/>
@@ -6085,6 +5792,7 @@
               <a:rPr lang="en-US" smtClean="0"/>
               <a:t>Fourth level</a:t>
             </a:r>
+            <a:endParaRPr lang="en-US" smtClean="0"/>
           </a:p>
           <a:p>
             <a:pPr lvl="4"/>
@@ -6113,7 +5821,6 @@
           <a:p>
             <a:fld id="{2E1F187F-793E-4D8A-9D79-A6124A53932A}" type="datetimeFigureOut">
               <a:rPr lang="en-US" smtClean="0"/>
-              <a:t>1/28/2026</a:t>
             </a:fld>
             <a:endParaRPr lang="en-US"/>
           </a:p>
@@ -6237,18 +5944,12 @@
           <a:p>
             <a:fld id="{D0F5D3D1-D159-4E14-9738-EBB758377134}" type="slidenum">
               <a:rPr lang="en-US" smtClean="0"/>
-              <a:t>‹#›</a:t>
             </a:fld>
             <a:endParaRPr lang="en-US"/>
           </a:p>
         </p:txBody>
       </p:sp>
     </p:spTree>
-    <p:extLst>
-      <p:ext uri="{BB962C8B-B14F-4D97-AF65-F5344CB8AC3E}">
-        <p14:creationId xmlns:p14="http://schemas.microsoft.com/office/powerpoint/2010/main" val="100995793"/>
-      </p:ext>
-    </p:extLst>
   </p:cSld>
   <p:clrMapOvr>
     <a:masterClrMapping/>
@@ -6326,6 +6027,7 @@
               <a:rPr lang="en-US" smtClean="0"/>
               <a:t>Click to edit Master text styles</a:t>
             </a:r>
+            <a:endParaRPr lang="en-US" smtClean="0"/>
           </a:p>
           <a:p>
             <a:pPr lvl="1"/>
@@ -6333,6 +6035,7 @@
               <a:rPr lang="en-US" smtClean="0"/>
               <a:t>Second level</a:t>
             </a:r>
+            <a:endParaRPr lang="en-US" smtClean="0"/>
           </a:p>
           <a:p>
             <a:pPr lvl="2"/>
@@ -6340,6 +6043,7 @@
               <a:rPr lang="en-US" smtClean="0"/>
               <a:t>Third level</a:t>
             </a:r>
+            <a:endParaRPr lang="en-US" smtClean="0"/>
           </a:p>
           <a:p>
             <a:pPr lvl="3"/>
@@ -6347,6 +6051,7 @@
               <a:rPr lang="en-US" smtClean="0"/>
               <a:t>Fourth level</a:t>
             </a:r>
+            <a:endParaRPr lang="en-US" smtClean="0"/>
           </a:p>
           <a:p>
             <a:pPr lvl="4"/>
@@ -6375,7 +6080,6 @@
           <a:p>
             <a:fld id="{2E1F187F-793E-4D8A-9D79-A6124A53932A}" type="datetimeFigureOut">
               <a:rPr lang="en-US" smtClean="0"/>
-              <a:t>1/28/2026</a:t>
             </a:fld>
             <a:endParaRPr lang="en-US"/>
           </a:p>
@@ -6499,18 +6203,12 @@
           <a:p>
             <a:fld id="{D0F5D3D1-D159-4E14-9738-EBB758377134}" type="slidenum">
               <a:rPr lang="en-US" smtClean="0"/>
-              <a:t>‹#›</a:t>
             </a:fld>
             <a:endParaRPr lang="en-US"/>
           </a:p>
         </p:txBody>
       </p:sp>
     </p:spTree>
-    <p:extLst>
-      <p:ext uri="{BB962C8B-B14F-4D97-AF65-F5344CB8AC3E}">
-        <p14:creationId xmlns:p14="http://schemas.microsoft.com/office/powerpoint/2010/main" val="1551767483"/>
-      </p:ext>
-    </p:extLst>
   </p:cSld>
   <p:clrMapOvr>
     <a:masterClrMapping/>
@@ -6684,6 +6382,7 @@
               <a:rPr lang="en-US" smtClean="0"/>
               <a:t>Click to edit Master text styles</a:t>
             </a:r>
+            <a:endParaRPr lang="en-US" smtClean="0"/>
           </a:p>
         </p:txBody>
       </p:sp>
@@ -6704,7 +6403,6 @@
           <a:p>
             <a:fld id="{2E1F187F-793E-4D8A-9D79-A6124A53932A}" type="datetimeFigureOut">
               <a:rPr lang="en-US" smtClean="0"/>
-              <a:t>1/28/2026</a:t>
             </a:fld>
             <a:endParaRPr lang="en-US"/>
           </a:p>
@@ -6833,18 +6531,12 @@
           <a:p>
             <a:fld id="{D0F5D3D1-D159-4E14-9738-EBB758377134}" type="slidenum">
               <a:rPr lang="en-US" smtClean="0"/>
-              <a:t>‹#›</a:t>
             </a:fld>
             <a:endParaRPr lang="en-US"/>
           </a:p>
         </p:txBody>
       </p:sp>
     </p:spTree>
-    <p:extLst>
-      <p:ext uri="{BB962C8B-B14F-4D97-AF65-F5344CB8AC3E}">
-        <p14:creationId xmlns:p14="http://schemas.microsoft.com/office/powerpoint/2010/main" val="3929631540"/>
-      </p:ext>
-    </p:extLst>
   </p:cSld>
   <p:clrMapOvr>
     <a:masterClrMapping/>
@@ -6919,6 +6611,7 @@
               <a:rPr lang="en-US" smtClean="0"/>
               <a:t>Click to edit Master text styles</a:t>
             </a:r>
+            <a:endParaRPr lang="en-US" smtClean="0"/>
           </a:p>
           <a:p>
             <a:pPr lvl="1"/>
@@ -6926,6 +6619,7 @@
               <a:rPr lang="en-US" smtClean="0"/>
               <a:t>Second level</a:t>
             </a:r>
+            <a:endParaRPr lang="en-US" smtClean="0"/>
           </a:p>
           <a:p>
             <a:pPr lvl="2"/>
@@ -6933,6 +6627,7 @@
               <a:rPr lang="en-US" smtClean="0"/>
               <a:t>Third level</a:t>
             </a:r>
+            <a:endParaRPr lang="en-US" smtClean="0"/>
           </a:p>
           <a:p>
             <a:pPr lvl="3"/>
@@ -6940,6 +6635,7 @@
               <a:rPr lang="en-US" smtClean="0"/>
               <a:t>Fourth level</a:t>
             </a:r>
+            <a:endParaRPr lang="en-US" smtClean="0"/>
           </a:p>
           <a:p>
             <a:pPr lvl="4"/>
@@ -6978,6 +6674,7 @@
               <a:rPr lang="en-US" smtClean="0"/>
               <a:t>Click to edit Master text styles</a:t>
             </a:r>
+            <a:endParaRPr lang="en-US" smtClean="0"/>
           </a:p>
           <a:p>
             <a:pPr lvl="1"/>
@@ -6985,6 +6682,7 @@
               <a:rPr lang="en-US" smtClean="0"/>
               <a:t>Second level</a:t>
             </a:r>
+            <a:endParaRPr lang="en-US" smtClean="0"/>
           </a:p>
           <a:p>
             <a:pPr lvl="2"/>
@@ -6992,6 +6690,7 @@
               <a:rPr lang="en-US" smtClean="0"/>
               <a:t>Third level</a:t>
             </a:r>
+            <a:endParaRPr lang="en-US" smtClean="0"/>
           </a:p>
           <a:p>
             <a:pPr lvl="3"/>
@@ -6999,6 +6698,7 @@
               <a:rPr lang="en-US" smtClean="0"/>
               <a:t>Fourth level</a:t>
             </a:r>
+            <a:endParaRPr lang="en-US" smtClean="0"/>
           </a:p>
           <a:p>
             <a:pPr lvl="4"/>
@@ -7027,7 +6727,6 @@
           <a:p>
             <a:fld id="{2E1F187F-793E-4D8A-9D79-A6124A53932A}" type="datetimeFigureOut">
               <a:rPr lang="en-US" smtClean="0"/>
-              <a:t>1/28/2026</a:t>
             </a:fld>
             <a:endParaRPr lang="en-US"/>
           </a:p>
@@ -7156,18 +6855,12 @@
           <a:p>
             <a:fld id="{D0F5D3D1-D159-4E14-9738-EBB758377134}" type="slidenum">
               <a:rPr lang="en-US" smtClean="0"/>
-              <a:t>‹#›</a:t>
             </a:fld>
             <a:endParaRPr lang="en-US"/>
           </a:p>
         </p:txBody>
       </p:sp>
     </p:spTree>
-    <p:extLst>
-      <p:ext uri="{BB962C8B-B14F-4D97-AF65-F5344CB8AC3E}">
-        <p14:creationId xmlns:p14="http://schemas.microsoft.com/office/powerpoint/2010/main" val="1924378060"/>
-      </p:ext>
-    </p:extLst>
   </p:cSld>
   <p:clrMapOvr>
     <a:masterClrMapping/>
@@ -7279,6 +6972,7 @@
               <a:rPr lang="en-US" smtClean="0"/>
               <a:t>Click to edit Master text styles</a:t>
             </a:r>
+            <a:endParaRPr lang="en-US" smtClean="0"/>
           </a:p>
         </p:txBody>
       </p:sp>
@@ -7309,6 +7003,7 @@
               <a:rPr lang="en-US" smtClean="0"/>
               <a:t>Click to edit Master text styles</a:t>
             </a:r>
+            <a:endParaRPr lang="en-US" smtClean="0"/>
           </a:p>
           <a:p>
             <a:pPr lvl="1"/>
@@ -7316,6 +7011,7 @@
               <a:rPr lang="en-US" smtClean="0"/>
               <a:t>Second level</a:t>
             </a:r>
+            <a:endParaRPr lang="en-US" smtClean="0"/>
           </a:p>
           <a:p>
             <a:pPr lvl="2"/>
@@ -7323,6 +7019,7 @@
               <a:rPr lang="en-US" smtClean="0"/>
               <a:t>Third level</a:t>
             </a:r>
+            <a:endParaRPr lang="en-US" smtClean="0"/>
           </a:p>
           <a:p>
             <a:pPr lvl="3"/>
@@ -7330,6 +7027,7 @@
               <a:rPr lang="en-US" smtClean="0"/>
               <a:t>Fourth level</a:t>
             </a:r>
+            <a:endParaRPr lang="en-US" smtClean="0"/>
           </a:p>
           <a:p>
             <a:pPr lvl="4"/>
@@ -7405,6 +7103,7 @@
               <a:rPr lang="en-US" smtClean="0"/>
               <a:t>Click to edit Master text styles</a:t>
             </a:r>
+            <a:endParaRPr lang="en-US" smtClean="0"/>
           </a:p>
         </p:txBody>
       </p:sp>
@@ -7435,6 +7134,7 @@
               <a:rPr lang="en-US" smtClean="0"/>
               <a:t>Click to edit Master text styles</a:t>
             </a:r>
+            <a:endParaRPr lang="en-US" smtClean="0"/>
           </a:p>
           <a:p>
             <a:pPr lvl="1"/>
@@ -7442,6 +7142,7 @@
               <a:rPr lang="en-US" smtClean="0"/>
               <a:t>Second level</a:t>
             </a:r>
+            <a:endParaRPr lang="en-US" smtClean="0"/>
           </a:p>
           <a:p>
             <a:pPr lvl="2"/>
@@ -7449,6 +7150,7 @@
               <a:rPr lang="en-US" smtClean="0"/>
               <a:t>Third level</a:t>
             </a:r>
+            <a:endParaRPr lang="en-US" smtClean="0"/>
           </a:p>
           <a:p>
             <a:pPr lvl="3"/>
@@ -7456,6 +7158,7 @@
               <a:rPr lang="en-US" smtClean="0"/>
               <a:t>Fourth level</a:t>
             </a:r>
+            <a:endParaRPr lang="en-US" smtClean="0"/>
           </a:p>
           <a:p>
             <a:pPr lvl="4"/>
@@ -7484,7 +7187,6 @@
           <a:p>
             <a:fld id="{2E1F187F-793E-4D8A-9D79-A6124A53932A}" type="datetimeFigureOut">
               <a:rPr lang="en-US" smtClean="0"/>
-              <a:t>1/28/2026</a:t>
             </a:fld>
             <a:endParaRPr lang="en-US"/>
           </a:p>
@@ -7613,18 +7315,12 @@
           <a:p>
             <a:fld id="{D0F5D3D1-D159-4E14-9738-EBB758377134}" type="slidenum">
               <a:rPr lang="en-US" smtClean="0"/>
-              <a:t>‹#›</a:t>
             </a:fld>
             <a:endParaRPr lang="en-US"/>
           </a:p>
         </p:txBody>
       </p:sp>
     </p:spTree>
-    <p:extLst>
-      <p:ext uri="{BB962C8B-B14F-4D97-AF65-F5344CB8AC3E}">
-        <p14:creationId xmlns:p14="http://schemas.microsoft.com/office/powerpoint/2010/main" val="4223799957"/>
-      </p:ext>
-    </p:extLst>
   </p:cSld>
   <p:clrMapOvr>
     <a:masterClrMapping/>
@@ -7689,7 +7385,6 @@
           <a:p>
             <a:fld id="{2E1F187F-793E-4D8A-9D79-A6124A53932A}" type="datetimeFigureOut">
               <a:rPr lang="en-US" smtClean="0"/>
-              <a:t>1/28/2026</a:t>
             </a:fld>
             <a:endParaRPr lang="en-US"/>
           </a:p>
@@ -7813,18 +7508,12 @@
           <a:p>
             <a:fld id="{D0F5D3D1-D159-4E14-9738-EBB758377134}" type="slidenum">
               <a:rPr lang="en-US" smtClean="0"/>
-              <a:t>‹#›</a:t>
             </a:fld>
             <a:endParaRPr lang="en-US"/>
           </a:p>
         </p:txBody>
       </p:sp>
     </p:spTree>
-    <p:extLst>
-      <p:ext uri="{BB962C8B-B14F-4D97-AF65-F5344CB8AC3E}">
-        <p14:creationId xmlns:p14="http://schemas.microsoft.com/office/powerpoint/2010/main" val="3919051466"/>
-      </p:ext>
-    </p:extLst>
   </p:cSld>
   <p:clrMapOvr>
     <a:masterClrMapping/>
@@ -7866,7 +7555,6 @@
           <a:p>
             <a:fld id="{2E1F187F-793E-4D8A-9D79-A6124A53932A}" type="datetimeFigureOut">
               <a:rPr lang="en-US" smtClean="0"/>
-              <a:t>1/28/2026</a:t>
             </a:fld>
             <a:endParaRPr lang="en-US"/>
           </a:p>
@@ -7990,18 +7678,12 @@
           <a:p>
             <a:fld id="{D0F5D3D1-D159-4E14-9738-EBB758377134}" type="slidenum">
               <a:rPr lang="en-US" smtClean="0"/>
-              <a:t>‹#›</a:t>
             </a:fld>
             <a:endParaRPr lang="en-US"/>
           </a:p>
         </p:txBody>
       </p:sp>
     </p:spTree>
-    <p:extLst>
-      <p:ext uri="{BB962C8B-B14F-4D97-AF65-F5344CB8AC3E}">
-        <p14:creationId xmlns:p14="http://schemas.microsoft.com/office/powerpoint/2010/main" val="2858060991"/>
-      </p:ext>
-    </p:extLst>
   </p:cSld>
   <p:clrMapOvr>
     <a:masterClrMapping/>
@@ -8085,6 +7767,7 @@
               <a:rPr lang="en-US" smtClean="0"/>
               <a:t>Click to edit Master text styles</a:t>
             </a:r>
+            <a:endParaRPr lang="en-US" smtClean="0"/>
           </a:p>
           <a:p>
             <a:pPr lvl="1"/>
@@ -8092,6 +7775,7 @@
               <a:rPr lang="en-US" smtClean="0"/>
               <a:t>Second level</a:t>
             </a:r>
+            <a:endParaRPr lang="en-US" smtClean="0"/>
           </a:p>
           <a:p>
             <a:pPr lvl="2"/>
@@ -8099,6 +7783,7 @@
               <a:rPr lang="en-US" smtClean="0"/>
               <a:t>Third level</a:t>
             </a:r>
+            <a:endParaRPr lang="en-US" smtClean="0"/>
           </a:p>
           <a:p>
             <a:pPr lvl="3"/>
@@ -8106,6 +7791,7 @@
               <a:rPr lang="en-US" smtClean="0"/>
               <a:t>Fourth level</a:t>
             </a:r>
+            <a:endParaRPr lang="en-US" smtClean="0"/>
           </a:p>
           <a:p>
             <a:pPr lvl="4"/>
@@ -8179,6 +7865,7 @@
               <a:rPr lang="en-US" smtClean="0"/>
               <a:t>Click to edit Master text styles</a:t>
             </a:r>
+            <a:endParaRPr lang="en-US" smtClean="0"/>
           </a:p>
         </p:txBody>
       </p:sp>
@@ -8199,7 +7886,6 @@
           <a:p>
             <a:fld id="{2E1F187F-793E-4D8A-9D79-A6124A53932A}" type="datetimeFigureOut">
               <a:rPr lang="en-US" smtClean="0"/>
-              <a:t>1/28/2026</a:t>
             </a:fld>
             <a:endParaRPr lang="en-US"/>
           </a:p>
@@ -8323,18 +8009,12 @@
           <a:p>
             <a:fld id="{D0F5D3D1-D159-4E14-9738-EBB758377134}" type="slidenum">
               <a:rPr lang="en-US" smtClean="0"/>
-              <a:t>‹#›</a:t>
             </a:fld>
             <a:endParaRPr lang="en-US"/>
           </a:p>
         </p:txBody>
       </p:sp>
     </p:spTree>
-    <p:extLst>
-      <p:ext uri="{BB962C8B-B14F-4D97-AF65-F5344CB8AC3E}">
-        <p14:creationId xmlns:p14="http://schemas.microsoft.com/office/powerpoint/2010/main" val="2418431366"/>
-      </p:ext>
-    </p:extLst>
   </p:cSld>
   <p:clrMapOvr>
     <a:masterClrMapping/>
@@ -8524,6 +8204,7 @@
               <a:rPr lang="en-US" smtClean="0"/>
               <a:t>Click to edit Master text styles</a:t>
             </a:r>
+            <a:endParaRPr lang="en-US" smtClean="0"/>
           </a:p>
         </p:txBody>
       </p:sp>
@@ -8544,7 +8225,6 @@
           <a:p>
             <a:fld id="{2E1F187F-793E-4D8A-9D79-A6124A53932A}" type="datetimeFigureOut">
               <a:rPr lang="en-US" smtClean="0"/>
-              <a:t>1/28/2026</a:t>
             </a:fld>
             <a:endParaRPr lang="en-US"/>
           </a:p>
@@ -8673,18 +8353,12 @@
           <a:p>
             <a:fld id="{D0F5D3D1-D159-4E14-9738-EBB758377134}" type="slidenum">
               <a:rPr lang="en-US" smtClean="0"/>
-              <a:t>‹#›</a:t>
             </a:fld>
             <a:endParaRPr lang="en-US"/>
           </a:p>
         </p:txBody>
       </p:sp>
     </p:spTree>
-    <p:extLst>
-      <p:ext uri="{BB962C8B-B14F-4D97-AF65-F5344CB8AC3E}">
-        <p14:creationId xmlns:p14="http://schemas.microsoft.com/office/powerpoint/2010/main" val="1115250443"/>
-      </p:ext>
-    </p:extLst>
   </p:cSld>
   <p:clrMapOvr>
     <a:masterClrMapping/>
@@ -10594,6 +10268,7 @@
               <a:rPr lang="en-US" smtClean="0"/>
               <a:t>Click to edit Master text styles</a:t>
             </a:r>
+            <a:endParaRPr lang="en-US" smtClean="0"/>
           </a:p>
           <a:p>
             <a:pPr lvl="1"/>
@@ -10601,6 +10276,7 @@
               <a:rPr lang="en-US" smtClean="0"/>
               <a:t>Second level</a:t>
             </a:r>
+            <a:endParaRPr lang="en-US" smtClean="0"/>
           </a:p>
           <a:p>
             <a:pPr lvl="2"/>
@@ -10608,6 +10284,7 @@
               <a:rPr lang="en-US" smtClean="0"/>
               <a:t>Third level</a:t>
             </a:r>
+            <a:endParaRPr lang="en-US" smtClean="0"/>
           </a:p>
           <a:p>
             <a:pPr lvl="3"/>
@@ -10615,6 +10292,7 @@
               <a:rPr lang="en-US" smtClean="0"/>
               <a:t>Fourth level</a:t>
             </a:r>
+            <a:endParaRPr lang="en-US" smtClean="0"/>
           </a:p>
           <a:p>
             <a:pPr lvl="4"/>
@@ -10661,7 +10339,6 @@
           <a:p>
             <a:fld id="{2E1F187F-793E-4D8A-9D79-A6124A53932A}" type="datetimeFigureOut">
               <a:rPr lang="en-US" smtClean="0"/>
-              <a:t>1/28/2026</a:t>
             </a:fld>
             <a:endParaRPr lang="en-US"/>
           </a:p>
@@ -10737,37 +10414,31 @@
           <a:p>
             <a:fld id="{D0F5D3D1-D159-4E14-9738-EBB758377134}" type="slidenum">
               <a:rPr lang="en-US" smtClean="0"/>
-              <a:t>‹#›</a:t>
             </a:fld>
             <a:endParaRPr lang="en-US"/>
           </a:p>
         </p:txBody>
       </p:sp>
     </p:spTree>
-    <p:extLst>
-      <p:ext uri="{BB962C8B-B14F-4D97-AF65-F5344CB8AC3E}">
-        <p14:creationId xmlns:p14="http://schemas.microsoft.com/office/powerpoint/2010/main" val="599047808"/>
-      </p:ext>
-    </p:extLst>
   </p:cSld>
   <p:clrMap bg1="lt1" tx1="dk1" bg2="lt2" tx2="dk2" accent1="accent1" accent2="accent2" accent3="accent3" accent4="accent4" accent5="accent5" accent6="accent6" hlink="hlink" folHlink="folHlink"/>
   <p:sldLayoutIdLst>
-    <p:sldLayoutId id="2147483661" r:id="rId1"/>
-    <p:sldLayoutId id="2147483662" r:id="rId2"/>
-    <p:sldLayoutId id="2147483663" r:id="rId3"/>
-    <p:sldLayoutId id="2147483664" r:id="rId4"/>
-    <p:sldLayoutId id="2147483665" r:id="rId5"/>
-    <p:sldLayoutId id="2147483666" r:id="rId6"/>
-    <p:sldLayoutId id="2147483667" r:id="rId7"/>
-    <p:sldLayoutId id="2147483668" r:id="rId8"/>
-    <p:sldLayoutId id="2147483669" r:id="rId9"/>
-    <p:sldLayoutId id="2147483670" r:id="rId10"/>
-    <p:sldLayoutId id="2147483671" r:id="rId11"/>
-    <p:sldLayoutId id="2147483672" r:id="rId12"/>
-    <p:sldLayoutId id="2147483673" r:id="rId13"/>
-    <p:sldLayoutId id="2147483674" r:id="rId14"/>
-    <p:sldLayoutId id="2147483675" r:id="rId15"/>
-    <p:sldLayoutId id="2147483676" r:id="rId16"/>
+    <p:sldLayoutId id="2147483649" r:id="rId1"/>
+    <p:sldLayoutId id="2147483650" r:id="rId2"/>
+    <p:sldLayoutId id="2147483651" r:id="rId3"/>
+    <p:sldLayoutId id="2147483652" r:id="rId4"/>
+    <p:sldLayoutId id="2147483653" r:id="rId5"/>
+    <p:sldLayoutId id="2147483654" r:id="rId6"/>
+    <p:sldLayoutId id="2147483655" r:id="rId7"/>
+    <p:sldLayoutId id="2147483656" r:id="rId8"/>
+    <p:sldLayoutId id="2147483657" r:id="rId9"/>
+    <p:sldLayoutId id="2147483658" r:id="rId10"/>
+    <p:sldLayoutId id="2147483659" r:id="rId11"/>
+    <p:sldLayoutId id="2147483660" r:id="rId12"/>
+    <p:sldLayoutId id="2147483661" r:id="rId13"/>
+    <p:sldLayoutId id="2147483662" r:id="rId14"/>
+    <p:sldLayoutId id="2147483663" r:id="rId15"/>
+    <p:sldLayoutId id="2147483664" r:id="rId16"/>
   </p:sldLayoutIdLst>
   <p:txStyles>
     <p:titleStyle>
@@ -11203,23 +10874,17 @@
           <a:p>
             <a:r>
               <a:rPr lang="en-US" sz="8900" dirty="0">
-                <a:latin typeface="Times New Roman" pitchFamily="18" charset="0"/>
+                <a:latin typeface="Times New Roman" panose="02020603050405020304" pitchFamily="18" charset="0"/>
               </a:rPr>
               <a:t>UNIT TESTING</a:t>
             </a:r>
-            <a:r>
-              <a:rPr lang="en-US" dirty="0" smtClean="0">
-                <a:latin typeface="Times New Roman" pitchFamily="18" charset="0"/>
-              </a:rPr>
-              <a:t/>
-            </a:r>
             <a:br>
               <a:rPr lang="en-US" dirty="0" smtClean="0">
-                <a:latin typeface="Times New Roman" pitchFamily="18" charset="0"/>
+                <a:latin typeface="Times New Roman" panose="02020603050405020304" pitchFamily="18" charset="0"/>
               </a:rPr>
             </a:br>
             <a:endParaRPr lang="en-US" dirty="0" smtClean="0">
-              <a:latin typeface="Times New Roman" pitchFamily="18" charset="0"/>
+              <a:latin typeface="Times New Roman" panose="02020603050405020304" pitchFamily="18" charset="0"/>
             </a:endParaRPr>
           </a:p>
         </p:txBody>
@@ -11241,8 +10906,6 @@
           <a:p>
             <a:fld id="{A1DC7657-A9FD-436C-8AFA-031C7C94FF0F}" type="slidenum">
               <a:rPr lang="en-US"/>
-              <a:pPr/>
-              <a:t>1</a:t>
             </a:fld>
             <a:endParaRPr lang="en-US"/>
           </a:p>
@@ -11276,6 +10939,9 @@
               </a:rPr>
               <a:t>CS4036</a:t>
             </a:r>
+            <a:endParaRPr lang="en-US" sz="4800" dirty="0" smtClean="0">
+              <a:latin typeface="Blackadder ITC" panose="04020505051007020D02" pitchFamily="82" charset="0"/>
+            </a:endParaRPr>
           </a:p>
           <a:p>
             <a:r>
@@ -11302,11 +10968,6 @@
         </p:txBody>
       </p:sp>
     </p:spTree>
-    <p:extLst>
-      <p:ext uri="{BB962C8B-B14F-4D97-AF65-F5344CB8AC3E}">
-        <p14:creationId xmlns:p14="http://schemas.microsoft.com/office/powerpoint/2010/main" val="3891697250"/>
-      </p:ext>
-    </p:extLst>
   </p:cSld>
   <p:clrMapOvr>
     <a:masterClrMapping/>
@@ -11358,6 +11019,7 @@
               <a:rPr lang="en-US" dirty="0"/>
               <a:t>DEFECTPREVENTION</a:t>
             </a:r>
+            <a:endParaRPr lang="en-US" dirty="0"/>
           </a:p>
         </p:txBody>
       </p:sp>
@@ -11389,6 +11051,7 @@
               <a:rPr lang="en-US" dirty="0" smtClean="0"/>
               <a:t>.</a:t>
             </a:r>
+            <a:endParaRPr lang="en-US" dirty="0" smtClean="0"/>
           </a:p>
           <a:p>
             <a:r>
@@ -11421,15 +11084,11 @@
               <a:rPr lang="en-US" dirty="0"/>
               <a:t>, it is essential to adopt the concept of defect prevention during code development. </a:t>
             </a:r>
+            <a:endParaRPr lang="en-US" dirty="0"/>
           </a:p>
         </p:txBody>
       </p:sp>
     </p:spTree>
-    <p:extLst>
-      <p:ext uri="{BB962C8B-B14F-4D97-AF65-F5344CB8AC3E}">
-        <p14:creationId xmlns:p14="http://schemas.microsoft.com/office/powerpoint/2010/main" val="661117109"/>
-      </p:ext>
-    </p:extLst>
   </p:cSld>
   <p:clrMapOvr>
     <a:masterClrMapping/>
@@ -11483,10 +11142,13 @@
           <a:p>
             <a:r>
               <a:rPr lang="en-US" dirty="0" smtClean="0">
-                <a:latin typeface="Times New Roman" pitchFamily="18" charset="0"/>
+                <a:latin typeface="Times New Roman" panose="02020603050405020304" pitchFamily="18" charset="0"/>
               </a:rPr>
               <a:t>Dynamic Unit Testing</a:t>
             </a:r>
+            <a:endParaRPr lang="en-US" dirty="0" smtClean="0">
+              <a:latin typeface="Times New Roman" panose="02020603050405020304" pitchFamily="18" charset="0"/>
+            </a:endParaRPr>
           </a:p>
         </p:txBody>
       </p:sp>
@@ -11517,140 +11179,158 @@
           <a:p>
             <a:r>
               <a:rPr lang="en-US" sz="2000" dirty="0">
-                <a:latin typeface="Times New Roman" pitchFamily="18" charset="0"/>
+                <a:latin typeface="Times New Roman" panose="02020603050405020304" pitchFamily="18" charset="0"/>
               </a:rPr>
               <a:t>The environment of a unit is emulated and tested in isolation</a:t>
             </a:r>
+            <a:endParaRPr lang="en-US" sz="2000" dirty="0">
+              <a:latin typeface="Times New Roman" panose="02020603050405020304" pitchFamily="18" charset="0"/>
+            </a:endParaRPr>
           </a:p>
           <a:p>
             <a:r>
               <a:rPr lang="en-US" sz="2000" dirty="0">
-                <a:latin typeface="Times New Roman" pitchFamily="18" charset="0"/>
+                <a:latin typeface="Times New Roman" panose="02020603050405020304" pitchFamily="18" charset="0"/>
               </a:rPr>
               <a:t> The caller unit is known as </a:t>
             </a:r>
             <a:r>
               <a:rPr lang="en-US" sz="2000" i="1" dirty="0">
-                <a:latin typeface="Times New Roman" pitchFamily="18" charset="0"/>
+                <a:latin typeface="Times New Roman" panose="02020603050405020304" pitchFamily="18" charset="0"/>
               </a:rPr>
               <a:t>test driver</a:t>
             </a:r>
+            <a:endParaRPr lang="en-US" sz="2000" i="1" dirty="0">
+              <a:latin typeface="Times New Roman" panose="02020603050405020304" pitchFamily="18" charset="0"/>
+            </a:endParaRPr>
           </a:p>
           <a:p>
             <a:pPr lvl="1"/>
             <a:r>
               <a:rPr lang="en-US" sz="1800" dirty="0">
-                <a:latin typeface="Times New Roman" pitchFamily="18" charset="0"/>
+                <a:latin typeface="Times New Roman" panose="02020603050405020304" pitchFamily="18" charset="0"/>
               </a:rPr>
               <a:t> A </a:t>
             </a:r>
             <a:r>
               <a:rPr lang="en-US" sz="1800" i="1" dirty="0">
-                <a:latin typeface="Times New Roman" pitchFamily="18" charset="0"/>
+                <a:latin typeface="Times New Roman" panose="02020603050405020304" pitchFamily="18" charset="0"/>
               </a:rPr>
               <a:t>test driver</a:t>
             </a:r>
             <a:r>
               <a:rPr lang="en-US" sz="1800" dirty="0">
-                <a:latin typeface="Times New Roman" pitchFamily="18" charset="0"/>
+                <a:latin typeface="Times New Roman" panose="02020603050405020304" pitchFamily="18" charset="0"/>
               </a:rPr>
               <a:t> is a program that invokes the unit under test (UUT)</a:t>
             </a:r>
+            <a:endParaRPr lang="en-US" sz="1800" dirty="0">
+              <a:latin typeface="Times New Roman" panose="02020603050405020304" pitchFamily="18" charset="0"/>
+            </a:endParaRPr>
           </a:p>
           <a:p>
             <a:pPr lvl="1"/>
             <a:r>
               <a:rPr lang="en-US" sz="1800" dirty="0">
-                <a:latin typeface="Times New Roman" pitchFamily="18" charset="0"/>
+                <a:latin typeface="Times New Roman" panose="02020603050405020304" pitchFamily="18" charset="0"/>
               </a:rPr>
               <a:t>It provides input data to unit under test and report the test result</a:t>
             </a:r>
+            <a:endParaRPr lang="en-US" sz="1800" dirty="0">
+              <a:latin typeface="Times New Roman" panose="02020603050405020304" pitchFamily="18" charset="0"/>
+            </a:endParaRPr>
           </a:p>
           <a:p>
             <a:r>
               <a:rPr lang="en-US" sz="2000" dirty="0">
-                <a:latin typeface="Times New Roman" pitchFamily="18" charset="0"/>
+                <a:latin typeface="Times New Roman" panose="02020603050405020304" pitchFamily="18" charset="0"/>
               </a:rPr>
               <a:t>The emulation of the units called by the UUT are called </a:t>
             </a:r>
             <a:r>
               <a:rPr lang="en-US" sz="2000" i="1" dirty="0">
-                <a:latin typeface="Times New Roman" pitchFamily="18" charset="0"/>
+                <a:latin typeface="Times New Roman" panose="02020603050405020304" pitchFamily="18" charset="0"/>
               </a:rPr>
               <a:t>stubs</a:t>
             </a:r>
+            <a:endParaRPr lang="en-US" sz="2000" i="1" dirty="0">
+              <a:latin typeface="Times New Roman" panose="02020603050405020304" pitchFamily="18" charset="0"/>
+            </a:endParaRPr>
           </a:p>
           <a:p>
             <a:pPr lvl="1"/>
             <a:r>
               <a:rPr lang="en-US" sz="1800" i="1" dirty="0">
-                <a:latin typeface="Times New Roman" pitchFamily="18" charset="0"/>
+                <a:latin typeface="Times New Roman" panose="02020603050405020304" pitchFamily="18" charset="0"/>
               </a:rPr>
               <a:t> </a:t>
             </a:r>
             <a:r>
               <a:rPr lang="en-US" sz="1800" dirty="0">
-                <a:latin typeface="Times New Roman" pitchFamily="18" charset="0"/>
+                <a:latin typeface="Times New Roman" panose="02020603050405020304" pitchFamily="18" charset="0"/>
               </a:rPr>
               <a:t>It is a dummy program</a:t>
             </a:r>
+            <a:endParaRPr lang="en-US" sz="1800" dirty="0">
+              <a:latin typeface="Times New Roman" panose="02020603050405020304" pitchFamily="18" charset="0"/>
+            </a:endParaRPr>
           </a:p>
           <a:p>
             <a:r>
               <a:rPr lang="en-US" sz="2000" i="1" dirty="0">
-                <a:latin typeface="Times New Roman" pitchFamily="18" charset="0"/>
+                <a:latin typeface="Times New Roman" panose="02020603050405020304" pitchFamily="18" charset="0"/>
               </a:rPr>
               <a:t> </a:t>
             </a:r>
             <a:r>
               <a:rPr lang="en-US" sz="2000" dirty="0">
-                <a:latin typeface="Times New Roman" pitchFamily="18" charset="0"/>
+                <a:latin typeface="Times New Roman" panose="02020603050405020304" pitchFamily="18" charset="0"/>
               </a:rPr>
               <a:t>The </a:t>
             </a:r>
             <a:r>
               <a:rPr lang="en-US" sz="2000" i="1" dirty="0">
-                <a:latin typeface="Times New Roman" pitchFamily="18" charset="0"/>
+                <a:latin typeface="Times New Roman" panose="02020603050405020304" pitchFamily="18" charset="0"/>
               </a:rPr>
               <a:t>test driver</a:t>
             </a:r>
             <a:r>
               <a:rPr lang="en-US" sz="2000" dirty="0">
-                <a:latin typeface="Times New Roman" pitchFamily="18" charset="0"/>
+                <a:latin typeface="Times New Roman" panose="02020603050405020304" pitchFamily="18" charset="0"/>
               </a:rPr>
               <a:t> and the </a:t>
             </a:r>
             <a:r>
               <a:rPr lang="en-US" sz="2000" i="1" dirty="0">
-                <a:latin typeface="Times New Roman" pitchFamily="18" charset="0"/>
+                <a:latin typeface="Times New Roman" panose="02020603050405020304" pitchFamily="18" charset="0"/>
               </a:rPr>
               <a:t>stubs</a:t>
             </a:r>
             <a:r>
               <a:rPr lang="en-US" sz="2000" dirty="0">
-                <a:latin typeface="Times New Roman" pitchFamily="18" charset="0"/>
+                <a:latin typeface="Times New Roman" panose="02020603050405020304" pitchFamily="18" charset="0"/>
               </a:rPr>
               <a:t> are together called </a:t>
             </a:r>
             <a:r>
               <a:rPr lang="en-US" sz="2000" i="1" dirty="0">
-                <a:latin typeface="Times New Roman" pitchFamily="18" charset="0"/>
+                <a:latin typeface="Times New Roman" panose="02020603050405020304" pitchFamily="18" charset="0"/>
               </a:rPr>
               <a:t>scaffolding</a:t>
             </a:r>
             <a:endParaRPr lang="en-US" sz="2000" dirty="0">
-              <a:latin typeface="Times New Roman" pitchFamily="18" charset="0"/>
+              <a:latin typeface="Times New Roman" panose="02020603050405020304" pitchFamily="18" charset="0"/>
             </a:endParaRPr>
           </a:p>
           <a:p>
             <a:r>
               <a:rPr lang="en-US" sz="2000" dirty="0">
-                <a:latin typeface="Times New Roman" pitchFamily="18" charset="0"/>
+                <a:latin typeface="Times New Roman" panose="02020603050405020304" pitchFamily="18" charset="0"/>
               </a:rPr>
               <a:t> The low-level design document provides guidance for selection of input test data</a:t>
             </a:r>
             <a:endParaRPr lang="en-US" sz="2000" i="1" dirty="0">
-              <a:latin typeface="Times New Roman" pitchFamily="18" charset="0"/>
+              <a:latin typeface="Times New Roman" panose="02020603050405020304" pitchFamily="18" charset="0"/>
             </a:endParaRPr>
           </a:p>
         </p:txBody>
@@ -11672,8 +11352,6 @@
           <a:p>
             <a:fld id="{D29AC51E-B85E-483D-A16F-53BDAE719398}" type="slidenum">
               <a:rPr lang="en-US"/>
-              <a:pPr/>
-              <a:t>11</a:t>
             </a:fld>
             <a:endParaRPr lang="en-US"/>
           </a:p>
@@ -11690,7 +11368,7 @@
           </p:nvPr>
         </p:nvPicPr>
         <p:blipFill>
-          <a:blip r:embed="rId3"/>
+          <a:blip r:embed="rId1"/>
           <a:srcRect/>
           <a:stretch>
             <a:fillRect/>
@@ -11701,7 +11379,6 @@
             <a:off x="7566025" y="2979738"/>
             <a:ext cx="4625975" cy="3006725"/>
           </a:xfrm>
-          <a:ln/>
         </p:spPr>
       </p:pic>
       <p:sp>
@@ -11741,15 +11418,15 @@
               </a:rPr>
               <a:t>Figure 3.2: Dynamic unit test environment</a:t>
             </a:r>
+            <a:endParaRPr lang="en-US" dirty="0">
+              <a:solidFill>
+                <a:srgbClr val="000000"/>
+              </a:solidFill>
+            </a:endParaRPr>
           </a:p>
         </p:txBody>
       </p:sp>
     </p:spTree>
-    <p:extLst>
-      <p:ext uri="{BB962C8B-B14F-4D97-AF65-F5344CB8AC3E}">
-        <p14:creationId xmlns:p14="http://schemas.microsoft.com/office/powerpoint/2010/main" val="976948048"/>
-      </p:ext>
-    </p:extLst>
   </p:cSld>
   <p:clrMapOvr>
     <a:masterClrMapping/>
@@ -11806,10 +11483,13 @@
           <a:p>
             <a:r>
               <a:rPr lang="en-US" dirty="0" smtClean="0">
-                <a:latin typeface="Times New Roman" pitchFamily="18" charset="0"/>
+                <a:latin typeface="Times New Roman" panose="02020603050405020304" pitchFamily="18" charset="0"/>
               </a:rPr>
               <a:t>Dynamic Unit Testing</a:t>
             </a:r>
+            <a:endParaRPr lang="en-US" dirty="0" smtClean="0">
+              <a:latin typeface="Times New Roman" panose="02020603050405020304" pitchFamily="18" charset="0"/>
+            </a:endParaRPr>
           </a:p>
         </p:txBody>
       </p:sp>
@@ -11840,106 +11520,142 @@
           <a:p>
             <a:r>
               <a:rPr lang="en-US" dirty="0" smtClean="0">
-                <a:latin typeface="Times New Roman" pitchFamily="18" charset="0"/>
+                <a:latin typeface="Times New Roman" panose="02020603050405020304" pitchFamily="18" charset="0"/>
               </a:rPr>
               <a:t>Control flow testing</a:t>
             </a:r>
+            <a:endParaRPr lang="en-US" dirty="0" smtClean="0">
+              <a:latin typeface="Times New Roman" panose="02020603050405020304" pitchFamily="18" charset="0"/>
+            </a:endParaRPr>
           </a:p>
           <a:p>
             <a:pPr lvl="1"/>
             <a:r>
               <a:rPr lang="en-US" dirty="0" smtClean="0">
-                <a:latin typeface="Times New Roman" pitchFamily="18" charset="0"/>
+                <a:latin typeface="Times New Roman" panose="02020603050405020304" pitchFamily="18" charset="0"/>
               </a:rPr>
               <a:t>Draw a control flow graph (CFG) from a program unit</a:t>
             </a:r>
+            <a:endParaRPr lang="en-US" dirty="0" smtClean="0">
+              <a:latin typeface="Times New Roman" panose="02020603050405020304" pitchFamily="18" charset="0"/>
+            </a:endParaRPr>
           </a:p>
           <a:p>
             <a:pPr lvl="1"/>
             <a:r>
               <a:rPr lang="en-US" dirty="0" smtClean="0">
-                <a:latin typeface="Times New Roman" pitchFamily="18" charset="0"/>
+                <a:latin typeface="Times New Roman" panose="02020603050405020304" pitchFamily="18" charset="0"/>
               </a:rPr>
               <a:t>Select a few control flow testing criteria</a:t>
             </a:r>
+            <a:endParaRPr lang="en-US" dirty="0" smtClean="0">
+              <a:latin typeface="Times New Roman" panose="02020603050405020304" pitchFamily="18" charset="0"/>
+            </a:endParaRPr>
           </a:p>
           <a:p>
             <a:pPr lvl="1"/>
             <a:r>
               <a:rPr lang="en-US" dirty="0" smtClean="0">
-                <a:latin typeface="Times New Roman" pitchFamily="18" charset="0"/>
+                <a:latin typeface="Times New Roman" panose="02020603050405020304" pitchFamily="18" charset="0"/>
               </a:rPr>
               <a:t>Identify a path in the CFG to satisfy the selection criteria</a:t>
             </a:r>
+            <a:endParaRPr lang="en-US" dirty="0" smtClean="0">
+              <a:latin typeface="Times New Roman" panose="02020603050405020304" pitchFamily="18" charset="0"/>
+            </a:endParaRPr>
           </a:p>
           <a:p>
             <a:pPr lvl="1"/>
             <a:r>
               <a:rPr lang="en-US" dirty="0" smtClean="0">
-                <a:latin typeface="Times New Roman" pitchFamily="18" charset="0"/>
+                <a:latin typeface="Times New Roman" panose="02020603050405020304" pitchFamily="18" charset="0"/>
               </a:rPr>
               <a:t>Derive the path predicate expression from the selection paths</a:t>
             </a:r>
+            <a:endParaRPr lang="en-US" dirty="0" smtClean="0">
+              <a:latin typeface="Times New Roman" panose="02020603050405020304" pitchFamily="18" charset="0"/>
+            </a:endParaRPr>
           </a:p>
           <a:p>
             <a:pPr lvl="1"/>
             <a:r>
               <a:rPr lang="en-US" dirty="0" smtClean="0">
-                <a:latin typeface="Times New Roman" pitchFamily="18" charset="0"/>
+                <a:latin typeface="Times New Roman" panose="02020603050405020304" pitchFamily="18" charset="0"/>
               </a:rPr>
               <a:t> By solving the path predicate expression for a path, one can generate the data</a:t>
             </a:r>
+            <a:endParaRPr lang="en-US" dirty="0" smtClean="0">
+              <a:latin typeface="Times New Roman" panose="02020603050405020304" pitchFamily="18" charset="0"/>
+            </a:endParaRPr>
           </a:p>
           <a:p>
             <a:r>
               <a:rPr lang="en-US" dirty="0" smtClean="0">
-                <a:latin typeface="Times New Roman" pitchFamily="18" charset="0"/>
+                <a:latin typeface="Times New Roman" panose="02020603050405020304" pitchFamily="18" charset="0"/>
               </a:rPr>
               <a:t>Data flow testing</a:t>
             </a:r>
+            <a:endParaRPr lang="en-US" dirty="0" smtClean="0">
+              <a:latin typeface="Times New Roman" panose="02020603050405020304" pitchFamily="18" charset="0"/>
+            </a:endParaRPr>
           </a:p>
           <a:p>
             <a:pPr lvl="1"/>
             <a:r>
               <a:rPr lang="en-US" dirty="0" smtClean="0">
-                <a:latin typeface="Times New Roman" pitchFamily="18" charset="0"/>
+                <a:latin typeface="Times New Roman" panose="02020603050405020304" pitchFamily="18" charset="0"/>
               </a:rPr>
               <a:t>Draw a data flow graph (DFG) from a program unit and then follow the  procedure described in control flow testing.</a:t>
             </a:r>
+            <a:endParaRPr lang="en-US" dirty="0" smtClean="0">
+              <a:latin typeface="Times New Roman" panose="02020603050405020304" pitchFamily="18" charset="0"/>
+            </a:endParaRPr>
           </a:p>
           <a:p>
             <a:r>
               <a:rPr lang="en-US" dirty="0" smtClean="0">
-                <a:latin typeface="Times New Roman" pitchFamily="18" charset="0"/>
+                <a:latin typeface="Times New Roman" panose="02020603050405020304" pitchFamily="18" charset="0"/>
               </a:rPr>
               <a:t>Domain testing</a:t>
             </a:r>
+            <a:endParaRPr lang="en-US" dirty="0" smtClean="0">
+              <a:latin typeface="Times New Roman" panose="02020603050405020304" pitchFamily="18" charset="0"/>
+            </a:endParaRPr>
           </a:p>
           <a:p>
             <a:pPr lvl="1"/>
             <a:r>
               <a:rPr lang="en-US" dirty="0" smtClean="0">
-                <a:latin typeface="Times New Roman" pitchFamily="18" charset="0"/>
+                <a:latin typeface="Times New Roman" panose="02020603050405020304" pitchFamily="18" charset="0"/>
               </a:rPr>
               <a:t>Domain errors are defined and then test data are selected to catch those faults</a:t>
             </a:r>
+            <a:endParaRPr lang="en-US" dirty="0" smtClean="0">
+              <a:latin typeface="Times New Roman" panose="02020603050405020304" pitchFamily="18" charset="0"/>
+            </a:endParaRPr>
           </a:p>
           <a:p>
             <a:r>
               <a:rPr lang="en-US" dirty="0" smtClean="0">
-                <a:latin typeface="Times New Roman" pitchFamily="18" charset="0"/>
+                <a:latin typeface="Times New Roman" panose="02020603050405020304" pitchFamily="18" charset="0"/>
               </a:rPr>
               <a:t>Functional program testing</a:t>
             </a:r>
+            <a:endParaRPr lang="en-US" dirty="0" smtClean="0">
+              <a:latin typeface="Times New Roman" panose="02020603050405020304" pitchFamily="18" charset="0"/>
+            </a:endParaRPr>
           </a:p>
           <a:p>
             <a:pPr lvl="1"/>
             <a:r>
               <a:rPr lang="en-US" dirty="0" smtClean="0">
-                <a:latin typeface="Times New Roman" pitchFamily="18" charset="0"/>
+                <a:latin typeface="Times New Roman" panose="02020603050405020304" pitchFamily="18" charset="0"/>
               </a:rPr>
               <a:t>Input/output domains are defined to compute the input values that will cause the unit to produce expected output values</a:t>
             </a:r>
+            <a:endParaRPr lang="en-US" dirty="0" smtClean="0">
+              <a:latin typeface="Times New Roman" panose="02020603050405020304" pitchFamily="18" charset="0"/>
+            </a:endParaRPr>
           </a:p>
         </p:txBody>
       </p:sp>
@@ -11960,8 +11676,6 @@
           <a:p>
             <a:fld id="{A262AD1B-065B-4D63-806D-2452918139DF}" type="slidenum">
               <a:rPr lang="en-US"/>
-              <a:pPr/>
-              <a:t>12</a:t>
             </a:fld>
             <a:endParaRPr lang="en-US"/>
           </a:p>
@@ -12011,15 +11725,15 @@
               </a:rPr>
               <a:t>Selection of test data is broadly based on the following techniques:</a:t>
             </a:r>
+            <a:endParaRPr lang="en-US" sz="2400" dirty="0">
+              <a:solidFill>
+                <a:srgbClr val="000000"/>
+              </a:solidFill>
+            </a:endParaRPr>
           </a:p>
         </p:txBody>
       </p:sp>
     </p:spTree>
-    <p:extLst>
-      <p:ext uri="{BB962C8B-B14F-4D97-AF65-F5344CB8AC3E}">
-        <p14:creationId xmlns:p14="http://schemas.microsoft.com/office/powerpoint/2010/main" val="403232974"/>
-      </p:ext>
-    </p:extLst>
   </p:cSld>
   <p:clrMapOvr>
     <a:masterClrMapping/>
@@ -12075,7 +11789,7 @@
           <a:lstStyle/>
           <a:p>
             <a:endParaRPr lang="en-US" dirty="0" smtClean="0">
-              <a:latin typeface="Times New Roman" pitchFamily="18" charset="0"/>
+              <a:latin typeface="Times New Roman" panose="02020603050405020304" pitchFamily="18" charset="0"/>
             </a:endParaRPr>
           </a:p>
         </p:txBody>
@@ -12097,8 +11811,6 @@
           <a:p>
             <a:fld id="{A262AD1B-065B-4D63-806D-2452918139DF}" type="slidenum">
               <a:rPr lang="en-US"/>
-              <a:pPr/>
-              <a:t>13</a:t>
             </a:fld>
             <a:endParaRPr lang="en-US"/>
           </a:p>
@@ -12204,6 +11916,11 @@
               </a:rPr>
               <a:t>Debugging:</a:t>
             </a:r>
+            <a:endParaRPr lang="en-US" sz="2400" dirty="0" smtClean="0">
+              <a:solidFill>
+                <a:srgbClr val="000000"/>
+              </a:solidFill>
+            </a:endParaRPr>
           </a:p>
           <a:p>
             <a:pPr>
@@ -12219,6 +11936,11 @@
               </a:rPr>
               <a:t>Brut Force</a:t>
             </a:r>
+            <a:endParaRPr lang="en-US" sz="2400" dirty="0" smtClean="0">
+              <a:solidFill>
+                <a:srgbClr val="000000"/>
+              </a:solidFill>
+            </a:endParaRPr>
           </a:p>
           <a:p>
             <a:pPr>
@@ -12234,6 +11956,11 @@
               </a:rPr>
               <a:t>Cause elimination</a:t>
             </a:r>
+            <a:endParaRPr lang="en-US" sz="2400" dirty="0" smtClean="0">
+              <a:solidFill>
+                <a:srgbClr val="000000"/>
+              </a:solidFill>
+            </a:endParaRPr>
           </a:p>
           <a:p>
             <a:pPr>
@@ -12258,11 +11985,6 @@
         </p:txBody>
       </p:sp>
     </p:spTree>
-    <p:extLst>
-      <p:ext uri="{BB962C8B-B14F-4D97-AF65-F5344CB8AC3E}">
-        <p14:creationId xmlns:p14="http://schemas.microsoft.com/office/powerpoint/2010/main" val="2148363026"/>
-      </p:ext>
-    </p:extLst>
   </p:cSld>
   <p:clrMapOvr>
     <a:masterClrMapping/>
@@ -12319,12 +12041,12 @@
           <a:p>
             <a:r>
               <a:rPr lang="en-US" dirty="0" smtClean="0">
-                <a:latin typeface="Times New Roman" pitchFamily="18" charset="0"/>
+                <a:latin typeface="Times New Roman" panose="02020603050405020304" pitchFamily="18" charset="0"/>
               </a:rPr>
               <a:t>Mutation Testing</a:t>
             </a:r>
             <a:endParaRPr lang="en-US" dirty="0" smtClean="0">
-              <a:latin typeface="Times New Roman" pitchFamily="18" charset="0"/>
+              <a:latin typeface="Times New Roman" panose="02020603050405020304" pitchFamily="18" charset="0"/>
             </a:endParaRPr>
           </a:p>
         </p:txBody>
@@ -12346,8 +12068,6 @@
           <a:p>
             <a:fld id="{A262AD1B-065B-4D63-806D-2452918139DF}" type="slidenum">
               <a:rPr lang="en-US"/>
-              <a:pPr/>
-              <a:t>14</a:t>
             </a:fld>
             <a:endParaRPr lang="en-US"/>
           </a:p>
@@ -12408,6 +12128,7 @@
               <a:rPr lang="en-US" sz="2400" dirty="0" smtClean="0"/>
               <a:t>.</a:t>
             </a:r>
+            <a:endParaRPr lang="en-US" sz="2400" dirty="0" smtClean="0"/>
           </a:p>
           <a:p>
             <a:endParaRPr lang="en-US" sz="2400" dirty="0"/>
@@ -12421,6 +12142,7 @@
               <a:rPr lang="en-US" sz="2400" dirty="0" smtClean="0"/>
               <a:t>.</a:t>
             </a:r>
+            <a:endParaRPr lang="en-US" sz="2400" dirty="0" smtClean="0"/>
           </a:p>
           <a:p>
             <a:endParaRPr lang="en-US" sz="2400" dirty="0"/>
@@ -12456,6 +12178,7 @@
               <a:rPr lang="en-US" sz="2400" dirty="0" smtClean="0"/>
               <a:t>.</a:t>
             </a:r>
+            <a:endParaRPr lang="en-US" sz="2400" dirty="0" smtClean="0"/>
           </a:p>
           <a:p>
             <a:endParaRPr lang="en-US" sz="2400" dirty="0"/>
@@ -12472,11 +12195,6 @@
         </p:txBody>
       </p:sp>
     </p:spTree>
-    <p:extLst>
-      <p:ext uri="{BB962C8B-B14F-4D97-AF65-F5344CB8AC3E}">
-        <p14:creationId xmlns:p14="http://schemas.microsoft.com/office/powerpoint/2010/main" val="1614840558"/>
-      </p:ext>
-    </p:extLst>
   </p:cSld>
   <p:clrMapOvr>
     <a:masterClrMapping/>
@@ -12533,12 +12251,12 @@
           <a:p>
             <a:r>
               <a:rPr lang="en-US" dirty="0" smtClean="0">
-                <a:latin typeface="Times New Roman" pitchFamily="18" charset="0"/>
+                <a:latin typeface="Times New Roman" panose="02020603050405020304" pitchFamily="18" charset="0"/>
               </a:rPr>
               <a:t>Mutation Testing: Workflow</a:t>
             </a:r>
             <a:endParaRPr lang="en-US" dirty="0" smtClean="0">
-              <a:latin typeface="Times New Roman" pitchFamily="18" charset="0"/>
+              <a:latin typeface="Times New Roman" panose="02020603050405020304" pitchFamily="18" charset="0"/>
             </a:endParaRPr>
           </a:p>
         </p:txBody>
@@ -12560,8 +12278,6 @@
           <a:p>
             <a:fld id="{A262AD1B-065B-4D63-806D-2452918139DF}" type="slidenum">
               <a:rPr lang="en-US"/>
-              <a:pPr/>
-              <a:t>15</a:t>
             </a:fld>
             <a:endParaRPr lang="en-US"/>
           </a:p>
@@ -12609,6 +12325,7 @@
               <a:rPr lang="en-US" sz="2400" dirty="0"/>
               <a:t>You start with your original, correct code and a set of test cases that all pass.</a:t>
             </a:r>
+            <a:endParaRPr lang="en-US" sz="2400" dirty="0"/>
           </a:p>
           <a:p>
             <a:pPr lvl="0"/>
@@ -12620,6 +12337,7 @@
               <a:rPr lang="en-US" sz="2400" dirty="0"/>
               <a:t> if (x &gt; 0) return true;</a:t>
             </a:r>
+            <a:endParaRPr lang="en-US" sz="2400" dirty="0"/>
           </a:p>
           <a:p>
             <a:pPr lvl="0"/>
@@ -12647,6 +12365,7 @@
               <a:rPr lang="en-US" sz="2400" dirty="0"/>
               <a:t>)</a:t>
             </a:r>
+            <a:endParaRPr lang="en-US" sz="2400" dirty="0"/>
           </a:p>
           <a:p>
             <a:r>
@@ -12676,6 +12395,7 @@
               <a:rPr lang="en-US" sz="2400" dirty="0"/>
               <a:t>.</a:t>
             </a:r>
+            <a:endParaRPr lang="en-US" sz="2400" dirty="0"/>
           </a:p>
           <a:p>
             <a:pPr lvl="0"/>
@@ -12687,6 +12407,7 @@
               <a:rPr lang="en-US" sz="2400" dirty="0"/>
               <a:t> if (x &gt;= 0) return true; (Relational operator change)</a:t>
             </a:r>
+            <a:endParaRPr lang="en-US" sz="2400" dirty="0"/>
           </a:p>
           <a:p>
             <a:pPr lvl="0"/>
@@ -12698,6 +12419,7 @@
               <a:rPr lang="en-US" sz="2400" dirty="0"/>
               <a:t> if (x &lt; 0) return true; (Logic reversal)</a:t>
             </a:r>
+            <a:endParaRPr lang="en-US" sz="2400" dirty="0"/>
           </a:p>
           <a:p>
             <a:pPr lvl="0"/>
@@ -12709,11 +12431,12 @@
               <a:rPr lang="en-US" sz="2400" dirty="0"/>
               <a:t> if (x &gt; 1) return true; (Value change)</a:t>
             </a:r>
-          </a:p>
-          <a:p>
             <a:endParaRPr lang="en-US" sz="2400" dirty="0"/>
           </a:p>
           <a:p>
+            <a:endParaRPr lang="en-US" sz="2400" dirty="0"/>
+          </a:p>
+          <a:p>
             <a:endParaRPr lang="en-US" sz="2400" dirty="0" smtClean="0"/>
           </a:p>
           <a:p>
@@ -12725,11 +12448,6 @@
         </p:txBody>
       </p:sp>
     </p:spTree>
-    <p:extLst>
-      <p:ext uri="{BB962C8B-B14F-4D97-AF65-F5344CB8AC3E}">
-        <p14:creationId xmlns:p14="http://schemas.microsoft.com/office/powerpoint/2010/main" val="789590863"/>
-      </p:ext>
-    </p:extLst>
   </p:cSld>
   <p:clrMapOvr>
     <a:masterClrMapping/>
@@ -12786,12 +12504,12 @@
           <a:p>
             <a:r>
               <a:rPr lang="en-US" dirty="0" smtClean="0">
-                <a:latin typeface="Times New Roman" pitchFamily="18" charset="0"/>
+                <a:latin typeface="Times New Roman" panose="02020603050405020304" pitchFamily="18" charset="0"/>
               </a:rPr>
               <a:t>Mutation Testing: Workflow</a:t>
             </a:r>
             <a:endParaRPr lang="en-US" dirty="0" smtClean="0">
-              <a:latin typeface="Times New Roman" pitchFamily="18" charset="0"/>
+              <a:latin typeface="Times New Roman" panose="02020603050405020304" pitchFamily="18" charset="0"/>
             </a:endParaRPr>
           </a:p>
         </p:txBody>
@@ -12813,8 +12531,6 @@
           <a:p>
             <a:fld id="{A262AD1B-065B-4D63-806D-2452918139DF}" type="slidenum">
               <a:rPr lang="en-US"/>
-              <a:pPr/>
-              <a:t>16</a:t>
             </a:fld>
             <a:endParaRPr lang="en-US"/>
           </a:p>
@@ -12862,6 +12578,7 @@
               <a:rPr lang="en-US" sz="2400" dirty="0"/>
               <a:t>You run your original test cases against every single mutant.</a:t>
             </a:r>
+            <a:endParaRPr lang="en-US" sz="2400" dirty="0"/>
           </a:p>
           <a:p>
             <a:r>
@@ -12888,6 +12605,7 @@
               <a:rPr lang="en-US" sz="2400" dirty="0"/>
               <a:t>! It means your test was strong enough to notice the change.</a:t>
             </a:r>
+            <a:endParaRPr lang="en-US" sz="2400" dirty="0"/>
           </a:p>
           <a:p>
             <a:pPr lvl="0"/>
@@ -12907,11 +12625,12 @@
               <a:rPr lang="en-US" sz="2400" dirty="0"/>
               <a:t>. it means your tests are weak and missed a potential bug.</a:t>
             </a:r>
-          </a:p>
-          <a:p>
             <a:endParaRPr lang="en-US" sz="2400" dirty="0"/>
           </a:p>
           <a:p>
+            <a:endParaRPr lang="en-US" sz="2400" dirty="0"/>
+          </a:p>
+          <a:p>
             <a:endParaRPr lang="en-US" sz="2400" dirty="0" smtClean="0"/>
           </a:p>
           <a:p>
@@ -12923,11 +12642,6 @@
         </p:txBody>
       </p:sp>
     </p:spTree>
-    <p:extLst>
-      <p:ext uri="{BB962C8B-B14F-4D97-AF65-F5344CB8AC3E}">
-        <p14:creationId xmlns:p14="http://schemas.microsoft.com/office/powerpoint/2010/main" val="4150866710"/>
-      </p:ext>
-    </p:extLst>
   </p:cSld>
   <p:clrMapOvr>
     <a:masterClrMapping/>
@@ -12984,7 +12698,7 @@
           <a:p>
             <a:r>
               <a:rPr lang="en-US" dirty="0" smtClean="0">
-                <a:latin typeface="Times New Roman" pitchFamily="18" charset="0"/>
+                <a:latin typeface="Times New Roman" panose="02020603050405020304" pitchFamily="18" charset="0"/>
               </a:rPr>
               <a:t>Mutation Testing: </a:t>
             </a:r>
@@ -12993,7 +12707,7 @@
               <a:t>Programming Example</a:t>
             </a:r>
             <a:endParaRPr lang="en-US" dirty="0" smtClean="0">
-              <a:latin typeface="Times New Roman" pitchFamily="18" charset="0"/>
+              <a:latin typeface="Times New Roman" panose="02020603050405020304" pitchFamily="18" charset="0"/>
             </a:endParaRPr>
           </a:p>
         </p:txBody>
@@ -13015,8 +12729,6 @@
           <a:p>
             <a:fld id="{A262AD1B-065B-4D63-806D-2452918139DF}" type="slidenum">
               <a:rPr lang="en-US"/>
-              <a:pPr/>
-              <a:t>17</a:t>
             </a:fld>
             <a:endParaRPr lang="en-US"/>
           </a:p>
@@ -13073,6 +12785,7 @@
               <a:rPr lang="en-US" sz="2400" dirty="0"/>
               <a:t>(20) → Expected: "Yes"</a:t>
             </a:r>
+            <a:endParaRPr lang="en-US" sz="2400" dirty="0"/>
           </a:p>
           <a:p>
             <a:pPr lvl="0"/>
@@ -13088,6 +12801,7 @@
               <a:rPr lang="en-US" sz="2400" dirty="0"/>
               <a:t>(10) → Expected: "No"</a:t>
             </a:r>
+            <a:endParaRPr lang="en-US" sz="2400" dirty="0"/>
           </a:p>
           <a:p>
             <a:r>
@@ -13101,6 +12815,7 @@
               <a:rPr lang="en-US" sz="2400" dirty="0"/>
               <a:t>The tool creates a mutant by changing the boundary operator:</a:t>
             </a:r>
+            <a:endParaRPr lang="en-US" sz="2400" dirty="0"/>
           </a:p>
           <a:p>
             <a:r>
@@ -13111,6 +12826,7 @@
               <a:rPr lang="en-US" sz="2400" dirty="0"/>
               <a:t> if age &gt; 18: (Changed &gt;= to &gt;)</a:t>
             </a:r>
+            <a:endParaRPr lang="en-US" sz="2400" dirty="0"/>
           </a:p>
           <a:p>
             <a:r>
@@ -13160,6 +12876,7 @@
               <a:rPr lang="en-US" sz="2400" dirty="0"/>
               <a:t>. Your tests didn't notice that an 18-year-old would now be told "No" instead of "Yes."</a:t>
             </a:r>
+            <a:endParaRPr lang="en-US" sz="2400" dirty="0"/>
           </a:p>
           <a:p>
             <a:r>
@@ -13178,6 +12895,7 @@
               <a:rPr lang="en-US" sz="2400" dirty="0"/>
               <a:t>(18). This test would fail on the mutant, thus "killing" it and making your suite stronger.</a:t>
             </a:r>
+            <a:endParaRPr lang="en-US" sz="2400" dirty="0"/>
           </a:p>
           <a:p>
             <a:pPr lvl="0"/>
@@ -13189,6 +12907,7 @@
               <a:rPr lang="en-US" sz="2400" dirty="0" smtClean="0"/>
               <a:t>.</a:t>
             </a:r>
+            <a:endParaRPr lang="en-US" sz="2400" dirty="0" smtClean="0"/>
           </a:p>
           <a:p>
             <a:endParaRPr lang="en-US" sz="2400" dirty="0"/>
@@ -13213,7 +12932,7 @@
           <p:nvPr/>
         </p:nvPicPr>
         <p:blipFill>
-          <a:blip r:embed="rId3"/>
+          <a:blip r:embed="rId1"/>
           <a:stretch>
             <a:fillRect/>
           </a:stretch>
@@ -13229,11 +12948,6 @@
         </p:spPr>
       </p:pic>
     </p:spTree>
-    <p:extLst>
-      <p:ext uri="{BB962C8B-B14F-4D97-AF65-F5344CB8AC3E}">
-        <p14:creationId xmlns:p14="http://schemas.microsoft.com/office/powerpoint/2010/main" val="1243392295"/>
-      </p:ext>
-    </p:extLst>
   </p:cSld>
   <p:clrMapOvr>
     <a:masterClrMapping/>
@@ -13290,12 +13004,12 @@
           <a:p>
             <a:r>
               <a:rPr lang="en-US" dirty="0" smtClean="0">
-                <a:latin typeface="Times New Roman" pitchFamily="18" charset="0"/>
+                <a:latin typeface="Times New Roman" panose="02020603050405020304" pitchFamily="18" charset="0"/>
               </a:rPr>
               <a:t>Mutation Testing:</a:t>
             </a:r>
             <a:endParaRPr lang="en-US" dirty="0" smtClean="0">
-              <a:latin typeface="Times New Roman" pitchFamily="18" charset="0"/>
+              <a:latin typeface="Times New Roman" panose="02020603050405020304" pitchFamily="18" charset="0"/>
             </a:endParaRPr>
           </a:p>
         </p:txBody>
@@ -13317,8 +13031,6 @@
           <a:p>
             <a:fld id="{A262AD1B-065B-4D63-806D-2452918139DF}" type="slidenum">
               <a:rPr lang="en-US"/>
-              <a:pPr/>
-              <a:t>18</a:t>
             </a:fld>
             <a:endParaRPr lang="en-US"/>
           </a:p>
@@ -13366,6 +13078,7 @@
               <a:rPr lang="en-US" sz="2400" dirty="0"/>
               <a:t>At the end, you calculate a score to see how effective your testing is:</a:t>
             </a:r>
+            <a:endParaRPr lang="en-US" sz="2400" dirty="0"/>
           </a:p>
           <a:p>
             <a:pPr lvl="0"/>
@@ -13373,6 +13086,7 @@
               <a:rPr lang="en-US" sz="2400" b="1" dirty="0" smtClean="0"/>
               <a:t>	 </a:t>
             </a:r>
+            <a:endParaRPr lang="en-US" sz="2400" b="1" dirty="0" smtClean="0"/>
           </a:p>
           <a:p>
             <a:pPr lvl="0"/>
@@ -13408,6 +13122,7 @@
               <a:rPr lang="en-US" sz="2400" dirty="0" smtClean="0"/>
               <a:t>.</a:t>
             </a:r>
+            <a:endParaRPr lang="en-US" sz="2400" dirty="0" smtClean="0"/>
           </a:p>
           <a:p>
             <a:pPr lvl="0"/>
@@ -13425,6 +13140,7 @@
               <a:rPr lang="en-US" sz="2400" dirty="0"/>
               <a:t>Sometimes a tool creates a mutant that is logically identical to the original code, even if it looks different.</a:t>
             </a:r>
+            <a:endParaRPr lang="en-US" sz="2400" dirty="0"/>
           </a:p>
           <a:p>
             <a:pPr lvl="0"/>
@@ -13460,6 +13176,7 @@
               <a:rPr lang="en-US" sz="2400" dirty="0"/>
               <a:t>++)</a:t>
             </a:r>
+            <a:endParaRPr lang="en-US" sz="2400" dirty="0"/>
           </a:p>
           <a:p>
             <a:pPr lvl="0"/>
@@ -13495,6 +13212,7 @@
               <a:rPr lang="en-US" sz="2400" dirty="0"/>
               <a:t>++)</a:t>
             </a:r>
+            <a:endParaRPr lang="en-US" sz="2400" dirty="0"/>
           </a:p>
           <a:p>
             <a:r>
@@ -13509,6 +13227,7 @@
               <a:rPr lang="en-US" sz="2400" dirty="0"/>
               <a:t> and are usually filtered out manually by the tester.</a:t>
             </a:r>
+            <a:endParaRPr lang="en-US" sz="2400" dirty="0"/>
           </a:p>
           <a:p>
             <a:pPr lvl="0"/>
@@ -13524,6 +13243,7 @@
               <a:rPr lang="en-US" sz="2400" dirty="0" smtClean="0"/>
               <a:t>.</a:t>
             </a:r>
+            <a:endParaRPr lang="en-US" sz="2400" dirty="0" smtClean="0"/>
           </a:p>
           <a:p>
             <a:endParaRPr lang="en-US" sz="2400" dirty="0"/>
@@ -13548,7 +13268,7 @@
           <p:nvPr/>
         </p:nvPicPr>
         <p:blipFill>
-          <a:blip r:embed="rId3"/>
+          <a:blip r:embed="rId1"/>
           <a:stretch>
             <a:fillRect/>
           </a:stretch>
@@ -13564,11 +13284,6 @@
         </p:spPr>
       </p:pic>
     </p:spTree>
-    <p:extLst>
-      <p:ext uri="{BB962C8B-B14F-4D97-AF65-F5344CB8AC3E}">
-        <p14:creationId xmlns:p14="http://schemas.microsoft.com/office/powerpoint/2010/main" val="2646762662"/>
-      </p:ext>
-    </p:extLst>
   </p:cSld>
   <p:clrMapOvr>
     <a:masterClrMapping/>
@@ -13625,12 +13340,12 @@
           <a:p>
             <a:r>
               <a:rPr lang="en-US" dirty="0" smtClean="0">
-                <a:latin typeface="Times New Roman" pitchFamily="18" charset="0"/>
+                <a:latin typeface="Times New Roman" panose="02020603050405020304" pitchFamily="18" charset="0"/>
               </a:rPr>
               <a:t>Mutation Testing:</a:t>
             </a:r>
             <a:endParaRPr lang="en-US" dirty="0" smtClean="0">
-              <a:latin typeface="Times New Roman" pitchFamily="18" charset="0"/>
+              <a:latin typeface="Times New Roman" panose="02020603050405020304" pitchFamily="18" charset="0"/>
             </a:endParaRPr>
           </a:p>
         </p:txBody>
@@ -13652,8 +13367,6 @@
           <a:p>
             <a:fld id="{A262AD1B-065B-4D63-806D-2452918139DF}" type="slidenum">
               <a:rPr lang="en-US"/>
-              <a:pPr/>
-              <a:t>19</a:t>
             </a:fld>
             <a:endParaRPr lang="en-US"/>
           </a:p>
@@ -13703,6 +13416,7 @@
               <a:rPr lang="en-US" sz="2400" dirty="0" smtClean="0"/>
               <a:t>.</a:t>
             </a:r>
+            <a:endParaRPr lang="en-US" sz="2400" dirty="0" smtClean="0"/>
           </a:p>
           <a:p>
             <a:pPr lvl="0"/>
@@ -13722,6 +13436,7 @@
               <a:rPr lang="en-US" sz="2400" dirty="0" smtClean="0"/>
               <a:t>).</a:t>
             </a:r>
+            <a:endParaRPr lang="en-US" sz="2400" dirty="0" smtClean="0"/>
           </a:p>
           <a:p>
             <a:pPr lvl="0"/>
@@ -13761,6 +13476,7 @@
               <a:rPr lang="en-US" sz="2400" dirty="0"/>
               <a:t>.</a:t>
             </a:r>
+            <a:endParaRPr lang="en-US" sz="2400" dirty="0"/>
           </a:p>
           <a:p>
             <a:pPr lvl="0"/>
@@ -13776,6 +13492,7 @@
               <a:rPr lang="en-US" sz="2400" dirty="0" smtClean="0"/>
               <a:t>.</a:t>
             </a:r>
+            <a:endParaRPr lang="en-US" sz="2400" dirty="0" smtClean="0"/>
           </a:p>
           <a:p>
             <a:endParaRPr lang="en-US" sz="2400" dirty="0"/>
@@ -13792,11 +13509,6 @@
         </p:txBody>
       </p:sp>
     </p:spTree>
-    <p:extLst>
-      <p:ext uri="{BB962C8B-B14F-4D97-AF65-F5344CB8AC3E}">
-        <p14:creationId xmlns:p14="http://schemas.microsoft.com/office/powerpoint/2010/main" val="2673044733"/>
-      </p:ext>
-    </p:extLst>
   </p:cSld>
   <p:clrMapOvr>
     <a:masterClrMapping/>
@@ -13853,10 +13565,13 @@
           <a:p>
             <a:r>
               <a:rPr lang="en-US" dirty="0" smtClean="0">
-                <a:latin typeface="Times New Roman" pitchFamily="18" charset="0"/>
+                <a:latin typeface="Times New Roman" panose="02020603050405020304" pitchFamily="18" charset="0"/>
               </a:rPr>
               <a:t>Concept of Unit Testing</a:t>
             </a:r>
+            <a:endParaRPr lang="en-US" dirty="0" smtClean="0">
+              <a:latin typeface="Times New Roman" panose="02020603050405020304" pitchFamily="18" charset="0"/>
+            </a:endParaRPr>
           </a:p>
         </p:txBody>
       </p:sp>
@@ -13887,10 +13602,13 @@
           <a:p>
             <a:r>
               <a:rPr lang="en-US" sz="2400" dirty="0" smtClean="0">
-                <a:latin typeface="Times New Roman" pitchFamily="18" charset="0"/>
+                <a:latin typeface="Times New Roman" panose="02020603050405020304" pitchFamily="18" charset="0"/>
               </a:rPr>
               <a:t>Unit-Module</a:t>
             </a:r>
+            <a:endParaRPr lang="en-US" sz="2400" dirty="0" smtClean="0">
+              <a:latin typeface="Times New Roman" panose="02020603050405020304" pitchFamily="18" charset="0"/>
+            </a:endParaRPr>
           </a:p>
           <a:p>
             <a:r>
@@ -13901,6 +13619,7 @@
               <a:rPr lang="en-US" sz="2400" dirty="0" smtClean="0"/>
               <a:t>testing</a:t>
             </a:r>
+            <a:endParaRPr lang="en-US" sz="2400" dirty="0" smtClean="0"/>
           </a:p>
           <a:p>
             <a:r>
@@ -13952,18 +13671,18 @@
               <a:t>Observe that the unit performs its intended function and ensure that it contains no known errors.</a:t>
             </a:r>
             <a:endParaRPr lang="en-US" sz="2000" dirty="0" smtClean="0">
-              <a:latin typeface="Times New Roman" pitchFamily="18" charset="0"/>
+              <a:latin typeface="Times New Roman" panose="02020603050405020304" pitchFamily="18" charset="0"/>
             </a:endParaRPr>
           </a:p>
           <a:p>
             <a:endParaRPr lang="en-US" sz="2400" dirty="0" smtClean="0">
-              <a:latin typeface="Times New Roman" pitchFamily="18" charset="0"/>
+              <a:latin typeface="Times New Roman" panose="02020603050405020304" pitchFamily="18" charset="0"/>
             </a:endParaRPr>
           </a:p>
           <a:p>
             <a:pPr lvl="1"/>
             <a:endParaRPr lang="en-US" sz="2000" dirty="0" smtClean="0">
-              <a:latin typeface="Times New Roman" pitchFamily="18" charset="0"/>
+              <a:latin typeface="Times New Roman" panose="02020603050405020304" pitchFamily="18" charset="0"/>
             </a:endParaRPr>
           </a:p>
         </p:txBody>
@@ -13985,19 +13704,12 @@
           <a:p>
             <a:fld id="{785F2599-6E08-4249-A2A4-C728DB96A143}" type="slidenum">
               <a:rPr lang="en-US"/>
-              <a:pPr/>
-              <a:t>2</a:t>
             </a:fld>
             <a:endParaRPr lang="en-US"/>
           </a:p>
         </p:txBody>
       </p:sp>
     </p:spTree>
-    <p:extLst>
-      <p:ext uri="{BB962C8B-B14F-4D97-AF65-F5344CB8AC3E}">
-        <p14:creationId xmlns:p14="http://schemas.microsoft.com/office/powerpoint/2010/main" val="4229029676"/>
-      </p:ext>
-    </p:extLst>
   </p:cSld>
   <p:clrMapOvr>
     <a:masterClrMapping/>
@@ -14057,7 +13769,7 @@
               <a:t>UNITTESTING IN EXTREME PROGRAMMING</a:t>
             </a:r>
             <a:endParaRPr lang="en-US" b="1" dirty="0" smtClean="0">
-              <a:latin typeface="Times New Roman" pitchFamily="18" charset="0"/>
+              <a:latin typeface="Times New Roman" panose="02020603050405020304" pitchFamily="18" charset="0"/>
             </a:endParaRPr>
           </a:p>
         </p:txBody>
@@ -14079,8 +13791,6 @@
           <a:p>
             <a:fld id="{A262AD1B-065B-4D63-806D-2452918139DF}" type="slidenum">
               <a:rPr lang="en-US"/>
-              <a:pPr/>
-              <a:t>20</a:t>
             </a:fld>
             <a:endParaRPr lang="en-US"/>
           </a:p>
@@ -14138,6 +13848,7 @@
               <a:rPr lang="en-US" sz="2400" dirty="0" smtClean="0"/>
               <a:t>methodology.</a:t>
             </a:r>
+            <a:endParaRPr lang="en-US" sz="2400" dirty="0" smtClean="0"/>
           </a:p>
           <a:p>
             <a:pPr lvl="0"/>
@@ -14257,6 +13968,7 @@
               <a:rPr lang="en-US" sz="2400" dirty="0" smtClean="0"/>
               <a:t>.</a:t>
             </a:r>
+            <a:endParaRPr lang="en-US" sz="2400" dirty="0" smtClean="0"/>
           </a:p>
           <a:p>
             <a:endParaRPr lang="en-US" sz="2400" dirty="0"/>
@@ -14273,11 +13985,6 @@
         </p:txBody>
       </p:sp>
     </p:spTree>
-    <p:extLst>
-      <p:ext uri="{BB962C8B-B14F-4D97-AF65-F5344CB8AC3E}">
-        <p14:creationId xmlns:p14="http://schemas.microsoft.com/office/powerpoint/2010/main" val="4053024526"/>
-      </p:ext>
-    </p:extLst>
   </p:cSld>
   <p:clrMapOvr>
     <a:masterClrMapping/>
@@ -14337,7 +14044,7 @@
               <a:t>UNITTESTINGINEXTREMEPROGRAMMING</a:t>
             </a:r>
             <a:endParaRPr lang="en-US" dirty="0" smtClean="0">
-              <a:latin typeface="Times New Roman" pitchFamily="18" charset="0"/>
+              <a:latin typeface="Times New Roman" panose="02020603050405020304" pitchFamily="18" charset="0"/>
             </a:endParaRPr>
           </a:p>
         </p:txBody>
@@ -14359,8 +14066,6 @@
           <a:p>
             <a:fld id="{A262AD1B-065B-4D63-806D-2452918139DF}" type="slidenum">
               <a:rPr lang="en-US"/>
-              <a:pPr/>
-              <a:t>21</a:t>
             </a:fld>
             <a:endParaRPr lang="en-US"/>
           </a:p>
@@ -14406,6 +14111,7 @@
               <a:rPr lang="en-US" sz="2400" dirty="0" smtClean="0"/>
               <a:t>.</a:t>
             </a:r>
+            <a:endParaRPr lang="en-US" sz="2400" dirty="0" smtClean="0"/>
           </a:p>
           <a:p>
             <a:endParaRPr lang="en-US" sz="2400" dirty="0"/>
@@ -14430,7 +14136,7 @@
           <p:nvPr/>
         </p:nvPicPr>
         <p:blipFill>
-          <a:blip r:embed="rId3"/>
+          <a:blip r:embed="rId1"/>
           <a:stretch>
             <a:fillRect/>
           </a:stretch>
@@ -14446,11 +14152,6 @@
         </p:spPr>
       </p:pic>
     </p:spTree>
-    <p:extLst>
-      <p:ext uri="{BB962C8B-B14F-4D97-AF65-F5344CB8AC3E}">
-        <p14:creationId xmlns:p14="http://schemas.microsoft.com/office/powerpoint/2010/main" val="2885287297"/>
-      </p:ext>
-    </p:extLst>
   </p:cSld>
   <p:clrMapOvr>
     <a:masterClrMapping/>
@@ -14510,7 +14211,7 @@
               <a:t>UNITTESTINGINEXTREMEPROGRAMMING</a:t>
             </a:r>
             <a:endParaRPr lang="en-US" dirty="0" smtClean="0">
-              <a:latin typeface="Times New Roman" pitchFamily="18" charset="0"/>
+              <a:latin typeface="Times New Roman" panose="02020603050405020304" pitchFamily="18" charset="0"/>
             </a:endParaRPr>
           </a:p>
         </p:txBody>
@@ -14532,8 +14233,6 @@
           <a:p>
             <a:fld id="{A262AD1B-065B-4D63-806D-2452918139DF}" type="slidenum">
               <a:rPr lang="en-US"/>
-              <a:pPr/>
-              <a:t>22</a:t>
             </a:fld>
             <a:endParaRPr lang="en-US"/>
           </a:p>
@@ -14579,6 +14278,7 @@
               <a:rPr lang="en-US" sz="2400" dirty="0" smtClean="0"/>
               <a:t>proposed</a:t>
             </a:r>
+            <a:endParaRPr lang="en-US" sz="2400" dirty="0" smtClean="0"/>
           </a:p>
           <a:p>
             <a:pPr lvl="0"/>
@@ -14602,6 +14302,7 @@
               <a:rPr lang="en-US" sz="2400" dirty="0" smtClean="0"/>
               <a:t>.</a:t>
             </a:r>
+            <a:endParaRPr lang="en-US" sz="2400" dirty="0" smtClean="0"/>
           </a:p>
           <a:p>
             <a:pPr lvl="0"/>
@@ -14658,11 +14359,6 @@
         </p:txBody>
       </p:sp>
     </p:spTree>
-    <p:extLst>
-      <p:ext uri="{BB962C8B-B14F-4D97-AF65-F5344CB8AC3E}">
-        <p14:creationId xmlns:p14="http://schemas.microsoft.com/office/powerpoint/2010/main" val="632730838"/>
-      </p:ext>
-    </p:extLst>
   </p:cSld>
   <p:clrMapOvr>
     <a:masterClrMapping/>
@@ -14722,7 +14418,7 @@
               <a:t>UNITTESTINGINEXTREMEPROGRAMMING</a:t>
             </a:r>
             <a:endParaRPr lang="en-US" dirty="0" smtClean="0">
-              <a:latin typeface="Times New Roman" pitchFamily="18" charset="0"/>
+              <a:latin typeface="Times New Roman" panose="02020603050405020304" pitchFamily="18" charset="0"/>
             </a:endParaRPr>
           </a:p>
         </p:txBody>
@@ -14744,8 +14440,6 @@
           <a:p>
             <a:fld id="{A262AD1B-065B-4D63-806D-2452918139DF}" type="slidenum">
               <a:rPr lang="en-US"/>
-              <a:pPr/>
-              <a:t>23</a:t>
             </a:fld>
             <a:endParaRPr lang="en-US"/>
           </a:p>
@@ -14791,6 +14485,7 @@
               <a:rPr lang="en-US" sz="2400" dirty="0" smtClean="0"/>
               <a:t>.</a:t>
             </a:r>
+            <a:endParaRPr lang="en-US" sz="2400" dirty="0" smtClean="0"/>
           </a:p>
           <a:p>
             <a:pPr lvl="0"/>
@@ -14809,6 +14504,7 @@
               <a:rPr lang="en-US" sz="2400" dirty="0"/>
               <a:t>, code is constantly changing. We refactor (clean up) code daily and integrate our work into the main build every few hours. Without a "safety net," this would be a recipe for disaster.</a:t>
             </a:r>
+            <a:endParaRPr lang="en-US" sz="2400" dirty="0"/>
           </a:p>
           <a:p>
             <a:r>
@@ -14827,6 +14523,7 @@
               <a:rPr lang="en-US" sz="2400" dirty="0" smtClean="0"/>
               <a:t>.</a:t>
             </a:r>
+            <a:endParaRPr lang="en-US" sz="2400" dirty="0" smtClean="0"/>
           </a:p>
           <a:p>
             <a:endParaRPr lang="en-US" sz="2400" dirty="0"/>
@@ -14848,6 +14545,7 @@
               <a:rPr lang="en-US" sz="2400" dirty="0"/>
               <a:t> to improve the code without the fear of accidentally "breaking the world."</a:t>
             </a:r>
+            <a:endParaRPr lang="en-US" sz="2400" dirty="0"/>
           </a:p>
           <a:p>
             <a:pPr lvl="0"/>
@@ -14872,11 +14570,6 @@
         </p:txBody>
       </p:sp>
     </p:spTree>
-    <p:extLst>
-      <p:ext uri="{BB962C8B-B14F-4D97-AF65-F5344CB8AC3E}">
-        <p14:creationId xmlns:p14="http://schemas.microsoft.com/office/powerpoint/2010/main" val="1162833660"/>
-      </p:ext>
-    </p:extLst>
   </p:cSld>
   <p:clrMapOvr>
     <a:masterClrMapping/>
@@ -14936,7 +14629,7 @@
               <a:t>UNITTESTING IN EXTREME PROGRAMMING</a:t>
             </a:r>
             <a:endParaRPr lang="en-US" dirty="0" smtClean="0">
-              <a:latin typeface="Times New Roman" pitchFamily="18" charset="0"/>
+              <a:latin typeface="Times New Roman" panose="02020603050405020304" pitchFamily="18" charset="0"/>
             </a:endParaRPr>
           </a:p>
         </p:txBody>
@@ -14958,8 +14651,6 @@
           <a:p>
             <a:fld id="{A262AD1B-065B-4D63-806D-2452918139DF}" type="slidenum">
               <a:rPr lang="en-US"/>
-              <a:pPr/>
-              <a:t>24</a:t>
             </a:fld>
             <a:endParaRPr lang="en-US"/>
           </a:p>
@@ -15023,13 +14714,7 @@
           <p:cNvGraphicFramePr>
             <a:graphicFrameLocks noGrp="1"/>
           </p:cNvGraphicFramePr>
-          <p:nvPr>
-            <p:extLst>
-              <p:ext uri="{D42A27DB-BD31-4B8C-83A1-F6EECF244321}">
-                <p14:modId xmlns:p14="http://schemas.microsoft.com/office/powerpoint/2010/main" val="167946653"/>
-              </p:ext>
-            </p:extLst>
-          </p:nvPr>
+          <p:nvPr/>
         </p:nvGraphicFramePr>
         <p:xfrm>
           <a:off x="1401680" y="1411426"/>
@@ -15274,6 +14959,13 @@
                         </a:rPr>
                         <a:t>.</a:t>
                       </a:r>
+                      <a:endParaRPr lang="en-US">
+                        <a:solidFill>
+                          <a:srgbClr val="1F1F1F"/>
+                        </a:solidFill>
+                        <a:effectLst/>
+                        <a:latin typeface="Google Sans Text"/>
+                      </a:endParaRPr>
                     </a:p>
                   </a:txBody>
                   <a:tcPr marL="114300" marR="114300" marT="76200" marB="76200" anchor="ctr">
@@ -15397,6 +15089,13 @@
                         </a:rPr>
                         <a:t>Proves that today's "cleanup" didn't break yesterday's "feature."</a:t>
                       </a:r>
+                      <a:endParaRPr lang="en-US">
+                        <a:solidFill>
+                          <a:srgbClr val="1F1F1F"/>
+                        </a:solidFill>
+                        <a:effectLst/>
+                        <a:latin typeface="Google Sans Text"/>
+                      </a:endParaRPr>
                     </a:p>
                   </a:txBody>
                   <a:tcPr marL="114300" marR="114300" marT="76200" marB="76200" anchor="ctr">
@@ -15520,6 +15219,13 @@
                         </a:rPr>
                         <a:t>Possible only when you have tests to catch your "accidental" mistakes.</a:t>
                       </a:r>
+                      <a:endParaRPr lang="en-US">
+                        <a:solidFill>
+                          <a:srgbClr val="1F1F1F"/>
+                        </a:solidFill>
+                        <a:effectLst/>
+                        <a:latin typeface="Google Sans Text"/>
+                      </a:endParaRPr>
                     </a:p>
                   </a:txBody>
                   <a:tcPr marL="114300" marR="114300" marT="76200" marB="76200" anchor="ctr">
@@ -15643,6 +15349,13 @@
                         </a:rPr>
                         <a:t>Possible only when you can prove your code doesn't break your neighbor's code.</a:t>
                       </a:r>
+                      <a:endParaRPr lang="en-US" dirty="0">
+                        <a:solidFill>
+                          <a:srgbClr val="1F1F1F"/>
+                        </a:solidFill>
+                        <a:effectLst/>
+                        <a:latin typeface="Google Sans Text"/>
+                      </a:endParaRPr>
                     </a:p>
                   </a:txBody>
                   <a:tcPr marL="114300" marR="114300" marT="76200" marB="76200" anchor="ctr">
@@ -15690,11 +15403,6 @@
         </a:graphic>
       </p:graphicFrame>
     </p:spTree>
-    <p:extLst>
-      <p:ext uri="{BB962C8B-B14F-4D97-AF65-F5344CB8AC3E}">
-        <p14:creationId xmlns:p14="http://schemas.microsoft.com/office/powerpoint/2010/main" val="3014059527"/>
-      </p:ext>
-    </p:extLst>
   </p:cSld>
   <p:clrMapOvr>
     <a:masterClrMapping/>
@@ -15754,7 +15462,7 @@
               <a:t>EXTREME Programming</a:t>
             </a:r>
             <a:endParaRPr lang="en-US" dirty="0" smtClean="0">
-              <a:latin typeface="Times New Roman" pitchFamily="18" charset="0"/>
+              <a:latin typeface="Times New Roman" panose="02020603050405020304" pitchFamily="18" charset="0"/>
             </a:endParaRPr>
           </a:p>
         </p:txBody>
@@ -15776,8 +15484,6 @@
           <a:p>
             <a:fld id="{A262AD1B-065B-4D63-806D-2452918139DF}" type="slidenum">
               <a:rPr lang="en-US"/>
-              <a:pPr/>
-              <a:t>25</a:t>
             </a:fld>
             <a:endParaRPr lang="en-US"/>
           </a:p>
@@ -15867,6 +15573,7 @@
               <a:rPr lang="en-US" sz="2400" dirty="0" smtClean="0"/>
               <a:t>.</a:t>
             </a:r>
+            <a:endParaRPr lang="en-US" sz="2400" dirty="0" smtClean="0"/>
           </a:p>
           <a:p>
             <a:pPr lvl="0"/>
@@ -15879,11 +15586,6 @@
         </p:txBody>
       </p:sp>
     </p:spTree>
-    <p:extLst>
-      <p:ext uri="{BB962C8B-B14F-4D97-AF65-F5344CB8AC3E}">
-        <p14:creationId xmlns:p14="http://schemas.microsoft.com/office/powerpoint/2010/main" val="2746336023"/>
-      </p:ext>
-    </p:extLst>
   </p:cSld>
   <p:clrMapOvr>
     <a:masterClrMapping/>
@@ -15943,7 +15645,7 @@
               <a:t>EXTREME Programming</a:t>
             </a:r>
             <a:endParaRPr lang="en-US" dirty="0" smtClean="0">
-              <a:latin typeface="Times New Roman" pitchFamily="18" charset="0"/>
+              <a:latin typeface="Times New Roman" panose="02020603050405020304" pitchFamily="18" charset="0"/>
             </a:endParaRPr>
           </a:p>
         </p:txBody>
@@ -15965,8 +15667,6 @@
           <a:p>
             <a:fld id="{A262AD1B-065B-4D63-806D-2452918139DF}" type="slidenum">
               <a:rPr lang="en-US"/>
-              <a:pPr/>
-              <a:t>26</a:t>
             </a:fld>
             <a:endParaRPr lang="en-US"/>
           </a:p>
@@ -16020,6 +15720,7 @@
               <a:rPr lang="en-US" sz="2400" dirty="0" smtClean="0"/>
               <a:t>:</a:t>
             </a:r>
+            <a:endParaRPr lang="en-US" sz="2400" dirty="0" smtClean="0"/>
           </a:p>
           <a:p>
             <a:pPr lvl="0"/>
@@ -16031,6 +15732,7 @@
               <a:rPr lang="en-US" sz="2400" b="1" dirty="0"/>
               <a:t>Individuals and Interactions over Processes and Tools</a:t>
             </a:r>
+            <a:endParaRPr lang="en-US" sz="2400" b="1" dirty="0"/>
           </a:p>
           <a:p>
             <a:pPr lvl="0"/>
@@ -16050,6 +15752,7 @@
               <a:rPr lang="en-US" sz="2400" dirty="0"/>
               <a:t>.</a:t>
             </a:r>
+            <a:endParaRPr lang="en-US" sz="2400" dirty="0"/>
           </a:p>
           <a:p>
             <a:pPr lvl="0"/>
@@ -16069,6 +15772,7 @@
               <a:rPr lang="en-US" sz="2400" b="1" dirty="0"/>
               <a:t>2. Working Software over Comprehensive Documentation</a:t>
             </a:r>
+            <a:endParaRPr lang="en-US" sz="2400" b="1" dirty="0"/>
           </a:p>
           <a:p>
             <a:pPr lvl="0"/>
@@ -16080,6 +15784,7 @@
               <a:rPr lang="en-US" sz="2400" dirty="0"/>
               <a:t>Practice: Test-Driven Development (TDD) and Small Releases.</a:t>
             </a:r>
+            <a:endParaRPr lang="en-US" sz="2400" dirty="0"/>
           </a:p>
           <a:p>
             <a:pPr lvl="0"/>
@@ -16091,6 +15796,7 @@
               <a:rPr lang="en-US" sz="2400" dirty="0"/>
               <a:t>Logic: In XP, the "documentation" is often the test suite itself. Because the team releases small updates every week or two, the focus is always on having a functional, "working" system rather than a 200-page manual describing a system that hasn't been built yet.</a:t>
             </a:r>
+            <a:endParaRPr lang="en-US" sz="2400" dirty="0"/>
           </a:p>
           <a:p>
             <a:pPr lvl="0"/>
@@ -16103,11 +15809,6 @@
         </p:txBody>
       </p:sp>
     </p:spTree>
-    <p:extLst>
-      <p:ext uri="{BB962C8B-B14F-4D97-AF65-F5344CB8AC3E}">
-        <p14:creationId xmlns:p14="http://schemas.microsoft.com/office/powerpoint/2010/main" val="2942062577"/>
-      </p:ext>
-    </p:extLst>
   </p:cSld>
   <p:clrMapOvr>
     <a:masterClrMapping/>
@@ -16167,7 +15868,7 @@
               <a:t>EXTREME Programming</a:t>
             </a:r>
             <a:endParaRPr lang="en-US" dirty="0" smtClean="0">
-              <a:latin typeface="Times New Roman" pitchFamily="18" charset="0"/>
+              <a:latin typeface="Times New Roman" panose="02020603050405020304" pitchFamily="18" charset="0"/>
             </a:endParaRPr>
           </a:p>
         </p:txBody>
@@ -16189,8 +15890,6 @@
           <a:p>
             <a:fld id="{A262AD1B-065B-4D63-806D-2452918139DF}" type="slidenum">
               <a:rPr lang="en-US"/>
-              <a:pPr/>
-              <a:t>27</a:t>
             </a:fld>
             <a:endParaRPr lang="en-US"/>
           </a:p>
@@ -16244,6 +15943,7 @@
               <a:rPr lang="en-US" sz="2400" dirty="0" smtClean="0"/>
               <a:t>:</a:t>
             </a:r>
+            <a:endParaRPr lang="en-US" sz="2400" dirty="0" smtClean="0"/>
           </a:p>
           <a:p>
             <a:pPr lvl="0"/>
@@ -16251,6 +15951,7 @@
               <a:rPr lang="en-US" sz="2400" b="1" dirty="0"/>
               <a:t>3. Customer Collaboration over Contract Negotiation</a:t>
             </a:r>
+            <a:endParaRPr lang="en-US" sz="2400" b="1" dirty="0"/>
           </a:p>
           <a:p>
             <a:pPr lvl="0"/>
@@ -16262,6 +15963,7 @@
               <a:rPr lang="en-US" sz="2400" dirty="0"/>
               <a:t>Practice: On-site Customer.</a:t>
             </a:r>
+            <a:endParaRPr lang="en-US" sz="2400" dirty="0"/>
           </a:p>
           <a:p>
             <a:pPr lvl="0"/>
@@ -16273,6 +15975,7 @@
               <a:rPr lang="en-US" sz="2400" dirty="0"/>
               <a:t>Logic: XP requires a customer representative to be physically present (or digitally available at all times) with the team. They don't just sign a contract and leave; they collaborate daily, defining user stories and validating features as they are finished.</a:t>
             </a:r>
+            <a:endParaRPr lang="en-US" sz="2400" dirty="0"/>
           </a:p>
           <a:p>
             <a:pPr lvl="0"/>
@@ -16280,6 +15983,7 @@
               <a:rPr lang="en-US" sz="2400" b="1" dirty="0"/>
               <a:t>4. Responding to Change over Following a Plan</a:t>
             </a:r>
+            <a:endParaRPr lang="en-US" sz="2400" b="1" dirty="0"/>
           </a:p>
           <a:p>
             <a:pPr lvl="0"/>
@@ -16291,6 +15995,7 @@
               <a:rPr lang="en-US" sz="2400" dirty="0"/>
               <a:t>Practice: Refactoring and Simplicity.</a:t>
             </a:r>
+            <a:endParaRPr lang="en-US" sz="2400" dirty="0"/>
           </a:p>
           <a:p>
             <a:pPr lvl="0"/>
@@ -16302,6 +16007,7 @@
               <a:rPr lang="en-US" sz="2400" dirty="0"/>
               <a:t>Logic: XP assumes the plan will change. By keeping the code simple and constantly "refactoring" (cleaning it up), the software remains flexible. The team doesn't fear change; they embrace it because their technical practices (like TDD) make it safe to change the code at any time.</a:t>
             </a:r>
+            <a:endParaRPr lang="en-US" sz="2400" dirty="0"/>
           </a:p>
           <a:p>
             <a:pPr lvl="0"/>
@@ -16314,11 +16020,6 @@
         </p:txBody>
       </p:sp>
     </p:spTree>
-    <p:extLst>
-      <p:ext uri="{BB962C8B-B14F-4D97-AF65-F5344CB8AC3E}">
-        <p14:creationId xmlns:p14="http://schemas.microsoft.com/office/powerpoint/2010/main" val="1420929686"/>
-      </p:ext>
-    </p:extLst>
   </p:cSld>
   <p:clrMapOvr>
     <a:masterClrMapping/>
@@ -16378,7 +16079,7 @@
               <a:t>EXTREME Programming</a:t>
             </a:r>
             <a:endParaRPr lang="en-US" dirty="0" smtClean="0">
-              <a:latin typeface="Times New Roman" pitchFamily="18" charset="0"/>
+              <a:latin typeface="Times New Roman" panose="02020603050405020304" pitchFamily="18" charset="0"/>
             </a:endParaRPr>
           </a:p>
         </p:txBody>
@@ -16400,8 +16101,6 @@
           <a:p>
             <a:fld id="{A262AD1B-065B-4D63-806D-2452918139DF}" type="slidenum">
               <a:rPr lang="en-US"/>
-              <a:pPr/>
-              <a:t>28</a:t>
             </a:fld>
             <a:endParaRPr lang="en-US"/>
           </a:p>
@@ -16447,6 +16146,7 @@
               <a:rPr lang="en-US" sz="2400" b="1" dirty="0" smtClean="0"/>
               <a:t>Scrum?"  The distinction:</a:t>
             </a:r>
+            <a:endParaRPr lang="en-US" sz="2400" b="1" dirty="0" smtClean="0"/>
           </a:p>
           <a:p>
             <a:pPr lvl="0"/>
@@ -16462,6 +16162,7 @@
               <a:rPr lang="en-US" sz="2400" dirty="0"/>
               <a:t>is about Product Management: It defines roles (Scrum Master, Product Owner), ceremonies (Sprints, Daily Standups), and artifacts (Backlog).</a:t>
             </a:r>
+            <a:endParaRPr lang="en-US" sz="2400" dirty="0"/>
           </a:p>
           <a:p>
             <a:pPr lvl="0"/>
@@ -16485,6 +16186,7 @@
               <a:rPr lang="en-US" sz="2400" smtClean="0"/>
               <a:t>).</a:t>
             </a:r>
+            <a:endParaRPr lang="en-US" sz="2400" smtClean="0"/>
           </a:p>
           <a:p>
             <a:pPr lvl="0"/>
@@ -16496,15 +16198,11 @@
               <a:rPr lang="en-US" sz="2400" dirty="0"/>
               <a:t>Most successful Agile teams actually do "Scrum-XP"—they use Scrum to manage the project and XP practices to ensure the code doesn't turn into a "big ball of mud."</a:t>
             </a:r>
+            <a:endParaRPr lang="en-US" sz="2400" dirty="0"/>
           </a:p>
         </p:txBody>
       </p:sp>
     </p:spTree>
-    <p:extLst>
-      <p:ext uri="{BB962C8B-B14F-4D97-AF65-F5344CB8AC3E}">
-        <p14:creationId xmlns:p14="http://schemas.microsoft.com/office/powerpoint/2010/main" val="2417620121"/>
-      </p:ext>
-    </p:extLst>
   </p:cSld>
   <p:clrMapOvr>
     <a:masterClrMapping/>
@@ -16561,10 +16259,13 @@
           <a:p>
             <a:r>
               <a:rPr lang="en-US" dirty="0" smtClean="0">
-                <a:latin typeface="Times New Roman" pitchFamily="18" charset="0"/>
+                <a:latin typeface="Times New Roman" panose="02020603050405020304" pitchFamily="18" charset="0"/>
               </a:rPr>
               <a:t>Concept of Unit Testing</a:t>
             </a:r>
+            <a:endParaRPr lang="en-US" dirty="0" smtClean="0">
+              <a:latin typeface="Times New Roman" panose="02020603050405020304" pitchFamily="18" charset="0"/>
+            </a:endParaRPr>
           </a:p>
         </p:txBody>
       </p:sp>
@@ -16608,16 +16309,17 @@
               <a:rPr lang="en-US" sz="3200" dirty="0" smtClean="0"/>
               <a:t>.</a:t>
             </a:r>
+            <a:endParaRPr lang="en-US" sz="3200" dirty="0" smtClean="0"/>
           </a:p>
           <a:p>
             <a:endParaRPr lang="en-US" sz="3200" dirty="0" smtClean="0">
-              <a:latin typeface="Times New Roman" pitchFamily="18" charset="0"/>
+              <a:latin typeface="Times New Roman" panose="02020603050405020304" pitchFamily="18" charset="0"/>
             </a:endParaRPr>
           </a:p>
           <a:p>
             <a:pPr lvl="1"/>
             <a:endParaRPr lang="en-US" sz="2800" dirty="0" smtClean="0">
-              <a:latin typeface="Times New Roman" pitchFamily="18" charset="0"/>
+              <a:latin typeface="Times New Roman" panose="02020603050405020304" pitchFamily="18" charset="0"/>
             </a:endParaRPr>
           </a:p>
         </p:txBody>
@@ -16639,19 +16341,12 @@
           <a:p>
             <a:fld id="{785F2599-6E08-4249-A2A4-C728DB96A143}" type="slidenum">
               <a:rPr lang="en-US"/>
-              <a:pPr/>
-              <a:t>3</a:t>
             </a:fld>
             <a:endParaRPr lang="en-US"/>
           </a:p>
         </p:txBody>
       </p:sp>
     </p:spTree>
-    <p:extLst>
-      <p:ext uri="{BB962C8B-B14F-4D97-AF65-F5344CB8AC3E}">
-        <p14:creationId xmlns:p14="http://schemas.microsoft.com/office/powerpoint/2010/main" val="3580037896"/>
-      </p:ext>
-    </p:extLst>
   </p:cSld>
   <p:clrMapOvr>
     <a:masterClrMapping/>
@@ -16708,10 +16403,13 @@
           <a:p>
             <a:r>
               <a:rPr lang="en-US" dirty="0" smtClean="0">
-                <a:latin typeface="Times New Roman" pitchFamily="18" charset="0"/>
+                <a:latin typeface="Times New Roman" panose="02020603050405020304" pitchFamily="18" charset="0"/>
               </a:rPr>
               <a:t>Concept of Unit Testing</a:t>
             </a:r>
+            <a:endParaRPr lang="en-US" dirty="0" smtClean="0">
+              <a:latin typeface="Times New Roman" panose="02020603050405020304" pitchFamily="18" charset="0"/>
+            </a:endParaRPr>
           </a:p>
         </p:txBody>
       </p:sp>
@@ -16742,96 +16440,126 @@
           <a:p>
             <a:r>
               <a:rPr lang="en-US" dirty="0" smtClean="0">
-                <a:latin typeface="Times New Roman" pitchFamily="18" charset="0"/>
+                <a:latin typeface="Times New Roman" panose="02020603050405020304" pitchFamily="18" charset="0"/>
               </a:rPr>
               <a:t>Static Unit Testing</a:t>
             </a:r>
+            <a:endParaRPr lang="en-US" dirty="0" smtClean="0">
+              <a:latin typeface="Times New Roman" panose="02020603050405020304" pitchFamily="18" charset="0"/>
+            </a:endParaRPr>
           </a:p>
           <a:p>
             <a:pPr lvl="1"/>
             <a:r>
               <a:rPr lang="en-US" dirty="0" smtClean="0">
-                <a:latin typeface="Times New Roman" pitchFamily="18" charset="0"/>
+                <a:latin typeface="Times New Roman" panose="02020603050405020304" pitchFamily="18" charset="0"/>
               </a:rPr>
               <a:t>Code is examined over all possible behaviors that might arise during run time</a:t>
             </a:r>
+            <a:endParaRPr lang="en-US" dirty="0" smtClean="0">
+              <a:latin typeface="Times New Roman" panose="02020603050405020304" pitchFamily="18" charset="0"/>
+            </a:endParaRPr>
           </a:p>
           <a:p>
             <a:pPr lvl="1"/>
             <a:r>
               <a:rPr lang="en-US" dirty="0" smtClean="0">
-                <a:latin typeface="Times New Roman" pitchFamily="18" charset="0"/>
+                <a:latin typeface="Times New Roman" panose="02020603050405020304" pitchFamily="18" charset="0"/>
               </a:rPr>
               <a:t>Code of each unit is validated against requirements of the unit by reviewing the code</a:t>
             </a:r>
+            <a:endParaRPr lang="en-US" dirty="0" smtClean="0">
+              <a:latin typeface="Times New Roman" panose="02020603050405020304" pitchFamily="18" charset="0"/>
+            </a:endParaRPr>
           </a:p>
           <a:p>
             <a:r>
               <a:rPr lang="en-US" dirty="0" smtClean="0">
-                <a:latin typeface="Times New Roman" pitchFamily="18" charset="0"/>
+                <a:latin typeface="Times New Roman" panose="02020603050405020304" pitchFamily="18" charset="0"/>
               </a:rPr>
               <a:t>Dynamic Unit Testing</a:t>
             </a:r>
+            <a:endParaRPr lang="en-US" dirty="0" smtClean="0">
+              <a:latin typeface="Times New Roman" panose="02020603050405020304" pitchFamily="18" charset="0"/>
+            </a:endParaRPr>
           </a:p>
           <a:p>
             <a:pPr lvl="1"/>
             <a:r>
               <a:rPr lang="en-US" dirty="0" smtClean="0">
-                <a:latin typeface="Times New Roman" pitchFamily="18" charset="0"/>
+                <a:latin typeface="Times New Roman" panose="02020603050405020304" pitchFamily="18" charset="0"/>
               </a:rPr>
               <a:t>A program unit is actually executed and its outcomes are observed</a:t>
             </a:r>
+            <a:endParaRPr lang="en-US" dirty="0" smtClean="0">
+              <a:latin typeface="Times New Roman" panose="02020603050405020304" pitchFamily="18" charset="0"/>
+            </a:endParaRPr>
           </a:p>
           <a:p>
             <a:pPr lvl="1"/>
             <a:r>
               <a:rPr lang="en-US" dirty="0" smtClean="0">
-                <a:latin typeface="Times New Roman" pitchFamily="18" charset="0"/>
+                <a:latin typeface="Times New Roman" panose="02020603050405020304" pitchFamily="18" charset="0"/>
               </a:rPr>
               <a:t>One observe some representative program behavior, and reach conclusion about the quality of the system</a:t>
             </a:r>
+            <a:endParaRPr lang="en-US" dirty="0" smtClean="0">
+              <a:latin typeface="Times New Roman" panose="02020603050405020304" pitchFamily="18" charset="0"/>
+            </a:endParaRPr>
           </a:p>
           <a:p>
             <a:r>
               <a:rPr lang="en-US" dirty="0" smtClean="0">
-                <a:latin typeface="Times New Roman" pitchFamily="18" charset="0"/>
+                <a:latin typeface="Times New Roman" panose="02020603050405020304" pitchFamily="18" charset="0"/>
               </a:rPr>
               <a:t>Static unit testing is not an alternative to dynamic unit testing</a:t>
             </a:r>
+            <a:endParaRPr lang="en-US" dirty="0" smtClean="0">
+              <a:latin typeface="Times New Roman" panose="02020603050405020304" pitchFamily="18" charset="0"/>
+            </a:endParaRPr>
           </a:p>
           <a:p>
             <a:r>
               <a:rPr lang="en-US" dirty="0" smtClean="0">
-                <a:latin typeface="Times New Roman" pitchFamily="18" charset="0"/>
+                <a:latin typeface="Times New Roman" panose="02020603050405020304" pitchFamily="18" charset="0"/>
               </a:rPr>
               <a:t>Static and Dynamic analysis are complementary in nature</a:t>
             </a:r>
+            <a:endParaRPr lang="en-US" dirty="0" smtClean="0">
+              <a:latin typeface="Times New Roman" panose="02020603050405020304" pitchFamily="18" charset="0"/>
+            </a:endParaRPr>
           </a:p>
           <a:p>
             <a:r>
               <a:rPr lang="en-US" dirty="0" smtClean="0">
-                <a:latin typeface="Times New Roman" pitchFamily="18" charset="0"/>
+                <a:latin typeface="Times New Roman" panose="02020603050405020304" pitchFamily="18" charset="0"/>
               </a:rPr>
               <a:t>In practice, partial dynamic unit testing is performed concurrently with static unit testing</a:t>
             </a:r>
+            <a:endParaRPr lang="en-US" dirty="0" smtClean="0">
+              <a:latin typeface="Times New Roman" panose="02020603050405020304" pitchFamily="18" charset="0"/>
+            </a:endParaRPr>
           </a:p>
           <a:p>
             <a:r>
               <a:rPr lang="en-US" dirty="0" smtClean="0">
-                <a:latin typeface="Times New Roman" pitchFamily="18" charset="0"/>
+                <a:latin typeface="Times New Roman" panose="02020603050405020304" pitchFamily="18" charset="0"/>
               </a:rPr>
               <a:t>It is recommended that static unit testing be performed prior to the dynamic unit testing</a:t>
             </a:r>
-          </a:p>
-          <a:p>
             <a:endParaRPr lang="en-US" dirty="0" smtClean="0">
-              <a:latin typeface="Times New Roman" pitchFamily="18" charset="0"/>
+              <a:latin typeface="Times New Roman" panose="02020603050405020304" pitchFamily="18" charset="0"/>
+            </a:endParaRPr>
+          </a:p>
+          <a:p>
+            <a:endParaRPr lang="en-US" dirty="0" smtClean="0">
+              <a:latin typeface="Times New Roman" panose="02020603050405020304" pitchFamily="18" charset="0"/>
             </a:endParaRPr>
           </a:p>
           <a:p>
             <a:pPr lvl="1"/>
             <a:endParaRPr lang="en-US" dirty="0" smtClean="0">
-              <a:latin typeface="Times New Roman" pitchFamily="18" charset="0"/>
+              <a:latin typeface="Times New Roman" panose="02020603050405020304" pitchFamily="18" charset="0"/>
             </a:endParaRPr>
           </a:p>
         </p:txBody>
@@ -16853,19 +16581,12 @@
           <a:p>
             <a:fld id="{785F2599-6E08-4249-A2A4-C728DB96A143}" type="slidenum">
               <a:rPr lang="en-US"/>
-              <a:pPr/>
-              <a:t>4</a:t>
             </a:fld>
             <a:endParaRPr lang="en-US"/>
           </a:p>
         </p:txBody>
       </p:sp>
     </p:spTree>
-    <p:extLst>
-      <p:ext uri="{BB962C8B-B14F-4D97-AF65-F5344CB8AC3E}">
-        <p14:creationId xmlns:p14="http://schemas.microsoft.com/office/powerpoint/2010/main" val="3504603417"/>
-      </p:ext>
-    </p:extLst>
   </p:cSld>
   <p:clrMapOvr>
     <a:masterClrMapping/>
@@ -16922,10 +16643,13 @@
           <a:p>
             <a:r>
               <a:rPr lang="en-US" dirty="0" smtClean="0">
-                <a:latin typeface="Times New Roman" pitchFamily="18" charset="0"/>
+                <a:latin typeface="Times New Roman" panose="02020603050405020304" pitchFamily="18" charset="0"/>
               </a:rPr>
               <a:t>Static Unit Testing</a:t>
             </a:r>
+            <a:endParaRPr lang="en-US" dirty="0" smtClean="0">
+              <a:latin typeface="Times New Roman" panose="02020603050405020304" pitchFamily="18" charset="0"/>
+            </a:endParaRPr>
           </a:p>
         </p:txBody>
       </p:sp>
@@ -16956,123 +16680,153 @@
           <a:p>
             <a:r>
               <a:rPr lang="en-US" dirty="0" smtClean="0">
-                <a:latin typeface="Times New Roman" pitchFamily="18" charset="0"/>
+                <a:latin typeface="Times New Roman" panose="02020603050405020304" pitchFamily="18" charset="0"/>
               </a:rPr>
               <a:t>In static unit testing code is reviewed by applying techniques:</a:t>
             </a:r>
+            <a:endParaRPr lang="en-US" dirty="0" smtClean="0">
+              <a:latin typeface="Times New Roman" panose="02020603050405020304" pitchFamily="18" charset="0"/>
+            </a:endParaRPr>
           </a:p>
           <a:p>
             <a:pPr lvl="1"/>
             <a:r>
               <a:rPr lang="en-US" b="1" dirty="0" smtClean="0">
-                <a:latin typeface="Times New Roman" pitchFamily="18" charset="0"/>
+                <a:latin typeface="Times New Roman" panose="02020603050405020304" pitchFamily="18" charset="0"/>
               </a:rPr>
               <a:t>Inspection:</a:t>
             </a:r>
             <a:r>
               <a:rPr lang="en-US" dirty="0" smtClean="0">
-                <a:latin typeface="Times New Roman" pitchFamily="18" charset="0"/>
+                <a:latin typeface="Times New Roman" panose="02020603050405020304" pitchFamily="18" charset="0"/>
               </a:rPr>
               <a:t> It is a step by step peer group review of a work product, with each step checked against pre-determined criteria</a:t>
             </a:r>
+            <a:endParaRPr lang="en-US" dirty="0" smtClean="0">
+              <a:latin typeface="Times New Roman" panose="02020603050405020304" pitchFamily="18" charset="0"/>
+            </a:endParaRPr>
           </a:p>
           <a:p>
             <a:pPr lvl="1"/>
             <a:r>
               <a:rPr lang="en-US" b="1" dirty="0" smtClean="0">
-                <a:latin typeface="Times New Roman" pitchFamily="18" charset="0"/>
+                <a:latin typeface="Times New Roman" panose="02020603050405020304" pitchFamily="18" charset="0"/>
               </a:rPr>
               <a:t>Walkthrough:</a:t>
             </a:r>
             <a:r>
               <a:rPr lang="en-US" dirty="0" smtClean="0">
-                <a:latin typeface="Times New Roman" pitchFamily="18" charset="0"/>
+                <a:latin typeface="Times New Roman" panose="02020603050405020304" pitchFamily="18" charset="0"/>
               </a:rPr>
               <a:t> It is review where the author leads the team through a manual or simulated executed of the product using pre-defined scenarios</a:t>
             </a:r>
+            <a:endParaRPr lang="en-US" dirty="0" smtClean="0">
+              <a:latin typeface="Times New Roman" panose="02020603050405020304" pitchFamily="18" charset="0"/>
+            </a:endParaRPr>
           </a:p>
           <a:p>
             <a:r>
               <a:rPr lang="en-US" dirty="0" smtClean="0">
-                <a:latin typeface="Times New Roman" pitchFamily="18" charset="0"/>
+                <a:latin typeface="Times New Roman" panose="02020603050405020304" pitchFamily="18" charset="0"/>
               </a:rPr>
               <a:t>The idea here is to examine source code in detail in a systematic manner</a:t>
             </a:r>
+            <a:endParaRPr lang="en-US" dirty="0" smtClean="0">
+              <a:latin typeface="Times New Roman" panose="02020603050405020304" pitchFamily="18" charset="0"/>
+            </a:endParaRPr>
           </a:p>
           <a:p>
             <a:r>
               <a:rPr lang="en-US" dirty="0" smtClean="0">
-                <a:latin typeface="Times New Roman" pitchFamily="18" charset="0"/>
+                <a:latin typeface="Times New Roman" panose="02020603050405020304" pitchFamily="18" charset="0"/>
               </a:rPr>
               <a:t>The objective of code review is to </a:t>
             </a:r>
             <a:r>
               <a:rPr lang="en-US" i="1" dirty="0" smtClean="0">
-                <a:latin typeface="Times New Roman" pitchFamily="18" charset="0"/>
+                <a:latin typeface="Times New Roman" panose="02020603050405020304" pitchFamily="18" charset="0"/>
               </a:rPr>
               <a:t>review</a:t>
             </a:r>
             <a:r>
               <a:rPr lang="en-US" dirty="0" smtClean="0">
-                <a:latin typeface="Times New Roman" pitchFamily="18" charset="0"/>
+                <a:latin typeface="Times New Roman" panose="02020603050405020304" pitchFamily="18" charset="0"/>
               </a:rPr>
               <a:t> the code, and </a:t>
             </a:r>
             <a:r>
               <a:rPr lang="en-US" i="1" dirty="0" smtClean="0">
-                <a:latin typeface="Times New Roman" pitchFamily="18" charset="0"/>
+                <a:latin typeface="Times New Roman" panose="02020603050405020304" pitchFamily="18" charset="0"/>
               </a:rPr>
               <a:t>not</a:t>
             </a:r>
             <a:r>
               <a:rPr lang="en-US" dirty="0" smtClean="0">
-                <a:latin typeface="Times New Roman" pitchFamily="18" charset="0"/>
+                <a:latin typeface="Times New Roman" panose="02020603050405020304" pitchFamily="18" charset="0"/>
               </a:rPr>
               <a:t> to evaluate the author of the code</a:t>
             </a:r>
+            <a:endParaRPr lang="en-US" dirty="0" smtClean="0">
+              <a:latin typeface="Times New Roman" panose="02020603050405020304" pitchFamily="18" charset="0"/>
+            </a:endParaRPr>
           </a:p>
           <a:p>
             <a:r>
               <a:rPr lang="en-US" dirty="0" smtClean="0">
-                <a:latin typeface="Times New Roman" pitchFamily="18" charset="0"/>
+                <a:latin typeface="Times New Roman" panose="02020603050405020304" pitchFamily="18" charset="0"/>
               </a:rPr>
               <a:t>Code review must be planned and managed in a professional manner</a:t>
             </a:r>
+            <a:endParaRPr lang="en-US" dirty="0" smtClean="0">
+              <a:latin typeface="Times New Roman" panose="02020603050405020304" pitchFamily="18" charset="0"/>
+            </a:endParaRPr>
           </a:p>
           <a:p>
             <a:r>
               <a:rPr lang="en-US" dirty="0" smtClean="0">
-                <a:latin typeface="Times New Roman" pitchFamily="18" charset="0"/>
+                <a:latin typeface="Times New Roman" panose="02020603050405020304" pitchFamily="18" charset="0"/>
               </a:rPr>
               <a:t>The key to the success of code is to divide and conquer</a:t>
             </a:r>
+            <a:endParaRPr lang="en-US" dirty="0" smtClean="0">
+              <a:latin typeface="Times New Roman" panose="02020603050405020304" pitchFamily="18" charset="0"/>
+            </a:endParaRPr>
           </a:p>
           <a:p>
             <a:pPr lvl="1"/>
             <a:r>
               <a:rPr lang="en-US" dirty="0" smtClean="0">
-                <a:latin typeface="Times New Roman" pitchFamily="18" charset="0"/>
+                <a:latin typeface="Times New Roman" panose="02020603050405020304" pitchFamily="18" charset="0"/>
               </a:rPr>
               <a:t>An examiner inspect small parts of the unit in isolation</a:t>
             </a:r>
+            <a:endParaRPr lang="en-US" dirty="0" smtClean="0">
+              <a:latin typeface="Times New Roman" panose="02020603050405020304" pitchFamily="18" charset="0"/>
+            </a:endParaRPr>
           </a:p>
           <a:p>
             <a:pPr lvl="2"/>
             <a:r>
               <a:rPr lang="en-US" dirty="0" smtClean="0">
-                <a:latin typeface="Times New Roman" pitchFamily="18" charset="0"/>
+                <a:latin typeface="Times New Roman" panose="02020603050405020304" pitchFamily="18" charset="0"/>
               </a:rPr>
               <a:t> nothing is overlooked</a:t>
             </a:r>
+            <a:endParaRPr lang="en-US" dirty="0" smtClean="0">
+              <a:latin typeface="Times New Roman" panose="02020603050405020304" pitchFamily="18" charset="0"/>
+            </a:endParaRPr>
           </a:p>
           <a:p>
             <a:pPr lvl="2"/>
             <a:r>
               <a:rPr lang="en-US" dirty="0" smtClean="0">
-                <a:latin typeface="Times New Roman" pitchFamily="18" charset="0"/>
+                <a:latin typeface="Times New Roman" panose="02020603050405020304" pitchFamily="18" charset="0"/>
               </a:rPr>
               <a:t> the correctness of all examined parts of the module implies the correctness of the whole module</a:t>
             </a:r>
+            <a:endParaRPr lang="en-US" dirty="0" smtClean="0">
+              <a:latin typeface="Times New Roman" panose="02020603050405020304" pitchFamily="18" charset="0"/>
+            </a:endParaRPr>
           </a:p>
         </p:txBody>
       </p:sp>
@@ -17093,19 +16847,12 @@
           <a:p>
             <a:fld id="{83CCE2E3-E542-430F-87FC-28EA2A445961}" type="slidenum">
               <a:rPr lang="en-US"/>
-              <a:pPr/>
-              <a:t>5</a:t>
             </a:fld>
             <a:endParaRPr lang="en-US"/>
           </a:p>
         </p:txBody>
       </p:sp>
     </p:spTree>
-    <p:extLst>
-      <p:ext uri="{BB962C8B-B14F-4D97-AF65-F5344CB8AC3E}">
-        <p14:creationId xmlns:p14="http://schemas.microsoft.com/office/powerpoint/2010/main" val="1808750568"/>
-      </p:ext>
-    </p:extLst>
   </p:cSld>
   <p:clrMapOvr>
     <a:masterClrMapping/>
@@ -17162,10 +16909,13 @@
           <a:p>
             <a:r>
               <a:rPr lang="en-US" dirty="0" smtClean="0">
-                <a:latin typeface="Times New Roman" pitchFamily="18" charset="0"/>
+                <a:latin typeface="Times New Roman" panose="02020603050405020304" pitchFamily="18" charset="0"/>
               </a:rPr>
               <a:t>Static Unit Testing (Code Review)</a:t>
             </a:r>
+            <a:endParaRPr lang="en-US" dirty="0" smtClean="0">
+              <a:latin typeface="Times New Roman" panose="02020603050405020304" pitchFamily="18" charset="0"/>
+            </a:endParaRPr>
           </a:p>
         </p:txBody>
       </p:sp>
@@ -17196,201 +16946,252 @@
           <a:p>
             <a:r>
               <a:rPr lang="en-US" sz="1800" dirty="0">
-                <a:latin typeface="Times New Roman" pitchFamily="18" charset="0"/>
+                <a:latin typeface="Times New Roman" panose="02020603050405020304" pitchFamily="18" charset="0"/>
               </a:rPr>
               <a:t>Step 1: </a:t>
             </a:r>
             <a:r>
               <a:rPr lang="en-US" sz="1800" b="1" dirty="0">
-                <a:latin typeface="Times New Roman" pitchFamily="18" charset="0"/>
+                <a:latin typeface="Times New Roman" panose="02020603050405020304" pitchFamily="18" charset="0"/>
               </a:rPr>
               <a:t>Readiness </a:t>
             </a:r>
+            <a:endParaRPr lang="en-US" sz="1800" b="1" dirty="0">
+              <a:latin typeface="Times New Roman" panose="02020603050405020304" pitchFamily="18" charset="0"/>
+            </a:endParaRPr>
           </a:p>
           <a:p>
             <a:pPr lvl="1"/>
             <a:r>
               <a:rPr lang="en-US" sz="1600" b="1" dirty="0">
-                <a:latin typeface="Times New Roman" pitchFamily="18" charset="0"/>
+                <a:latin typeface="Times New Roman" panose="02020603050405020304" pitchFamily="18" charset="0"/>
               </a:rPr>
               <a:t> Criteria</a:t>
             </a:r>
+            <a:endParaRPr lang="en-US" sz="1600" b="1" dirty="0">
+              <a:latin typeface="Times New Roman" panose="02020603050405020304" pitchFamily="18" charset="0"/>
+            </a:endParaRPr>
           </a:p>
           <a:p>
             <a:pPr lvl="2"/>
             <a:r>
               <a:rPr lang="en-US" sz="1600" b="1" dirty="0">
-                <a:latin typeface="Times New Roman" pitchFamily="18" charset="0"/>
+                <a:latin typeface="Times New Roman" panose="02020603050405020304" pitchFamily="18" charset="0"/>
               </a:rPr>
               <a:t>Completeness</a:t>
             </a:r>
+            <a:endParaRPr lang="en-US" sz="1600" b="1" dirty="0">
+              <a:latin typeface="Times New Roman" panose="02020603050405020304" pitchFamily="18" charset="0"/>
+            </a:endParaRPr>
           </a:p>
           <a:p>
             <a:pPr lvl="2"/>
             <a:r>
               <a:rPr lang="en-US" sz="1600" b="1" dirty="0">
-                <a:latin typeface="Times New Roman" pitchFamily="18" charset="0"/>
+                <a:latin typeface="Times New Roman" panose="02020603050405020304" pitchFamily="18" charset="0"/>
               </a:rPr>
               <a:t>Minimal functionality</a:t>
             </a:r>
+            <a:endParaRPr lang="en-US" sz="1600" b="1" dirty="0">
+              <a:latin typeface="Times New Roman" panose="02020603050405020304" pitchFamily="18" charset="0"/>
+            </a:endParaRPr>
           </a:p>
           <a:p>
             <a:pPr lvl="2"/>
             <a:r>
               <a:rPr lang="en-US" sz="1600" b="1" dirty="0">
-                <a:latin typeface="Times New Roman" pitchFamily="18" charset="0"/>
+                <a:latin typeface="Times New Roman" panose="02020603050405020304" pitchFamily="18" charset="0"/>
               </a:rPr>
               <a:t>Readability</a:t>
             </a:r>
+            <a:endParaRPr lang="en-US" sz="1600" b="1" dirty="0">
+              <a:latin typeface="Times New Roman" panose="02020603050405020304" pitchFamily="18" charset="0"/>
+            </a:endParaRPr>
           </a:p>
           <a:p>
             <a:pPr lvl="2"/>
             <a:r>
               <a:rPr lang="en-US" sz="1600" b="1" dirty="0">
-                <a:latin typeface="Times New Roman" pitchFamily="18" charset="0"/>
+                <a:latin typeface="Times New Roman" panose="02020603050405020304" pitchFamily="18" charset="0"/>
               </a:rPr>
               <a:t>Complexity</a:t>
             </a:r>
+            <a:endParaRPr lang="en-US" sz="1600" b="1" dirty="0">
+              <a:latin typeface="Times New Roman" panose="02020603050405020304" pitchFamily="18" charset="0"/>
+            </a:endParaRPr>
           </a:p>
           <a:p>
             <a:pPr lvl="2"/>
             <a:r>
               <a:rPr lang="en-US" sz="1600" b="1" dirty="0">
-                <a:latin typeface="Times New Roman" pitchFamily="18" charset="0"/>
+                <a:latin typeface="Times New Roman" panose="02020603050405020304" pitchFamily="18" charset="0"/>
               </a:rPr>
               <a:t> Requirements and design                       		documents</a:t>
             </a:r>
+            <a:endParaRPr lang="en-US" sz="1600" b="1" dirty="0">
+              <a:latin typeface="Times New Roman" panose="02020603050405020304" pitchFamily="18" charset="0"/>
+            </a:endParaRPr>
           </a:p>
           <a:p>
             <a:pPr lvl="1"/>
             <a:r>
               <a:rPr lang="en-US" sz="1600" b="1" dirty="0">
-                <a:latin typeface="Times New Roman" pitchFamily="18" charset="0"/>
+                <a:latin typeface="Times New Roman" panose="02020603050405020304" pitchFamily="18" charset="0"/>
               </a:rPr>
               <a:t> Roles</a:t>
             </a:r>
+            <a:endParaRPr lang="en-US" sz="1600" b="1" dirty="0">
+              <a:latin typeface="Times New Roman" panose="02020603050405020304" pitchFamily="18" charset="0"/>
+            </a:endParaRPr>
           </a:p>
           <a:p>
             <a:pPr lvl="2"/>
             <a:r>
               <a:rPr lang="en-US" sz="1600" b="1" dirty="0">
-                <a:latin typeface="Times New Roman" pitchFamily="18" charset="0"/>
+                <a:latin typeface="Times New Roman" panose="02020603050405020304" pitchFamily="18" charset="0"/>
               </a:rPr>
               <a:t>Moderator</a:t>
             </a:r>
+            <a:endParaRPr lang="en-US" sz="1600" b="1" dirty="0">
+              <a:latin typeface="Times New Roman" panose="02020603050405020304" pitchFamily="18" charset="0"/>
+            </a:endParaRPr>
           </a:p>
           <a:p>
             <a:pPr lvl="2"/>
             <a:r>
               <a:rPr lang="en-US" sz="1600" b="1" dirty="0">
-                <a:latin typeface="Times New Roman" pitchFamily="18" charset="0"/>
+                <a:latin typeface="Times New Roman" panose="02020603050405020304" pitchFamily="18" charset="0"/>
               </a:rPr>
               <a:t>Author</a:t>
             </a:r>
+            <a:endParaRPr lang="en-US" sz="1600" b="1" dirty="0">
+              <a:latin typeface="Times New Roman" panose="02020603050405020304" pitchFamily="18" charset="0"/>
+            </a:endParaRPr>
           </a:p>
           <a:p>
             <a:pPr lvl="2"/>
             <a:r>
               <a:rPr lang="en-US" sz="1600" b="1" dirty="0">
-                <a:latin typeface="Times New Roman" pitchFamily="18" charset="0"/>
+                <a:latin typeface="Times New Roman" panose="02020603050405020304" pitchFamily="18" charset="0"/>
               </a:rPr>
               <a:t>Presenter</a:t>
             </a:r>
+            <a:endParaRPr lang="en-US" sz="1600" b="1" dirty="0">
+              <a:latin typeface="Times New Roman" panose="02020603050405020304" pitchFamily="18" charset="0"/>
+            </a:endParaRPr>
           </a:p>
           <a:p>
             <a:pPr lvl="2"/>
             <a:r>
               <a:rPr lang="en-US" sz="1600" b="1" dirty="0">
-                <a:latin typeface="Times New Roman" pitchFamily="18" charset="0"/>
+                <a:latin typeface="Times New Roman" panose="02020603050405020304" pitchFamily="18" charset="0"/>
               </a:rPr>
               <a:t>Record keeper</a:t>
             </a:r>
+            <a:endParaRPr lang="en-US" sz="1600" b="1" dirty="0">
+              <a:latin typeface="Times New Roman" panose="02020603050405020304" pitchFamily="18" charset="0"/>
+            </a:endParaRPr>
           </a:p>
           <a:p>
             <a:pPr lvl="2"/>
             <a:r>
               <a:rPr lang="en-US" sz="1600" b="1" dirty="0">
-                <a:latin typeface="Times New Roman" pitchFamily="18" charset="0"/>
+                <a:latin typeface="Times New Roman" panose="02020603050405020304" pitchFamily="18" charset="0"/>
               </a:rPr>
               <a:t>Reviewers</a:t>
             </a:r>
+            <a:endParaRPr lang="en-US" sz="1600" b="1" dirty="0">
+              <a:latin typeface="Times New Roman" panose="02020603050405020304" pitchFamily="18" charset="0"/>
+            </a:endParaRPr>
           </a:p>
           <a:p>
             <a:pPr lvl="2"/>
             <a:r>
               <a:rPr lang="en-US" sz="1600" b="1" dirty="0" smtClean="0">
-                <a:latin typeface="Times New Roman" pitchFamily="18" charset="0"/>
+                <a:latin typeface="Times New Roman" panose="02020603050405020304" pitchFamily="18" charset="0"/>
               </a:rPr>
               <a:t>Observer</a:t>
             </a:r>
+            <a:endParaRPr lang="en-US" sz="1600" b="1" dirty="0" smtClean="0">
+              <a:latin typeface="Times New Roman" panose="02020603050405020304" pitchFamily="18" charset="0"/>
+            </a:endParaRPr>
           </a:p>
           <a:p>
             <a:pPr lvl="3"/>
             <a:r>
               <a:rPr lang="en-US" b="1" dirty="0" smtClean="0">
-                <a:latin typeface="Times New Roman" pitchFamily="18" charset="0"/>
+                <a:latin typeface="Times New Roman" panose="02020603050405020304" pitchFamily="18" charset="0"/>
               </a:rPr>
               <a:t>Reviewing is not reporting</a:t>
             </a:r>
             <a:endParaRPr lang="en-US" b="1" dirty="0">
-              <a:latin typeface="Times New Roman" pitchFamily="18" charset="0"/>
+              <a:latin typeface="Times New Roman" panose="02020603050405020304" pitchFamily="18" charset="0"/>
             </a:endParaRPr>
           </a:p>
           <a:p>
             <a:r>
               <a:rPr lang="en-US" sz="1800" b="1" dirty="0">
-                <a:latin typeface="Times New Roman" pitchFamily="18" charset="0"/>
+                <a:latin typeface="Times New Roman" panose="02020603050405020304" pitchFamily="18" charset="0"/>
               </a:rPr>
               <a:t> </a:t>
             </a:r>
             <a:r>
               <a:rPr lang="en-US" sz="1800" dirty="0">
-                <a:latin typeface="Times New Roman" pitchFamily="18" charset="0"/>
+                <a:latin typeface="Times New Roman" panose="02020603050405020304" pitchFamily="18" charset="0"/>
               </a:rPr>
               <a:t>Step 2: </a:t>
             </a:r>
             <a:r>
               <a:rPr lang="en-US" sz="1800" b="1" dirty="0">
-                <a:latin typeface="Times New Roman" pitchFamily="18" charset="0"/>
+                <a:latin typeface="Times New Roman" panose="02020603050405020304" pitchFamily="18" charset="0"/>
               </a:rPr>
               <a:t>Preparation</a:t>
             </a:r>
+            <a:endParaRPr lang="en-US" sz="1800" b="1" dirty="0">
+              <a:latin typeface="Times New Roman" panose="02020603050405020304" pitchFamily="18" charset="0"/>
+            </a:endParaRPr>
           </a:p>
           <a:p>
             <a:pPr lvl="1"/>
             <a:r>
               <a:rPr lang="en-US" sz="1600" b="1" dirty="0">
-                <a:latin typeface="Times New Roman" pitchFamily="18" charset="0"/>
+                <a:latin typeface="Times New Roman" panose="02020603050405020304" pitchFamily="18" charset="0"/>
               </a:rPr>
               <a:t> List of questions</a:t>
             </a:r>
+            <a:endParaRPr lang="en-US" sz="1600" b="1" dirty="0">
+              <a:latin typeface="Times New Roman" panose="02020603050405020304" pitchFamily="18" charset="0"/>
+            </a:endParaRPr>
           </a:p>
           <a:p>
             <a:pPr lvl="1"/>
             <a:r>
               <a:rPr lang="en-US" sz="1600" b="1" dirty="0">
-                <a:latin typeface="Times New Roman" pitchFamily="18" charset="0"/>
+                <a:latin typeface="Times New Roman" panose="02020603050405020304" pitchFamily="18" charset="0"/>
               </a:rPr>
               <a:t> Potential Change Request (CR</a:t>
             </a:r>
             <a:r>
               <a:rPr lang="en-US" sz="1600" b="1" dirty="0" smtClean="0">
-                <a:latin typeface="Times New Roman" pitchFamily="18" charset="0"/>
+                <a:latin typeface="Times New Roman" panose="02020603050405020304" pitchFamily="18" charset="0"/>
               </a:rPr>
               <a:t>) – Not defects</a:t>
             </a:r>
             <a:endParaRPr lang="en-US" sz="1600" b="1" dirty="0">
-              <a:latin typeface="Times New Roman" pitchFamily="18" charset="0"/>
+              <a:latin typeface="Times New Roman" panose="02020603050405020304" pitchFamily="18" charset="0"/>
             </a:endParaRPr>
           </a:p>
           <a:p>
             <a:pPr lvl="1"/>
             <a:r>
               <a:rPr lang="en-US" sz="1600" b="1" dirty="0">
-                <a:latin typeface="Times New Roman" pitchFamily="18" charset="0"/>
+                <a:latin typeface="Times New Roman" panose="02020603050405020304" pitchFamily="18" charset="0"/>
               </a:rPr>
               <a:t>Suggested improvement opportunities</a:t>
             </a:r>
+            <a:endParaRPr lang="en-US" sz="1600" b="1" dirty="0">
+              <a:latin typeface="Times New Roman" panose="02020603050405020304" pitchFamily="18" charset="0"/>
+            </a:endParaRPr>
           </a:p>
         </p:txBody>
       </p:sp>
@@ -17411,8 +17212,6 @@
           <a:p>
             <a:fld id="{BBD5CD18-5A97-43EB-86EC-F24E0A2D3845}" type="slidenum">
               <a:rPr lang="en-US"/>
-              <a:pPr/>
-              <a:t>6</a:t>
             </a:fld>
             <a:endParaRPr lang="en-US"/>
           </a:p>
@@ -17429,7 +17228,7 @@
           </p:nvPr>
         </p:nvPicPr>
         <p:blipFill>
-          <a:blip r:embed="rId3"/>
+          <a:blip r:embed="rId1"/>
           <a:srcRect/>
           <a:stretch>
             <a:fillRect/>
@@ -17440,7 +17239,6 @@
             <a:off x="7634288" y="900113"/>
             <a:ext cx="4557712" cy="5094287"/>
           </a:xfrm>
-          <a:ln/>
         </p:spPr>
       </p:pic>
       <p:sp>
@@ -17480,15 +17278,15 @@
               </a:rPr>
               <a:t>Figure 3.1: Steps in the code review process</a:t>
             </a:r>
+            <a:endParaRPr lang="en-US" dirty="0">
+              <a:solidFill>
+                <a:srgbClr val="000000"/>
+              </a:solidFill>
+            </a:endParaRPr>
           </a:p>
         </p:txBody>
       </p:sp>
     </p:spTree>
-    <p:extLst>
-      <p:ext uri="{BB962C8B-B14F-4D97-AF65-F5344CB8AC3E}">
-        <p14:creationId xmlns:p14="http://schemas.microsoft.com/office/powerpoint/2010/main" val="2993549734"/>
-      </p:ext>
-    </p:extLst>
   </p:cSld>
   <p:clrMapOvr>
     <a:masterClrMapping/>
@@ -17545,10 +17343,13 @@
           <a:p>
             <a:r>
               <a:rPr lang="en-US" dirty="0" smtClean="0">
-                <a:latin typeface="Times New Roman" pitchFamily="18" charset="0"/>
+                <a:latin typeface="Times New Roman" panose="02020603050405020304" pitchFamily="18" charset="0"/>
               </a:rPr>
               <a:t>Static Unit Testing (Code Review)</a:t>
             </a:r>
+            <a:endParaRPr lang="en-US" dirty="0" smtClean="0">
+              <a:latin typeface="Times New Roman" panose="02020603050405020304" pitchFamily="18" charset="0"/>
+            </a:endParaRPr>
           </a:p>
         </p:txBody>
       </p:sp>
@@ -17579,163 +17380,202 @@
           <a:p>
             <a:r>
               <a:rPr lang="en-US" sz="2000" dirty="0">
-                <a:latin typeface="Times New Roman" pitchFamily="18" charset="0"/>
+                <a:latin typeface="Times New Roman" panose="02020603050405020304" pitchFamily="18" charset="0"/>
               </a:rPr>
               <a:t>Step 3: </a:t>
             </a:r>
             <a:r>
               <a:rPr lang="en-US" sz="2000" b="1" dirty="0">
-                <a:latin typeface="Times New Roman" pitchFamily="18" charset="0"/>
+                <a:latin typeface="Times New Roman" panose="02020603050405020304" pitchFamily="18" charset="0"/>
               </a:rPr>
               <a:t>Examination</a:t>
             </a:r>
+            <a:endParaRPr lang="en-US" sz="2000" b="1" dirty="0">
+              <a:latin typeface="Times New Roman" panose="02020603050405020304" pitchFamily="18" charset="0"/>
+            </a:endParaRPr>
           </a:p>
           <a:p>
             <a:pPr lvl="1"/>
             <a:r>
               <a:rPr lang="en-US" sz="1800" b="1" dirty="0">
-                <a:latin typeface="Times New Roman" pitchFamily="18" charset="0"/>
+                <a:latin typeface="Times New Roman" panose="02020603050405020304" pitchFamily="18" charset="0"/>
               </a:rPr>
               <a:t> </a:t>
             </a:r>
             <a:r>
               <a:rPr lang="en-US" sz="1800" dirty="0">
-                <a:latin typeface="Times New Roman" pitchFamily="18" charset="0"/>
+                <a:latin typeface="Times New Roman" panose="02020603050405020304" pitchFamily="18" charset="0"/>
               </a:rPr>
               <a:t>The author makes a presentation</a:t>
             </a:r>
+            <a:endParaRPr lang="en-US" sz="1800" dirty="0">
+              <a:latin typeface="Times New Roman" panose="02020603050405020304" pitchFamily="18" charset="0"/>
+            </a:endParaRPr>
           </a:p>
           <a:p>
             <a:pPr lvl="1"/>
             <a:r>
               <a:rPr lang="en-US" sz="1800" dirty="0">
-                <a:latin typeface="Times New Roman" pitchFamily="18" charset="0"/>
+                <a:latin typeface="Times New Roman" panose="02020603050405020304" pitchFamily="18" charset="0"/>
               </a:rPr>
               <a:t> The presenter reads the code</a:t>
             </a:r>
+            <a:endParaRPr lang="en-US" sz="1800" dirty="0">
+              <a:latin typeface="Times New Roman" panose="02020603050405020304" pitchFamily="18" charset="0"/>
+            </a:endParaRPr>
           </a:p>
           <a:p>
             <a:pPr lvl="1"/>
             <a:r>
               <a:rPr lang="en-US" sz="1800" dirty="0">
-                <a:latin typeface="Times New Roman" pitchFamily="18" charset="0"/>
+                <a:latin typeface="Times New Roman" panose="02020603050405020304" pitchFamily="18" charset="0"/>
               </a:rPr>
               <a:t> The record keeper documents the CR</a:t>
             </a:r>
+            <a:endParaRPr lang="en-US" sz="1800" dirty="0">
+              <a:latin typeface="Times New Roman" panose="02020603050405020304" pitchFamily="18" charset="0"/>
+            </a:endParaRPr>
           </a:p>
           <a:p>
             <a:pPr lvl="1"/>
             <a:r>
               <a:rPr lang="en-US" sz="1800" dirty="0">
-                <a:latin typeface="Times New Roman" pitchFamily="18" charset="0"/>
+                <a:latin typeface="Times New Roman" panose="02020603050405020304" pitchFamily="18" charset="0"/>
               </a:rPr>
               <a:t> Moderator ensures the review is on track</a:t>
             </a:r>
             <a:endParaRPr lang="en-US" sz="1800" b="1" dirty="0">
-              <a:latin typeface="Times New Roman" pitchFamily="18" charset="0"/>
+              <a:latin typeface="Times New Roman" panose="02020603050405020304" pitchFamily="18" charset="0"/>
             </a:endParaRPr>
           </a:p>
           <a:p>
             <a:r>
               <a:rPr lang="en-US" sz="2000" dirty="0">
-                <a:latin typeface="Times New Roman" pitchFamily="18" charset="0"/>
+                <a:latin typeface="Times New Roman" panose="02020603050405020304" pitchFamily="18" charset="0"/>
               </a:rPr>
               <a:t> Step 4: </a:t>
             </a:r>
             <a:r>
               <a:rPr lang="en-US" sz="2000" b="1" dirty="0">
-                <a:latin typeface="Times New Roman" pitchFamily="18" charset="0"/>
+                <a:latin typeface="Times New Roman" panose="02020603050405020304" pitchFamily="18" charset="0"/>
               </a:rPr>
               <a:t>Re-work</a:t>
             </a:r>
+            <a:endParaRPr lang="en-US" sz="2000" b="1" dirty="0">
+              <a:latin typeface="Times New Roman" panose="02020603050405020304" pitchFamily="18" charset="0"/>
+            </a:endParaRPr>
           </a:p>
           <a:p>
             <a:pPr lvl="1"/>
             <a:r>
               <a:rPr lang="en-US" sz="1800" dirty="0">
-                <a:latin typeface="Times New Roman" pitchFamily="18" charset="0"/>
+                <a:latin typeface="Times New Roman" panose="02020603050405020304" pitchFamily="18" charset="0"/>
               </a:rPr>
               <a:t> Make the list of all the CRs</a:t>
             </a:r>
+            <a:endParaRPr lang="en-US" sz="1800" dirty="0">
+              <a:latin typeface="Times New Roman" panose="02020603050405020304" pitchFamily="18" charset="0"/>
+            </a:endParaRPr>
           </a:p>
           <a:p>
             <a:pPr lvl="1"/>
             <a:r>
               <a:rPr lang="en-US" sz="1800" dirty="0">
-                <a:latin typeface="Times New Roman" pitchFamily="18" charset="0"/>
+                <a:latin typeface="Times New Roman" panose="02020603050405020304" pitchFamily="18" charset="0"/>
               </a:rPr>
               <a:t> Make a list of improvements</a:t>
             </a:r>
+            <a:endParaRPr lang="en-US" sz="1800" dirty="0">
+              <a:latin typeface="Times New Roman" panose="02020603050405020304" pitchFamily="18" charset="0"/>
+            </a:endParaRPr>
           </a:p>
           <a:p>
             <a:pPr lvl="1"/>
             <a:r>
               <a:rPr lang="en-US" sz="1800" dirty="0">
-                <a:latin typeface="Times New Roman" pitchFamily="18" charset="0"/>
+                <a:latin typeface="Times New Roman" panose="02020603050405020304" pitchFamily="18" charset="0"/>
               </a:rPr>
               <a:t>Record the minutes meeting</a:t>
             </a:r>
+            <a:endParaRPr lang="en-US" sz="1800" dirty="0">
+              <a:latin typeface="Times New Roman" panose="02020603050405020304" pitchFamily="18" charset="0"/>
+            </a:endParaRPr>
           </a:p>
           <a:p>
             <a:pPr lvl="1"/>
             <a:r>
               <a:rPr lang="en-US" sz="1800" dirty="0">
-                <a:latin typeface="Times New Roman" pitchFamily="18" charset="0"/>
+                <a:latin typeface="Times New Roman" panose="02020603050405020304" pitchFamily="18" charset="0"/>
               </a:rPr>
               <a:t>Author works on the CRs to fix the issue</a:t>
             </a:r>
+            <a:endParaRPr lang="en-US" sz="1800" dirty="0">
+              <a:latin typeface="Times New Roman" panose="02020603050405020304" pitchFamily="18" charset="0"/>
+            </a:endParaRPr>
           </a:p>
           <a:p>
             <a:r>
               <a:rPr lang="en-US" sz="2000" dirty="0">
-                <a:latin typeface="Times New Roman" pitchFamily="18" charset="0"/>
+                <a:latin typeface="Times New Roman" panose="02020603050405020304" pitchFamily="18" charset="0"/>
               </a:rPr>
               <a:t>Step 5: </a:t>
             </a:r>
             <a:r>
               <a:rPr lang="en-US" sz="2000" b="1" dirty="0">
-                <a:latin typeface="Times New Roman" pitchFamily="18" charset="0"/>
+                <a:latin typeface="Times New Roman" panose="02020603050405020304" pitchFamily="18" charset="0"/>
               </a:rPr>
               <a:t>Validation</a:t>
             </a:r>
+            <a:endParaRPr lang="en-US" sz="2000" b="1" dirty="0">
+              <a:latin typeface="Times New Roman" panose="02020603050405020304" pitchFamily="18" charset="0"/>
+            </a:endParaRPr>
           </a:p>
           <a:p>
             <a:pPr lvl="1"/>
             <a:r>
               <a:rPr lang="en-US" sz="1800" dirty="0">
-                <a:latin typeface="Times New Roman" pitchFamily="18" charset="0"/>
+                <a:latin typeface="Times New Roman" panose="02020603050405020304" pitchFamily="18" charset="0"/>
               </a:rPr>
               <a:t>CRs are independently validated</a:t>
             </a:r>
+            <a:endParaRPr lang="en-US" sz="1800" dirty="0">
+              <a:latin typeface="Times New Roman" panose="02020603050405020304" pitchFamily="18" charset="0"/>
+            </a:endParaRPr>
           </a:p>
           <a:p>
             <a:r>
               <a:rPr lang="en-US" sz="2000" dirty="0">
-                <a:latin typeface="Times New Roman" pitchFamily="18" charset="0"/>
+                <a:latin typeface="Times New Roman" panose="02020603050405020304" pitchFamily="18" charset="0"/>
               </a:rPr>
               <a:t>Step 6: </a:t>
             </a:r>
             <a:r>
               <a:rPr lang="en-US" sz="2000" b="1" dirty="0">
-                <a:latin typeface="Times New Roman" pitchFamily="18" charset="0"/>
+                <a:latin typeface="Times New Roman" panose="02020603050405020304" pitchFamily="18" charset="0"/>
               </a:rPr>
               <a:t>Exit</a:t>
             </a:r>
+            <a:endParaRPr lang="en-US" sz="2000" b="1" dirty="0">
+              <a:latin typeface="Times New Roman" panose="02020603050405020304" pitchFamily="18" charset="0"/>
+            </a:endParaRPr>
           </a:p>
           <a:p>
             <a:pPr lvl="1"/>
             <a:r>
               <a:rPr lang="en-US" sz="1800" b="1" dirty="0">
-                <a:latin typeface="Times New Roman" pitchFamily="18" charset="0"/>
+                <a:latin typeface="Times New Roman" panose="02020603050405020304" pitchFamily="18" charset="0"/>
               </a:rPr>
               <a:t> </a:t>
             </a:r>
             <a:r>
               <a:rPr lang="en-US" sz="1800" dirty="0">
-                <a:latin typeface="Times New Roman" pitchFamily="18" charset="0"/>
+                <a:latin typeface="Times New Roman" panose="02020603050405020304" pitchFamily="18" charset="0"/>
               </a:rPr>
               <a:t>A summary report of the meeting minutes is distributes</a:t>
             </a:r>
+            <a:endParaRPr lang="en-US" sz="1800" dirty="0">
+              <a:latin typeface="Times New Roman" panose="02020603050405020304" pitchFamily="18" charset="0"/>
+            </a:endParaRPr>
           </a:p>
         </p:txBody>
       </p:sp>
@@ -17756,8 +17596,6 @@
           <a:p>
             <a:fld id="{0D6BDA08-92C7-46F9-8475-BC62ABAE9906}" type="slidenum">
               <a:rPr lang="en-US"/>
-              <a:pPr/>
-              <a:t>7</a:t>
             </a:fld>
             <a:endParaRPr lang="en-US"/>
           </a:p>
@@ -17789,70 +17627,85 @@
             </a:pPr>
             <a:r>
               <a:rPr lang="en-US" sz="2000" dirty="0">
-                <a:latin typeface="Times New Roman" pitchFamily="18" charset="0"/>
+                <a:latin typeface="Times New Roman" panose="02020603050405020304" pitchFamily="18" charset="0"/>
               </a:rPr>
               <a:t>A </a:t>
             </a:r>
             <a:r>
               <a:rPr lang="en-US" sz="2000" b="1" dirty="0">
-                <a:latin typeface="Times New Roman" pitchFamily="18" charset="0"/>
+                <a:latin typeface="Times New Roman" panose="02020603050405020304" pitchFamily="18" charset="0"/>
               </a:rPr>
               <a:t>Change Request (CR)</a:t>
             </a:r>
             <a:r>
               <a:rPr lang="en-US" sz="2000" dirty="0">
-                <a:latin typeface="Times New Roman" pitchFamily="18" charset="0"/>
+                <a:latin typeface="Times New Roman" panose="02020603050405020304" pitchFamily="18" charset="0"/>
               </a:rPr>
               <a:t> includes the following details:</a:t>
             </a:r>
+            <a:endParaRPr lang="en-US" sz="2000" dirty="0">
+              <a:latin typeface="Times New Roman" panose="02020603050405020304" pitchFamily="18" charset="0"/>
+            </a:endParaRPr>
           </a:p>
           <a:p>
             <a:pPr lvl="1"/>
             <a:r>
               <a:rPr lang="en-US" sz="1800" dirty="0">
-                <a:latin typeface="Times New Roman" pitchFamily="18" charset="0"/>
+                <a:latin typeface="Times New Roman" panose="02020603050405020304" pitchFamily="18" charset="0"/>
               </a:rPr>
               <a:t> Give a brief description of the issue </a:t>
             </a:r>
+            <a:endParaRPr lang="en-US" sz="1800" dirty="0">
+              <a:latin typeface="Times New Roman" panose="02020603050405020304" pitchFamily="18" charset="0"/>
+            </a:endParaRPr>
           </a:p>
           <a:p>
             <a:pPr lvl="1"/>
             <a:r>
               <a:rPr lang="en-US" sz="1800" dirty="0">
-                <a:latin typeface="Times New Roman" pitchFamily="18" charset="0"/>
+                <a:latin typeface="Times New Roman" panose="02020603050405020304" pitchFamily="18" charset="0"/>
               </a:rPr>
               <a:t> Assign a priority level (major or minor) to a </a:t>
             </a:r>
             <a:r>
               <a:rPr lang="en-US" sz="1800" b="1" dirty="0">
-                <a:latin typeface="Times New Roman" pitchFamily="18" charset="0"/>
+                <a:latin typeface="Times New Roman" panose="02020603050405020304" pitchFamily="18" charset="0"/>
               </a:rPr>
               <a:t>CR</a:t>
             </a:r>
+            <a:endParaRPr lang="en-US" sz="1800" b="1" dirty="0">
+              <a:latin typeface="Times New Roman" panose="02020603050405020304" pitchFamily="18" charset="0"/>
+            </a:endParaRPr>
           </a:p>
           <a:p>
             <a:pPr lvl="1"/>
             <a:r>
               <a:rPr lang="en-US" sz="1800" dirty="0">
-                <a:latin typeface="Times New Roman" pitchFamily="18" charset="0"/>
+                <a:latin typeface="Times New Roman" panose="02020603050405020304" pitchFamily="18" charset="0"/>
               </a:rPr>
               <a:t>Assign a person to follow it up</a:t>
             </a:r>
+            <a:endParaRPr lang="en-US" sz="1800" dirty="0">
+              <a:latin typeface="Times New Roman" panose="02020603050405020304" pitchFamily="18" charset="0"/>
+            </a:endParaRPr>
           </a:p>
           <a:p>
             <a:pPr lvl="1"/>
             <a:r>
               <a:rPr lang="en-US" sz="1800" dirty="0">
-                <a:latin typeface="Times New Roman" pitchFamily="18" charset="0"/>
+                <a:latin typeface="Times New Roman" panose="02020603050405020304" pitchFamily="18" charset="0"/>
               </a:rPr>
               <a:t>Set a deadline for addressing a </a:t>
             </a:r>
             <a:r>
               <a:rPr lang="en-US" sz="1800" b="1" dirty="0">
-                <a:latin typeface="Times New Roman" pitchFamily="18" charset="0"/>
+                <a:latin typeface="Times New Roman" panose="02020603050405020304" pitchFamily="18" charset="0"/>
               </a:rPr>
               <a:t>CR</a:t>
             </a:r>
+            <a:endParaRPr lang="en-US" sz="1800" b="1" dirty="0">
+              <a:latin typeface="Times New Roman" panose="02020603050405020304" pitchFamily="18" charset="0"/>
+            </a:endParaRPr>
           </a:p>
           <a:p>
             <a:pPr lvl="1">
@@ -17861,19 +17714,17 @@
             </a:pPr>
             <a:r>
               <a:rPr lang="en-US" sz="1800" dirty="0">
-                <a:latin typeface="Times New Roman" pitchFamily="18" charset="0"/>
+                <a:latin typeface="Times New Roman" panose="02020603050405020304" pitchFamily="18" charset="0"/>
               </a:rPr>
               <a:t>   </a:t>
             </a:r>
+            <a:endParaRPr lang="en-US" sz="1800" dirty="0">
+              <a:latin typeface="Times New Roman" panose="02020603050405020304" pitchFamily="18" charset="0"/>
+            </a:endParaRPr>
           </a:p>
         </p:txBody>
       </p:sp>
     </p:spTree>
-    <p:extLst>
-      <p:ext uri="{BB962C8B-B14F-4D97-AF65-F5344CB8AC3E}">
-        <p14:creationId xmlns:p14="http://schemas.microsoft.com/office/powerpoint/2010/main" val="3739806574"/>
-      </p:ext>
-    </p:extLst>
   </p:cSld>
   <p:clrMapOvr>
     <a:masterClrMapping/>
@@ -17930,10 +17781,13 @@
           <a:p>
             <a:r>
               <a:rPr lang="en-US" dirty="0" smtClean="0">
-                <a:latin typeface="Times New Roman" pitchFamily="18" charset="0"/>
+                <a:latin typeface="Times New Roman" panose="02020603050405020304" pitchFamily="18" charset="0"/>
               </a:rPr>
               <a:t>Static Unit Testing (Code Review)</a:t>
             </a:r>
+            <a:endParaRPr lang="en-US" dirty="0" smtClean="0">
+              <a:latin typeface="Times New Roman" panose="02020603050405020304" pitchFamily="18" charset="0"/>
+            </a:endParaRPr>
           </a:p>
         </p:txBody>
       </p:sp>
@@ -17962,34 +17816,46 @@
           <a:p>
             <a:r>
               <a:rPr lang="en-US" dirty="0" smtClean="0">
-                <a:latin typeface="Times New Roman" pitchFamily="18" charset="0"/>
+                <a:latin typeface="Times New Roman" panose="02020603050405020304" pitchFamily="18" charset="0"/>
               </a:rPr>
               <a:t>The number of lines of code (LOC) reviewed per hour</a:t>
             </a:r>
+            <a:endParaRPr lang="en-US" dirty="0" smtClean="0">
+              <a:latin typeface="Times New Roman" panose="02020603050405020304" pitchFamily="18" charset="0"/>
+            </a:endParaRPr>
           </a:p>
           <a:p>
             <a:r>
               <a:rPr lang="en-US" dirty="0" smtClean="0">
-                <a:latin typeface="Times New Roman" pitchFamily="18" charset="0"/>
+                <a:latin typeface="Times New Roman" panose="02020603050405020304" pitchFamily="18" charset="0"/>
               </a:rPr>
               <a:t>The number of CRs generated per thousand lines of code (KLOC)</a:t>
             </a:r>
+            <a:endParaRPr lang="en-US" dirty="0" smtClean="0">
+              <a:latin typeface="Times New Roman" panose="02020603050405020304" pitchFamily="18" charset="0"/>
+            </a:endParaRPr>
           </a:p>
           <a:p>
             <a:r>
               <a:rPr lang="en-US" dirty="0" smtClean="0">
-                <a:latin typeface="Times New Roman" pitchFamily="18" charset="0"/>
+                <a:latin typeface="Times New Roman" panose="02020603050405020304" pitchFamily="18" charset="0"/>
               </a:rPr>
               <a:t>The number of CRs generated per hour</a:t>
             </a:r>
+            <a:endParaRPr lang="en-US" dirty="0" smtClean="0">
+              <a:latin typeface="Times New Roman" panose="02020603050405020304" pitchFamily="18" charset="0"/>
+            </a:endParaRPr>
           </a:p>
           <a:p>
             <a:r>
               <a:rPr lang="en-US" dirty="0" smtClean="0">
-                <a:latin typeface="Times New Roman" pitchFamily="18" charset="0"/>
+                <a:latin typeface="Times New Roman" panose="02020603050405020304" pitchFamily="18" charset="0"/>
               </a:rPr>
               <a:t>The total number of hours spend on code review process</a:t>
             </a:r>
+            <a:endParaRPr lang="en-US" dirty="0" smtClean="0">
+              <a:latin typeface="Times New Roman" panose="02020603050405020304" pitchFamily="18" charset="0"/>
+            </a:endParaRPr>
           </a:p>
         </p:txBody>
       </p:sp>
@@ -18010,8 +17876,6 @@
           <a:p>
             <a:fld id="{7E892C6B-B405-4D0C-ADEF-29DC9EC4842C}" type="slidenum">
               <a:rPr lang="en-US"/>
-              <a:pPr/>
-              <a:t>8</a:t>
             </a:fld>
             <a:endParaRPr lang="en-US"/>
           </a:p>
@@ -18073,15 +17937,15 @@
               </a:rPr>
               <a:t>The following metrics can be collected from a code review:</a:t>
             </a:r>
+            <a:endParaRPr lang="en-US" sz="2400" dirty="0">
+              <a:solidFill>
+                <a:srgbClr val="000000"/>
+              </a:solidFill>
+            </a:endParaRPr>
           </a:p>
         </p:txBody>
       </p:sp>
     </p:spTree>
-    <p:extLst>
-      <p:ext uri="{BB962C8B-B14F-4D97-AF65-F5344CB8AC3E}">
-        <p14:creationId xmlns:p14="http://schemas.microsoft.com/office/powerpoint/2010/main" val="4058223752"/>
-      </p:ext>
-    </p:extLst>
   </p:cSld>
   <p:clrMapOvr>
     <a:masterClrMapping/>
@@ -18138,10 +18002,13 @@
           <a:p>
             <a:r>
               <a:rPr lang="en-US" dirty="0" smtClean="0">
-                <a:latin typeface="Times New Roman" pitchFamily="18" charset="0"/>
+                <a:latin typeface="Times New Roman" panose="02020603050405020304" pitchFamily="18" charset="0"/>
               </a:rPr>
               <a:t>Static Unit Testing (Code Review)</a:t>
             </a:r>
+            <a:endParaRPr lang="en-US" dirty="0" smtClean="0">
+              <a:latin typeface="Times New Roman" panose="02020603050405020304" pitchFamily="18" charset="0"/>
+            </a:endParaRPr>
           </a:p>
         </p:txBody>
       </p:sp>
@@ -18169,72 +18036,96 @@
           <a:lstStyle/>
           <a:p>
             <a:r>
-              <a:rPr lang="en-US" sz="2000" dirty="0">
-                <a:latin typeface="Times New Roman" pitchFamily="18" charset="0"/>
+              <a:rPr lang="en-US" dirty="0">
+                <a:latin typeface="Times New Roman" panose="02020603050405020304" pitchFamily="18" charset="0"/>
               </a:rPr>
               <a:t>The code review methodology can be applicable to review other documents</a:t>
             </a:r>
-          </a:p>
-          <a:p>
-            <a:r>
-              <a:rPr lang="en-US" sz="2000" dirty="0">
-                <a:latin typeface="Times New Roman" pitchFamily="18" charset="0"/>
+            <a:endParaRPr lang="en-US" dirty="0">
+              <a:latin typeface="Times New Roman" panose="02020603050405020304" pitchFamily="18" charset="0"/>
+            </a:endParaRPr>
+          </a:p>
+          <a:p>
+            <a:r>
+              <a:rPr lang="en-US" dirty="0">
+                <a:latin typeface="Times New Roman" panose="02020603050405020304" pitchFamily="18" charset="0"/>
               </a:rPr>
               <a:t>Five different types of system documents are generated by engineering department</a:t>
             </a:r>
+            <a:endParaRPr lang="en-US" dirty="0">
+              <a:latin typeface="Times New Roman" panose="02020603050405020304" pitchFamily="18" charset="0"/>
+            </a:endParaRPr>
           </a:p>
           <a:p>
             <a:pPr lvl="1"/>
             <a:r>
-              <a:rPr lang="en-US" sz="1800" dirty="0">
-                <a:latin typeface="Times New Roman" pitchFamily="18" charset="0"/>
+              <a:rPr lang="en-US" dirty="0">
+                <a:latin typeface="Times New Roman" panose="02020603050405020304" pitchFamily="18" charset="0"/>
               </a:rPr>
               <a:t>Requirement</a:t>
             </a:r>
+            <a:endParaRPr lang="en-US" dirty="0">
+              <a:latin typeface="Times New Roman" panose="02020603050405020304" pitchFamily="18" charset="0"/>
+            </a:endParaRPr>
           </a:p>
           <a:p>
             <a:pPr lvl="1"/>
             <a:r>
-              <a:rPr lang="en-US" sz="1800" dirty="0">
-                <a:latin typeface="Times New Roman" pitchFamily="18" charset="0"/>
+              <a:rPr lang="en-US" dirty="0">
+                <a:latin typeface="Times New Roman" panose="02020603050405020304" pitchFamily="18" charset="0"/>
               </a:rPr>
               <a:t>Functional Specification</a:t>
             </a:r>
+            <a:endParaRPr lang="en-US" dirty="0">
+              <a:latin typeface="Times New Roman" panose="02020603050405020304" pitchFamily="18" charset="0"/>
+            </a:endParaRPr>
           </a:p>
           <a:p>
             <a:pPr lvl="1"/>
             <a:r>
-              <a:rPr lang="en-US" sz="1800" dirty="0">
-                <a:latin typeface="Times New Roman" pitchFamily="18" charset="0"/>
+              <a:rPr lang="en-US" dirty="0">
+                <a:latin typeface="Times New Roman" panose="02020603050405020304" pitchFamily="18" charset="0"/>
               </a:rPr>
               <a:t>High-level Design</a:t>
             </a:r>
+            <a:endParaRPr lang="en-US" dirty="0">
+              <a:latin typeface="Times New Roman" panose="02020603050405020304" pitchFamily="18" charset="0"/>
+            </a:endParaRPr>
           </a:p>
           <a:p>
             <a:pPr lvl="1"/>
             <a:r>
-              <a:rPr lang="en-US" sz="1800" dirty="0">
-                <a:latin typeface="Times New Roman" pitchFamily="18" charset="0"/>
+              <a:rPr lang="en-US" dirty="0">
+                <a:latin typeface="Times New Roman" panose="02020603050405020304" pitchFamily="18" charset="0"/>
               </a:rPr>
               <a:t>Low-level Design</a:t>
             </a:r>
+            <a:endParaRPr lang="en-US" dirty="0">
+              <a:latin typeface="Times New Roman" panose="02020603050405020304" pitchFamily="18" charset="0"/>
+            </a:endParaRPr>
           </a:p>
           <a:p>
             <a:pPr lvl="1"/>
             <a:r>
-              <a:rPr lang="en-US" sz="1800" dirty="0">
-                <a:latin typeface="Times New Roman" pitchFamily="18" charset="0"/>
+              <a:rPr lang="en-US" dirty="0">
+                <a:latin typeface="Times New Roman" panose="02020603050405020304" pitchFamily="18" charset="0"/>
               </a:rPr>
               <a:t>code</a:t>
             </a:r>
-          </a:p>
-          <a:p>
-            <a:r>
-              <a:rPr lang="en-US" sz="2000" dirty="0">
-                <a:latin typeface="Times New Roman" pitchFamily="18" charset="0"/>
+            <a:endParaRPr lang="en-US" dirty="0">
+              <a:latin typeface="Times New Roman" panose="02020603050405020304" pitchFamily="18" charset="0"/>
+            </a:endParaRPr>
+          </a:p>
+          <a:p>
+            <a:r>
+              <a:rPr lang="en-US" dirty="0">
+                <a:latin typeface="Times New Roman" panose="02020603050405020304" pitchFamily="18" charset="0"/>
               </a:rPr>
               <a:t>In addition installation, user, and trouble shooting guides are developed by technical documentation group </a:t>
             </a:r>
+            <a:endParaRPr lang="en-US" dirty="0">
+              <a:latin typeface="Times New Roman" panose="02020603050405020304" pitchFamily="18" charset="0"/>
+            </a:endParaRPr>
           </a:p>
         </p:txBody>
       </p:sp>
@@ -18255,8 +18146,6 @@
           <a:p>
             <a:fld id="{A769F73A-1463-42AE-A1A9-89F99D3317E6}" type="slidenum">
               <a:rPr lang="en-US"/>
-              <a:pPr/>
-              <a:t>9</a:t>
             </a:fld>
             <a:endParaRPr lang="en-US"/>
           </a:p>
@@ -18273,7 +18162,7 @@
           </p:nvPr>
         </p:nvPicPr>
         <p:blipFill>
-          <a:blip r:embed="rId3"/>
+          <a:blip r:embed="rId1"/>
           <a:srcRect/>
           <a:stretch>
             <a:fillRect/>
@@ -18281,17 +18170,12 @@
         </p:blipFill>
         <p:spPr>
           <a:xfrm>
-            <a:off x="2053884" y="5018649"/>
+            <a:off x="2053884" y="4569069"/>
             <a:ext cx="7848600" cy="1958975"/>
           </a:xfrm>
         </p:spPr>
       </p:pic>
     </p:spTree>
-    <p:extLst>
-      <p:ext uri="{BB962C8B-B14F-4D97-AF65-F5344CB8AC3E}">
-        <p14:creationId xmlns:p14="http://schemas.microsoft.com/office/powerpoint/2010/main" val="1697455108"/>
-      </p:ext>
-    </p:extLst>
   </p:cSld>
   <p:clrMapOvr>
     <a:masterClrMapping/>
@@ -18350,7 +18234,7 @@
     </a:clrScheme>
     <a:fontScheme name="Wisp">
       <a:majorFont>
-        <a:latin typeface="Century Gothic" panose="020B0502020202020204"/>
+        <a:latin typeface="Century Gothic"/>
         <a:ea typeface=""/>
         <a:cs typeface=""/>
         <a:font script="Jpan" typeface="メイリオ"/>
@@ -18385,7 +18269,7 @@
         <a:font script="Geor" typeface="Sylfaen"/>
       </a:majorFont>
       <a:minorFont>
-        <a:latin typeface="Century Gothic" panose="020B0502020202020204"/>
+        <a:latin typeface="Century Gothic"/>
         <a:ea typeface=""/>
         <a:cs typeface=""/>
         <a:font script="Jpan" typeface="メイリオ"/>
@@ -18540,11 +18424,9 @@
       </a:bgFillStyleLst>
     </a:fmtScheme>
   </a:themeElements>
-  <a:objectDefaults/>
-  <a:extraClrSchemeLst/>
   <a:extLst>
     <a:ext uri="{05A4C25C-085E-4340-85A3-A5531E510DB2}">
-      <thm15:themeFamily xmlns:thm15="http://schemas.microsoft.com/office/thememl/2012/main" name="Wisp" id="{7CB32D59-10C0-40DD-B7BD-2E94284A981C}" vid="{24B1A44C-C006-48B2-A4D7-E5549B3D8CD4}"/>
+      <thm15:themeFamily xmlns:thm15="http://schemas.microsoft.com/office/thememl/2012/main" name="Office Theme" id="{62F939B6-93AF-4DB8-9C6B-D6C7DFDC589F}" vid="{4A3C46E8-61CC-4603-A589-7422A47A8E4A}"/>
     </a:ext>
   </a:extLst>
 </a:theme>
@@ -18593,7 +18475,7 @@
     </a:clrScheme>
     <a:fontScheme name="Office">
       <a:majorFont>
-        <a:latin typeface="Calibri Light" panose="020F0302020204030204"/>
+        <a:latin typeface="Calibri Light"/>
         <a:ea typeface=""/>
         <a:cs typeface=""/>
         <a:font script="Jpan" typeface="ＭＳ Ｐゴシック"/>
@@ -18628,7 +18510,7 @@
         <a:font script="Geor" typeface="Sylfaen"/>
       </a:majorFont>
       <a:minorFont>
-        <a:latin typeface="Calibri" panose="020F0502020204030204"/>
+        <a:latin typeface="Calibri"/>
         <a:ea typeface=""/>
         <a:cs typeface=""/>
         <a:font script="Jpan" typeface="ＭＳ Ｐゴシック"/>
@@ -18801,8 +18683,6 @@
       </a:bgFillStyleLst>
     </a:fmtScheme>
   </a:themeElements>
-  <a:objectDefaults/>
-  <a:extraClrSchemeLst/>
   <a:extLst>
     <a:ext uri="{05A4C25C-085E-4340-85A3-A5531E510DB2}">
       <thm15:themeFamily xmlns:thm15="http://schemas.microsoft.com/office/thememl/2012/main" name="Office Theme" id="{62F939B6-93AF-4DB8-9C6B-D6C7DFDC589F}" vid="{4A3C46E8-61CC-4603-A589-7422A47A8E4A}"/>
